--- a/prompter-moscow/presentation/prompter-konferenciya-2026.pptx
+++ b/prompter-moscow/presentation/prompter-konferenciya-2026.pptx
@@ -20,7 +20,6 @@
     <p:sldId id="268" r:id="rId20"/>
     <p:sldId id="269" r:id="rId21"/>
     <p:sldId id="270" r:id="rId22"/>
-    <p:sldId id="271" r:id="rId23"/>
   </p:sldIdLst>
   <p:sldSz cx="9144000" cy="5143500" type="screen4x3"/>
   <p:notesSz cx="6858000" cy="9144000"/>
@@ -613,76 +612,6 @@
 </file>
 
 <file path=ppt/notesSlides/notesSlide3.xml><?xml version="1.0" encoding="utf-8"?>
-<p:notes xmlns:a="http://schemas.openxmlformats.org/drawingml/2006/main" xmlns:p="http://schemas.openxmlformats.org/presentationml/2006/main" xmlns:r="http://schemas.openxmlformats.org/officeDocument/2006/relationships">
-  <p:cSld>
-    <p:spTree>
-      <p:nvGrpSpPr>
-        <p:cNvPr id="1" name=""/>
-        <p:cNvGrpSpPr/>
-        <p:nvPr/>
-      </p:nvGrpSpPr>
-      <p:grpSpPr>
-        <a:xfrm>
-          <a:off x="0" y="0"/>
-          <a:ext cx="0" cy="0"/>
-          <a:chOff x="0" y="0"/>
-          <a:chExt cx="0" cy="0"/>
-        </a:xfrm>
-      </p:grpSpPr>
-      <p:sp>
-        <p:nvSpPr>
-          <p:cNvPr id="2" name="Slide Image Placeholder 1"/>
-          <p:cNvSpPr>
-            <a:spLocks noGrp="1"/>
-          </p:cNvSpPr>
-          <p:nvPr>
-            <p:ph type="sldImg" idx="2"/>
-          </p:nvPr>
-        </p:nvSpPr>
-        <p:spPr/>
-      </p:sp>
-      <p:sp>
-        <p:nvSpPr>
-          <p:cNvPr id="3" name="Notes Placeholder 2"/>
-          <p:cNvSpPr>
-            <a:spLocks noGrp="1"/>
-          </p:cNvSpPr>
-          <p:nvPr>
-            <p:ph type="body" idx="3" sz="quarter"/>
-          </p:nvPr>
-        </p:nvSpPr>
-        <p:spPr/>
-        <p:txBody>
-          <a:bodyPr/>
-          <a:lstStyle/>
-          <a:p>
-            <a:r>
-              <a:t>Повтор тем в конце выступления. Контакты — на следующем слайде.</a:t>
-            </a:r>
-          </a:p>
-        </p:txBody>
-      </p:sp>
-      <p:sp>
-        <p:nvSpPr>
-          <p:cNvPr id="4" name="Slide Number Placeholder 3"/>
-          <p:cNvSpPr>
-            <a:spLocks noGrp="1"/>
-          </p:cNvSpPr>
-          <p:nvPr>
-            <p:ph type="sldNum" idx="5" sz="quarter"/>
-          </p:nvPr>
-        </p:nvSpPr>
-        <p:spPr/>
-      </p:sp>
-    </p:spTree>
-  </p:cSld>
-  <p:clrMapOvr>
-    <a:masterClrMapping/>
-  </p:clrMapOvr>
-</p:notes>
-</file>
-
-<file path=ppt/notesSlides/notesSlide4.xml><?xml version="1.0" encoding="utf-8"?>
 <p:notes xmlns:a="http://schemas.openxmlformats.org/drawingml/2006/main" xmlns:p="http://schemas.openxmlformats.org/presentationml/2006/main" xmlns:r="http://schemas.openxmlformats.org/officeDocument/2006/relationships">
   <p:cSld>
     <p:spTree>
@@ -5239,656 +5168,6 @@
 </file>
 
 <file path=ppt/slides/slide15.xml><?xml version="1.0" encoding="utf-8"?>
-<p:sld xmlns:a="http://schemas.openxmlformats.org/drawingml/2006/main" xmlns:p="http://schemas.openxmlformats.org/presentationml/2006/main" xmlns:r="http://schemas.openxmlformats.org/officeDocument/2006/relationships">
-  <p:cSld>
-    <p:spTree>
-      <p:nvGrpSpPr>
-        <p:cNvPr id="1" name=""/>
-        <p:cNvGrpSpPr/>
-        <p:nvPr/>
-      </p:nvGrpSpPr>
-      <p:grpSpPr/>
-      <p:pic>
-        <p:nvPicPr>
-          <p:cNvPr id="2" name="Picture 1" descr="orig_tariff-bg.jpg"/>
-          <p:cNvPicPr>
-            <a:picLocks noChangeAspect="1"/>
-          </p:cNvPicPr>
-          <p:nvPr/>
-        </p:nvPicPr>
-        <p:blipFill>
-          <a:blip r:embed="rId2"/>
-          <a:stretch>
-            <a:fillRect/>
-          </a:stretch>
-        </p:blipFill>
-        <p:spPr>
-          <a:xfrm>
-            <a:off x="0" y="0"/>
-            <a:ext cx="9144000" cy="5143500"/>
-          </a:xfrm>
-          <a:prstGeom prst="rect">
-            <a:avLst/>
-          </a:prstGeom>
-        </p:spPr>
-      </p:pic>
-      <p:pic>
-        <p:nvPicPr>
-          <p:cNvPr id="3" name="Picture 2" descr="orig_logo.png"/>
-          <p:cNvPicPr>
-            <a:picLocks noChangeAspect="1"/>
-          </p:cNvPicPr>
-          <p:nvPr/>
-        </p:nvPicPr>
-        <p:blipFill>
-          <a:blip r:embed="rId3"/>
-          <a:stretch>
-            <a:fillRect/>
-          </a:stretch>
-        </p:blipFill>
-        <p:spPr>
-          <a:xfrm>
-            <a:off x="384048" y="237744"/>
-            <a:ext cx="1600200" cy="346710"/>
-          </a:xfrm>
-          <a:prstGeom prst="rect">
-            <a:avLst/>
-          </a:prstGeom>
-        </p:spPr>
-      </p:pic>
-      <p:sp>
-        <p:nvSpPr>
-          <p:cNvPr id="4" name="TextBox 3"/>
-          <p:cNvSpPr txBox="1"/>
-          <p:nvPr/>
-        </p:nvSpPr>
-        <p:spPr>
-          <a:xfrm>
-            <a:off x="4572000" y="274320"/>
-            <a:ext cx="4187952" cy="365760"/>
-          </a:xfrm>
-          <a:prstGeom prst="rect">
-            <a:avLst/>
-          </a:prstGeom>
-          <a:noFill/>
-        </p:spPr>
-        <p:txBody>
-          <a:bodyPr wrap="square" lIns="0" rIns="0" tIns="0" bIns="0">
-            <a:spAutoFit/>
-          </a:bodyPr>
-          <a:lstStyle/>
-          <a:p>
-            <a:pPr algn="r"/>
-            <a:r>
-              <a:rPr sz="1200" b="1" spc="200">
-                <a:solidFill>
-                  <a:srgbClr val="F85800"/>
-                </a:solidFill>
-                <a:latin typeface="Arial"/>
-              </a:rPr>
-              <a:t>ТЕМЫ ВЫСТУПЛЕНИЯ</a:t>
-            </a:r>
-          </a:p>
-        </p:txBody>
-      </p:sp>
-      <p:sp>
-        <p:nvSpPr>
-          <p:cNvPr id="5" name="TextBox 4"/>
-          <p:cNvSpPr txBox="1"/>
-          <p:nvPr/>
-        </p:nvSpPr>
-        <p:spPr>
-          <a:xfrm>
-            <a:off x="548640" y="841248"/>
-            <a:ext cx="8046720" cy="548640"/>
-          </a:xfrm>
-          <a:prstGeom prst="rect">
-            <a:avLst/>
-          </a:prstGeom>
-          <a:noFill/>
-        </p:spPr>
-        <p:txBody>
-          <a:bodyPr wrap="square" lIns="0" rIns="0" tIns="0" bIns="0">
-            <a:spAutoFit/>
-          </a:bodyPr>
-          <a:lstStyle/>
-          <a:p>
-            <a:pPr algn="ctr"/>
-            <a:r>
-              <a:rPr sz="3400" b="1" spc="400">
-                <a:solidFill>
-                  <a:srgbClr val="FFFFFF"/>
-                </a:solidFill>
-                <a:latin typeface="Arial"/>
-              </a:rPr>
-              <a:t>ПРОМПТЕР</a:t>
-            </a:r>
-          </a:p>
-        </p:txBody>
-      </p:sp>
-      <p:sp>
-        <p:nvSpPr>
-          <p:cNvPr id="6" name="TextBox 5"/>
-          <p:cNvSpPr txBox="1"/>
-          <p:nvPr/>
-        </p:nvSpPr>
-        <p:spPr>
-          <a:xfrm>
-            <a:off x="548640" y="1335024"/>
-            <a:ext cx="8046720" cy="365760"/>
-          </a:xfrm>
-          <a:prstGeom prst="rect">
-            <a:avLst/>
-          </a:prstGeom>
-          <a:noFill/>
-        </p:spPr>
-        <p:txBody>
-          <a:bodyPr wrap="square" lIns="0" rIns="0" tIns="0" bIns="0">
-            <a:spAutoFit/>
-          </a:bodyPr>
-          <a:lstStyle/>
-          <a:p>
-            <a:pPr algn="ctr"/>
-            <a:r>
-              <a:rPr sz="1900" b="1">
-                <a:solidFill>
-                  <a:srgbClr val="FFFFFF"/>
-                </a:solidFill>
-                <a:latin typeface="Arial"/>
-              </a:rPr>
-              <a:t>Темы для конференции</a:t>
-            </a:r>
-          </a:p>
-        </p:txBody>
-      </p:sp>
-      <p:sp>
-        <p:nvSpPr>
-          <p:cNvPr id="7" name="Rectangle 6"/>
-          <p:cNvSpPr/>
-          <p:nvPr/>
-        </p:nvSpPr>
-        <p:spPr>
-          <a:xfrm>
-            <a:off x="4160520" y="1755648"/>
-            <a:ext cx="822960" cy="32004"/>
-          </a:xfrm>
-          <a:prstGeom prst="rect">
-            <a:avLst/>
-          </a:prstGeom>
-          <a:solidFill>
-            <a:srgbClr val="F85800"/>
-          </a:solidFill>
-          <a:ln>
-            <a:noFill/>
-          </a:ln>
-          <a:effectLst/>
-        </p:spPr>
-        <p:style>
-          <a:lnRef idx="1">
-            <a:schemeClr val="accent1"/>
-          </a:lnRef>
-          <a:fillRef idx="3">
-            <a:schemeClr val="accent1"/>
-          </a:fillRef>
-          <a:effectRef idx="2">
-            <a:schemeClr val="accent1"/>
-          </a:effectRef>
-          <a:fontRef idx="minor">
-            <a:schemeClr val="lt1"/>
-          </a:fontRef>
-        </p:style>
-        <p:txBody>
-          <a:bodyPr rtlCol="0" anchor="ctr"/>
-          <a:lstStyle/>
-          <a:p>
-            <a:pPr algn="ctr"/>
-          </a:p>
-        </p:txBody>
-      </p:sp>
-      <p:sp>
-        <p:nvSpPr>
-          <p:cNvPr id="8" name="TextBox 7"/>
-          <p:cNvSpPr txBox="1"/>
-          <p:nvPr/>
-        </p:nvSpPr>
-        <p:spPr>
-          <a:xfrm>
-            <a:off x="685800" y="1883664"/>
-            <a:ext cx="7772400" cy="457200"/>
-          </a:xfrm>
-          <a:prstGeom prst="rect">
-            <a:avLst/>
-          </a:prstGeom>
-          <a:noFill/>
-        </p:spPr>
-        <p:txBody>
-          <a:bodyPr wrap="square" lIns="0" rIns="0" tIns="0" bIns="0">
-            <a:spAutoFit/>
-          </a:bodyPr>
-          <a:lstStyle/>
-          <a:p>
-            <a:pPr algn="ctr"/>
-            <a:r>
-              <a:rPr sz="1050" b="0">
-                <a:solidFill>
-                  <a:srgbClr val="C9BAB0"/>
-                </a:solidFill>
-                <a:latin typeface="Arial"/>
-              </a:rPr>
-              <a:t>Что даёт предпринимателю полный AI-цикл: исследование, стратегия, генерация текстов, картинок и видео,</a:t>
-            </a:r>
-          </a:p>
-          <a:p>
-            <a:pPr algn="ctr">
-              <a:spcBef>
-                <a:spcPts val="200"/>
-              </a:spcBef>
-            </a:pPr>
-            <a:r>
-              <a:rPr sz="1050" b="0">
-                <a:solidFill>
-                  <a:srgbClr val="C9BAB0"/>
-                </a:solidFill>
-                <a:latin typeface="Arial"/>
-              </a:rPr>
-              <a:t>автоматическая публикация на 6+ площадках. Продвижение в SEO и GEO.</a:t>
-            </a:r>
-          </a:p>
-        </p:txBody>
-      </p:sp>
-      <p:sp>
-        <p:nvSpPr>
-          <p:cNvPr id="9" name="Rounded Rectangle 8"/>
-          <p:cNvSpPr/>
-          <p:nvPr/>
-        </p:nvSpPr>
-        <p:spPr>
-          <a:xfrm>
-            <a:off x="548640" y="2286000"/>
-            <a:ext cx="2487168" cy="1554480"/>
-          </a:xfrm>
-          <a:prstGeom prst="roundRect">
-            <a:avLst>
-              <a:gd name="adj" fmla="val 10000"/>
-            </a:avLst>
-          </a:prstGeom>
-          <a:solidFill>
-            <a:srgbClr val="120A06"/>
-          </a:solidFill>
-          <a:ln w="19050">
-            <a:solidFill>
-              <a:srgbClr val="F85800"/>
-            </a:solidFill>
-          </a:ln>
-          <a:effectLst/>
-        </p:spPr>
-        <p:style>
-          <a:lnRef idx="1">
-            <a:schemeClr val="accent1"/>
-          </a:lnRef>
-          <a:fillRef idx="3">
-            <a:schemeClr val="accent1"/>
-          </a:fillRef>
-          <a:effectRef idx="2">
-            <a:schemeClr val="accent1"/>
-          </a:effectRef>
-          <a:fontRef idx="minor">
-            <a:schemeClr val="lt1"/>
-          </a:fontRef>
-        </p:style>
-        <p:txBody>
-          <a:bodyPr rtlCol="0" anchor="ctr" wrap="square" lIns="128016" rIns="128016" tIns="54864" bIns="54864"/>
-          <a:lstStyle/>
-          <a:p>
-            <a:pPr algn="l">
-              <a:lnSpc>
-                <a:spcPct val="95000"/>
-              </a:lnSpc>
-            </a:pPr>
-            <a:r>
-              <a:rPr sz="1800" b="1" spc="150">
-                <a:solidFill>
-                  <a:srgbClr val="F85800"/>
-                </a:solidFill>
-                <a:latin typeface="Arial"/>
-              </a:rPr>
-              <a:t>01</a:t>
-            </a:r>
-          </a:p>
-          <a:p>
-            <a:pPr algn="l">
-              <a:lnSpc>
-                <a:spcPct val="95000"/>
-              </a:lnSpc>
-              <a:spcBef>
-                <a:spcPts val="500"/>
-              </a:spcBef>
-            </a:pPr>
-            <a:r>
-              <a:rPr sz="1100" b="1" spc="50">
-                <a:solidFill>
-                  <a:srgbClr val="FFFFFF"/>
-                </a:solidFill>
-                <a:latin typeface="Arial"/>
-              </a:rPr>
-              <a:t>КАК НЕ ТРАТИТЬ ВРЕМЯ
-НА СММ</a:t>
-            </a:r>
-          </a:p>
-          <a:p>
-            <a:pPr algn="l">
-              <a:lnSpc>
-                <a:spcPct val="95000"/>
-              </a:lnSpc>
-              <a:spcBef>
-                <a:spcPts val="600"/>
-              </a:spcBef>
-            </a:pPr>
-            <a:r>
-              <a:rPr sz="850" b="0">
-                <a:solidFill>
-                  <a:srgbClr val="9A8C84"/>
-                </a:solidFill>
-                <a:latin typeface="Arial"/>
-              </a:rPr>
-              <a:t>Контент-заводы есть у всех.
-Но процессом управляет человек:
-проверки, правки, публикация.
-Мы отдаём весь цикл ИИ.</a:t>
-            </a:r>
-          </a:p>
-        </p:txBody>
-      </p:sp>
-      <p:sp>
-        <p:nvSpPr>
-          <p:cNvPr id="10" name="Rounded Rectangle 9"/>
-          <p:cNvSpPr/>
-          <p:nvPr/>
-        </p:nvSpPr>
-        <p:spPr>
-          <a:xfrm>
-            <a:off x="3328416" y="2286000"/>
-            <a:ext cx="2487168" cy="1554480"/>
-          </a:xfrm>
-          <a:prstGeom prst="roundRect">
-            <a:avLst>
-              <a:gd name="adj" fmla="val 10000"/>
-            </a:avLst>
-          </a:prstGeom>
-          <a:solidFill>
-            <a:srgbClr val="120A06"/>
-          </a:solidFill>
-          <a:ln w="19050">
-            <a:solidFill>
-              <a:srgbClr val="F85800"/>
-            </a:solidFill>
-          </a:ln>
-          <a:effectLst/>
-        </p:spPr>
-        <p:style>
-          <a:lnRef idx="1">
-            <a:schemeClr val="accent1"/>
-          </a:lnRef>
-          <a:fillRef idx="3">
-            <a:schemeClr val="accent1"/>
-          </a:fillRef>
-          <a:effectRef idx="2">
-            <a:schemeClr val="accent1"/>
-          </a:effectRef>
-          <a:fontRef idx="minor">
-            <a:schemeClr val="lt1"/>
-          </a:fontRef>
-        </p:style>
-        <p:txBody>
-          <a:bodyPr rtlCol="0" anchor="ctr" wrap="square" lIns="128016" rIns="128016" tIns="54864" bIns="54864"/>
-          <a:lstStyle/>
-          <a:p>
-            <a:pPr algn="l">
-              <a:lnSpc>
-                <a:spcPct val="95000"/>
-              </a:lnSpc>
-            </a:pPr>
-            <a:r>
-              <a:rPr sz="1800" b="1" spc="150">
-                <a:solidFill>
-                  <a:srgbClr val="F85800"/>
-                </a:solidFill>
-                <a:latin typeface="Arial"/>
-              </a:rPr>
-              <a:t>02</a:t>
-            </a:r>
-          </a:p>
-          <a:p>
-            <a:pPr algn="l">
-              <a:lnSpc>
-                <a:spcPct val="95000"/>
-              </a:lnSpc>
-              <a:spcBef>
-                <a:spcPts val="500"/>
-              </a:spcBef>
-            </a:pPr>
-            <a:r>
-              <a:rPr sz="1100" b="1" spc="50">
-                <a:solidFill>
-                  <a:srgbClr val="FFFFFF"/>
-                </a:solidFill>
-                <a:latin typeface="Arial"/>
-              </a:rPr>
-              <a:t>КАК ЭКОНОМИТЬ
-ОТ 70 000 ₽ В МЕСЯЦ</a:t>
-            </a:r>
-          </a:p>
-          <a:p>
-            <a:pPr algn="l">
-              <a:lnSpc>
-                <a:spcPct val="95000"/>
-              </a:lnSpc>
-              <a:spcBef>
-                <a:spcPts val="600"/>
-              </a:spcBef>
-            </a:pPr>
-            <a:r>
-              <a:rPr sz="850" b="0">
-                <a:solidFill>
-                  <a:srgbClr val="9A8C84"/>
-                </a:solidFill>
-                <a:latin typeface="Arial"/>
-              </a:rPr>
-              <a:t>Без агентства, без токенов
-и борьбы с блокировками.
-Готовый сервис за фиксированную
-плату при сравнимом эффекте.</a:t>
-            </a:r>
-          </a:p>
-        </p:txBody>
-      </p:sp>
-      <p:sp>
-        <p:nvSpPr>
-          <p:cNvPr id="11" name="Rounded Rectangle 10"/>
-          <p:cNvSpPr/>
-          <p:nvPr/>
-        </p:nvSpPr>
-        <p:spPr>
-          <a:xfrm>
-            <a:off x="6108192" y="2286000"/>
-            <a:ext cx="2487168" cy="1554480"/>
-          </a:xfrm>
-          <a:prstGeom prst="roundRect">
-            <a:avLst>
-              <a:gd name="adj" fmla="val 10000"/>
-            </a:avLst>
-          </a:prstGeom>
-          <a:solidFill>
-            <a:srgbClr val="120A06"/>
-          </a:solidFill>
-          <a:ln w="19050">
-            <a:solidFill>
-              <a:srgbClr val="F85800"/>
-            </a:solidFill>
-          </a:ln>
-          <a:effectLst/>
-        </p:spPr>
-        <p:style>
-          <a:lnRef idx="1">
-            <a:schemeClr val="accent1"/>
-          </a:lnRef>
-          <a:fillRef idx="3">
-            <a:schemeClr val="accent1"/>
-          </a:fillRef>
-          <a:effectRef idx="2">
-            <a:schemeClr val="accent1"/>
-          </a:effectRef>
-          <a:fontRef idx="minor">
-            <a:schemeClr val="lt1"/>
-          </a:fontRef>
-        </p:style>
-        <p:txBody>
-          <a:bodyPr rtlCol="0" anchor="ctr" wrap="square" lIns="128016" rIns="128016" tIns="54864" bIns="54864"/>
-          <a:lstStyle/>
-          <a:p>
-            <a:pPr algn="l">
-              <a:lnSpc>
-                <a:spcPct val="95000"/>
-              </a:lnSpc>
-            </a:pPr>
-            <a:r>
-              <a:rPr sz="1800" b="1" spc="150">
-                <a:solidFill>
-                  <a:srgbClr val="F85800"/>
-                </a:solidFill>
-                <a:latin typeface="Arial"/>
-              </a:rPr>
-              <a:t>03</a:t>
-            </a:r>
-          </a:p>
-          <a:p>
-            <a:pPr algn="l">
-              <a:lnSpc>
-                <a:spcPct val="95000"/>
-              </a:lnSpc>
-              <a:spcBef>
-                <a:spcPts val="500"/>
-              </a:spcBef>
-            </a:pPr>
-            <a:r>
-              <a:rPr sz="1100" b="1" spc="50">
-                <a:solidFill>
-                  <a:srgbClr val="FFFFFF"/>
-                </a:solidFill>
-                <a:latin typeface="Arial"/>
-              </a:rPr>
-              <a:t>КАК ПОПАСТЬ
-В НЕЙРОВЫДАЧУ</a:t>
-            </a:r>
-          </a:p>
-          <a:p>
-            <a:pPr algn="l">
-              <a:lnSpc>
-                <a:spcPct val="95000"/>
-              </a:lnSpc>
-              <a:spcBef>
-                <a:spcPts val="600"/>
-              </a:spcBef>
-            </a:pPr>
-            <a:r>
-              <a:rPr sz="850" b="0">
-                <a:solidFill>
-                  <a:srgbClr val="9A8C84"/>
-                </a:solidFill>
-                <a:latin typeface="Arial"/>
-              </a:rPr>
-              <a:t>GEO стоит доверить ИИ, срок —
-от 3 до 6 месяцев. При экономии
-времени и денег. Маркировать
-ИИ-контент сейчас не требуется.</a:t>
-            </a:r>
-          </a:p>
-        </p:txBody>
-      </p:sp>
-      <p:sp>
-        <p:nvSpPr>
-          <p:cNvPr id="12" name="Rounded Rectangle 11"/>
-          <p:cNvSpPr/>
-          <p:nvPr/>
-        </p:nvSpPr>
-        <p:spPr>
-          <a:xfrm>
-            <a:off x="548640" y="4005072"/>
-            <a:ext cx="8046720" cy="713232"/>
-          </a:xfrm>
-          <a:prstGeom prst="roundRect">
-            <a:avLst>
-              <a:gd name="adj" fmla="val 28000"/>
-            </a:avLst>
-          </a:prstGeom>
-          <a:solidFill>
-            <a:srgbClr val="120A06"/>
-          </a:solidFill>
-          <a:ln w="25400">
-            <a:solidFill>
-              <a:srgbClr val="F85800"/>
-            </a:solidFill>
-          </a:ln>
-          <a:effectLst/>
-        </p:spPr>
-        <p:style>
-          <a:lnRef idx="1">
-            <a:schemeClr val="accent1"/>
-          </a:lnRef>
-          <a:fillRef idx="3">
-            <a:schemeClr val="accent1"/>
-          </a:fillRef>
-          <a:effectRef idx="2">
-            <a:schemeClr val="accent1"/>
-          </a:effectRef>
-          <a:fontRef idx="minor">
-            <a:schemeClr val="lt1"/>
-          </a:fontRef>
-        </p:style>
-        <p:txBody>
-          <a:bodyPr rtlCol="0" anchor="ctr" wrap="square"/>
-          <a:lstStyle/>
-          <a:p>
-            <a:pPr algn="ctr"/>
-            <a:r>
-              <a:rPr sz="1700" b="1" spc="100">
-                <a:solidFill>
-                  <a:srgbClr val="FFFFFF"/>
-                </a:solidFill>
-                <a:latin typeface="Arial"/>
-              </a:rPr>
-              <a:t>ПОЛНЫЙ AI-ЦИКЛ — </a:t>
-            </a:r>
-            <a:r>
-              <a:rPr sz="1700" b="1" spc="100">
-                <a:solidFill>
-                  <a:srgbClr val="F85800"/>
-                </a:solidFill>
-                <a:latin typeface="Arial"/>
-              </a:rPr>
-              <a:t>29 500 ₽ В МЕСЯЦ</a:t>
-            </a:r>
-            <a:r>
-              <a:rPr sz="1700" b="1" spc="100">
-                <a:solidFill>
-                  <a:srgbClr val="FFFFFF"/>
-                </a:solidFill>
-                <a:latin typeface="Arial"/>
-              </a:rPr>
-              <a:t>  →</a:t>
-            </a:r>
-          </a:p>
-        </p:txBody>
-      </p:sp>
-    </p:spTree>
-  </p:cSld>
-  <p:clrMapOvr>
-    <a:masterClrMapping/>
-  </p:clrMapOvr>
-</p:sld>
-</file>
-
-<file path=ppt/slides/slide16.xml><?xml version="1.0" encoding="utf-8"?>
 <p:sld xmlns:a="http://schemas.openxmlformats.org/drawingml/2006/main" xmlns:p="http://schemas.openxmlformats.org/presentationml/2006/main" xmlns:r="http://schemas.openxmlformats.org/officeDocument/2006/relationships">
   <p:cSld>
     <p:spTree>

--- a/prompter-moscow/presentation/prompter-konferenciya-2026.pptx
+++ b/prompter-moscow/presentation/prompter-konferenciya-2026.pptx
@@ -5,12 +5,11 @@
     <p:sldMasterId id="2147483648" r:id="rId1"/>
   </p:sldMasterIdLst>
   <p:sldIdLst>
+    <p:sldId id="261" r:id="rId12"/>
     <p:sldId id="256" r:id="rId7"/>
-    <p:sldId id="257" r:id="rId9"/>
-    <p:sldId id="258" r:id="rId10"/>
-    <p:sldId id="259" r:id="rId11"/>
-    <p:sldId id="260" r:id="rId12"/>
-    <p:sldId id="261" r:id="rId13"/>
+    <p:sldId id="257" r:id="rId8"/>
+    <p:sldId id="258" r:id="rId9"/>
+    <p:sldId id="259" r:id="rId10"/>
     <p:sldId id="262" r:id="rId14"/>
     <p:sldId id="263" r:id="rId15"/>
     <p:sldId id="264" r:id="rId16"/>
@@ -20,8 +19,13 @@
     <p:sldId id="268" r:id="rId20"/>
     <p:sldId id="269" r:id="rId21"/>
     <p:sldId id="270" r:id="rId22"/>
+    <p:sldId id="271" r:id="rId23"/>
+    <p:sldId id="274" r:id="rId26"/>
+    <p:sldId id="272" r:id="rId24"/>
+    <p:sldId id="273" r:id="rId25"/>
+    <p:sldId id="260" r:id="rId11"/>
   </p:sldIdLst>
-  <p:sldSz cx="9144000" cy="5143500" type="screen4x3"/>
+  <p:sldSz cx="12191695" cy="6858000" type="screen4x3"/>
   <p:notesSz cx="6858000" cy="9144000"/>
   <p:defaultTextStyle>
     <a:defPPr>
@@ -516,7 +520,7 @@
           <a:lstStyle/>
           <a:p>
             <a:r>
-              <a:t>Открывающий слайд конференции. Темы и контакты докладчика — обычный текст, правятся прямо в PowerPoint.</a:t>
+              <a:t>Открывающий слайд конференции. Темы и контакты докладчика — обычный текст.</a:t>
             </a:r>
           </a:p>
         </p:txBody>
@@ -587,76 +591,6 @@
           <a:p>
             <a:r>
               <a:t>Цифры — обычный текст: щёлкните и исправьте, если стоимость изменится.</a:t>
-            </a:r>
-          </a:p>
-        </p:txBody>
-      </p:sp>
-      <p:sp>
-        <p:nvSpPr>
-          <p:cNvPr id="4" name="Slide Number Placeholder 3"/>
-          <p:cNvSpPr>
-            <a:spLocks noGrp="1"/>
-          </p:cNvSpPr>
-          <p:nvPr>
-            <p:ph type="sldNum" idx="5" sz="quarter"/>
-          </p:nvPr>
-        </p:nvSpPr>
-        <p:spPr/>
-      </p:sp>
-    </p:spTree>
-  </p:cSld>
-  <p:clrMapOvr>
-    <a:masterClrMapping/>
-  </p:clrMapOvr>
-</p:notes>
-</file>
-
-<file path=ppt/notesSlides/notesSlide3.xml><?xml version="1.0" encoding="utf-8"?>
-<p:notes xmlns:a="http://schemas.openxmlformats.org/drawingml/2006/main" xmlns:p="http://schemas.openxmlformats.org/presentationml/2006/main" xmlns:r="http://schemas.openxmlformats.org/officeDocument/2006/relationships">
-  <p:cSld>
-    <p:spTree>
-      <p:nvGrpSpPr>
-        <p:cNvPr id="1" name=""/>
-        <p:cNvGrpSpPr/>
-        <p:nvPr/>
-      </p:nvGrpSpPr>
-      <p:grpSpPr>
-        <a:xfrm>
-          <a:off x="0" y="0"/>
-          <a:ext cx="0" cy="0"/>
-          <a:chOff x="0" y="0"/>
-          <a:chExt cx="0" cy="0"/>
-        </a:xfrm>
-      </p:grpSpPr>
-      <p:sp>
-        <p:nvSpPr>
-          <p:cNvPr id="2" name="Slide Image Placeholder 1"/>
-          <p:cNvSpPr>
-            <a:spLocks noGrp="1"/>
-          </p:cNvSpPr>
-          <p:nvPr>
-            <p:ph type="sldImg" idx="2"/>
-          </p:nvPr>
-        </p:nvSpPr>
-        <p:spPr/>
-      </p:sp>
-      <p:sp>
-        <p:nvSpPr>
-          <p:cNvPr id="3" name="Notes Placeholder 2"/>
-          <p:cNvSpPr>
-            <a:spLocks noGrp="1"/>
-          </p:cNvSpPr>
-          <p:nvPr>
-            <p:ph type="body" idx="3" sz="quarter"/>
-          </p:nvPr>
-        </p:nvSpPr>
-        <p:spPr/>
-        <p:txBody>
-          <a:bodyPr/>
-          <a:lstStyle/>
-          <a:p>
-            <a:r>
-              <a:t>Контакты с визитки: сайт, мессенджер @geniimoscow и почта. QR ведёт на prompter-ai.moscow. Любую строку можно щёлкнуть и исправить. Строки «Ваш менеджер» в конференционной версии нет.</a:t>
             </a:r>
           </a:p>
         </p:txBody>
@@ -3664,7 +3598,7 @@
       <p:grpSpPr/>
       <p:pic>
         <p:nvPicPr>
-          <p:cNvPr id="2" name="Picture 1" descr="orig_tariff-bg.jpg"/>
+          <p:cNvPr id="2" name="Picture 1" descr="fon.jpg"/>
           <p:cNvPicPr>
             <a:picLocks noChangeAspect="1"/>
           </p:cNvPicPr>
@@ -3679,161 +3613,32 @@
         <p:spPr>
           <a:xfrm>
             <a:off x="0" y="0"/>
-            <a:ext cx="9144000" cy="5143500"/>
+            <a:ext cx="12191695" cy="6858000"/>
           </a:xfrm>
           <a:prstGeom prst="rect">
             <a:avLst/>
           </a:prstGeom>
         </p:spPr>
       </p:pic>
-      <p:pic>
-        <p:nvPicPr>
-          <p:cNvPr id="3" name="Picture 2" descr="orig_logo.png"/>
-          <p:cNvPicPr>
-            <a:picLocks noChangeAspect="1"/>
-          </p:cNvPicPr>
-          <p:nvPr/>
-        </p:nvPicPr>
-        <p:blipFill>
-          <a:blip r:embed="rId3"/>
-          <a:stretch>
-            <a:fillRect/>
-          </a:stretch>
-        </p:blipFill>
-        <p:spPr>
-          <a:xfrm>
-            <a:off x="384048" y="237744"/>
-            <a:ext cx="1600200" cy="346710"/>
-          </a:xfrm>
-          <a:prstGeom prst="rect">
-            <a:avLst/>
-          </a:prstGeom>
-        </p:spPr>
-      </p:pic>
-      <p:sp>
-        <p:nvSpPr>
-          <p:cNvPr id="4" name="TextBox 3"/>
-          <p:cNvSpPr txBox="1"/>
-          <p:nvPr/>
-        </p:nvSpPr>
-        <p:spPr>
-          <a:xfrm>
-            <a:off x="4572000" y="274320"/>
-            <a:ext cx="4187952" cy="365760"/>
+      <p:sp>
+        <p:nvSpPr>
+          <p:cNvPr id="3" name="Rectangle 2"/>
+          <p:cNvSpPr/>
+          <p:nvPr/>
+        </p:nvSpPr>
+        <p:spPr>
+          <a:xfrm>
+            <a:off x="91440" y="91440"/>
+            <a:ext cx="12008815" cy="6675120"/>
           </a:xfrm>
           <a:prstGeom prst="rect">
             <a:avLst/>
           </a:prstGeom>
           <a:noFill/>
-        </p:spPr>
-        <p:txBody>
-          <a:bodyPr wrap="square" lIns="0" rIns="0" tIns="0" bIns="0">
-            <a:spAutoFit/>
-          </a:bodyPr>
-          <a:lstStyle/>
-          <a:p>
-            <a:pPr algn="r"/>
-            <a:r>
-              <a:rPr sz="1200" b="1" spc="200">
-                <a:solidFill>
-                  <a:srgbClr val="F85800"/>
-                </a:solidFill>
-                <a:latin typeface="Arial"/>
-              </a:rPr>
-              <a:t>ТЕМЫ ВЫСТУПЛЕНИЯ</a:t>
-            </a:r>
-          </a:p>
-        </p:txBody>
-      </p:sp>
-      <p:sp>
-        <p:nvSpPr>
-          <p:cNvPr id="5" name="TextBox 4"/>
-          <p:cNvSpPr txBox="1"/>
-          <p:nvPr/>
-        </p:nvSpPr>
-        <p:spPr>
-          <a:xfrm>
-            <a:off x="548640" y="841248"/>
-            <a:ext cx="8046720" cy="548640"/>
-          </a:xfrm>
-          <a:prstGeom prst="rect">
-            <a:avLst/>
-          </a:prstGeom>
-          <a:noFill/>
-        </p:spPr>
-        <p:txBody>
-          <a:bodyPr wrap="square" lIns="0" rIns="0" tIns="0" bIns="0">
-            <a:spAutoFit/>
-          </a:bodyPr>
-          <a:lstStyle/>
-          <a:p>
-            <a:pPr algn="ctr"/>
-            <a:r>
-              <a:rPr sz="3400" b="1" spc="400">
-                <a:solidFill>
-                  <a:srgbClr val="FFFFFF"/>
-                </a:solidFill>
-                <a:latin typeface="Arial"/>
-              </a:rPr>
-              <a:t>ПРОМПТЕР</a:t>
-            </a:r>
-          </a:p>
-        </p:txBody>
-      </p:sp>
-      <p:sp>
-        <p:nvSpPr>
-          <p:cNvPr id="6" name="TextBox 5"/>
-          <p:cNvSpPr txBox="1"/>
-          <p:nvPr/>
-        </p:nvSpPr>
-        <p:spPr>
-          <a:xfrm>
-            <a:off x="548640" y="1335024"/>
-            <a:ext cx="8046720" cy="365760"/>
-          </a:xfrm>
-          <a:prstGeom prst="rect">
-            <a:avLst/>
-          </a:prstGeom>
-          <a:noFill/>
-        </p:spPr>
-        <p:txBody>
-          <a:bodyPr wrap="square" lIns="0" rIns="0" tIns="0" bIns="0">
-            <a:spAutoFit/>
-          </a:bodyPr>
-          <a:lstStyle/>
-          <a:p>
-            <a:pPr algn="ctr"/>
-            <a:r>
-              <a:rPr sz="1900" b="1">
-                <a:solidFill>
-                  <a:srgbClr val="FFFFFF"/>
-                </a:solidFill>
-                <a:latin typeface="Arial"/>
-              </a:rPr>
-              <a:t>Темы для конференции</a:t>
-            </a:r>
-          </a:p>
-        </p:txBody>
-      </p:sp>
-      <p:sp>
-        <p:nvSpPr>
-          <p:cNvPr id="7" name="Rectangle 6"/>
-          <p:cNvSpPr/>
-          <p:nvPr/>
-        </p:nvSpPr>
-        <p:spPr>
-          <a:xfrm>
-            <a:off x="4160520" y="1755648"/>
-            <a:ext cx="822960" cy="32004"/>
-          </a:xfrm>
-          <a:prstGeom prst="rect">
-            <a:avLst/>
-          </a:prstGeom>
-          <a:solidFill>
-            <a:srgbClr val="F85800"/>
-          </a:solidFill>
-          <a:ln>
-            <a:noFill/>
+          <a:ln w="15875">
+            <a:solidFill>
+              <a:srgbClr val="E8611A"/>
+            </a:solidFill>
           </a:ln>
           <a:effectLst/>
         </p:spPr>
@@ -3859,6 +3664,132 @@
           </a:p>
         </p:txBody>
       </p:sp>
+      <p:pic>
+        <p:nvPicPr>
+          <p:cNvPr id="4" name="Picture 3" descr="mark.png"/>
+          <p:cNvPicPr>
+            <a:picLocks noChangeAspect="1"/>
+          </p:cNvPicPr>
+          <p:nvPr/>
+        </p:nvPicPr>
+        <p:blipFill>
+          <a:blip r:embed="rId3"/>
+          <a:stretch>
+            <a:fillRect/>
+          </a:stretch>
+        </p:blipFill>
+        <p:spPr>
+          <a:xfrm>
+            <a:off x="685800" y="457200"/>
+            <a:ext cx="480290" cy="457200"/>
+          </a:xfrm>
+          <a:prstGeom prst="rect">
+            <a:avLst/>
+          </a:prstGeom>
+        </p:spPr>
+      </p:pic>
+      <p:pic>
+        <p:nvPicPr>
+          <p:cNvPr id="5" name="Picture 4" descr="logo.png"/>
+          <p:cNvPicPr>
+            <a:picLocks noChangeAspect="1"/>
+          </p:cNvPicPr>
+          <p:nvPr/>
+        </p:nvPicPr>
+        <p:blipFill>
+          <a:blip r:embed="rId4"/>
+          <a:stretch>
+            <a:fillRect/>
+          </a:stretch>
+        </p:blipFill>
+        <p:spPr>
+          <a:xfrm>
+            <a:off x="11048695" y="457200"/>
+            <a:ext cx="457200" cy="457200"/>
+          </a:xfrm>
+          <a:prstGeom prst="rect">
+            <a:avLst/>
+          </a:prstGeom>
+        </p:spPr>
+      </p:pic>
+      <p:sp>
+        <p:nvSpPr>
+          <p:cNvPr id="6" name="TextBox 5"/>
+          <p:cNvSpPr txBox="1"/>
+          <p:nvPr/>
+        </p:nvSpPr>
+        <p:spPr>
+          <a:xfrm>
+            <a:off x="685800" y="987552"/>
+            <a:ext cx="2743200" cy="201168"/>
+          </a:xfrm>
+          <a:prstGeom prst="rect">
+            <a:avLst/>
+          </a:prstGeom>
+          <a:noFill/>
+        </p:spPr>
+        <p:txBody>
+          <a:bodyPr wrap="square" lIns="0" rIns="0" tIns="0" bIns="0" anchor="t">
+            <a:spAutoFit/>
+          </a:bodyPr>
+          <a:lstStyle/>
+          <a:p>
+            <a:pPr algn="l">
+              <a:lnSpc>
+                <a:spcPct val="120000"/>
+              </a:lnSpc>
+            </a:pPr>
+            <a:r>
+              <a:rPr sz="950" b="0">
+                <a:solidFill>
+                  <a:srgbClr val="A2978E"/>
+                </a:solidFill>
+                <a:latin typeface="Inter"/>
+              </a:rPr>
+              <a:t>ГенИИ</a:t>
+            </a:r>
+          </a:p>
+        </p:txBody>
+      </p:sp>
+      <p:sp>
+        <p:nvSpPr>
+          <p:cNvPr id="7" name="TextBox 6"/>
+          <p:cNvSpPr txBox="1"/>
+          <p:nvPr/>
+        </p:nvSpPr>
+        <p:spPr>
+          <a:xfrm>
+            <a:off x="8762695" y="987552"/>
+            <a:ext cx="2743200" cy="201168"/>
+          </a:xfrm>
+          <a:prstGeom prst="rect">
+            <a:avLst/>
+          </a:prstGeom>
+          <a:noFill/>
+        </p:spPr>
+        <p:txBody>
+          <a:bodyPr wrap="square" lIns="0" rIns="0" tIns="0" bIns="0" anchor="t">
+            <a:spAutoFit/>
+          </a:bodyPr>
+          <a:lstStyle/>
+          <a:p>
+            <a:pPr algn="r">
+              <a:lnSpc>
+                <a:spcPct val="120000"/>
+              </a:lnSpc>
+            </a:pPr>
+            <a:r>
+              <a:rPr sz="950" b="0">
+                <a:solidFill>
+                  <a:srgbClr val="A2978E"/>
+                </a:solidFill>
+                <a:latin typeface="Inter"/>
+              </a:rPr>
+              <a:t>Промптер</a:t>
+            </a:r>
+          </a:p>
+        </p:txBody>
+      </p:sp>
       <p:sp>
         <p:nvSpPr>
           <p:cNvPr id="8" name="TextBox 7"/>
@@ -3867,8 +3798,8 @@
         </p:nvSpPr>
         <p:spPr>
           <a:xfrm>
-            <a:off x="685800" y="1883664"/>
-            <a:ext cx="7772400" cy="457200"/>
+            <a:off x="10408615" y="6291072"/>
+            <a:ext cx="1097280" cy="274320"/>
           </a:xfrm>
           <a:prstGeom prst="rect">
             <a:avLst/>
@@ -3876,63 +3807,86 @@
           <a:noFill/>
         </p:spPr>
         <p:txBody>
-          <a:bodyPr wrap="square" lIns="0" rIns="0" tIns="0" bIns="0">
+          <a:bodyPr wrap="square" lIns="0" rIns="0" tIns="0" bIns="0" anchor="t">
             <a:spAutoFit/>
           </a:bodyPr>
           <a:lstStyle/>
           <a:p>
-            <a:pPr algn="ctr"/>
-            <a:r>
-              <a:rPr sz="1050" b="0">
-                <a:solidFill>
-                  <a:srgbClr val="C9BAB0"/>
-                </a:solidFill>
-                <a:latin typeface="Arial"/>
+            <a:pPr algn="r">
+              <a:lnSpc>
+                <a:spcPct val="120000"/>
+              </a:lnSpc>
+            </a:pPr>
+            <a:r>
+              <a:rPr sz="1000" b="0">
+                <a:solidFill>
+                  <a:srgbClr val="A2978E"/>
+                </a:solidFill>
+                <a:latin typeface="Inter"/>
               </a:rPr>
-              <a:t>Что даёт предпринимателю полный AI-цикл: исследование, стратегия, генерация текстов, картинок и видео,</a:t>
-            </a:r>
-          </a:p>
-          <a:p>
-            <a:pPr algn="ctr">
-              <a:spcBef>
-                <a:spcPts val="200"/>
-              </a:spcBef>
+              <a:t>1 / 5</a:t>
+            </a:r>
+          </a:p>
+        </p:txBody>
+      </p:sp>
+      <p:sp>
+        <p:nvSpPr>
+          <p:cNvPr id="9" name="TextBox 8"/>
+          <p:cNvSpPr txBox="1"/>
+          <p:nvPr/>
+        </p:nvSpPr>
+        <p:spPr>
+          <a:xfrm>
+            <a:off x="1143000" y="1600200"/>
+            <a:ext cx="10271455" cy="2473452"/>
+          </a:xfrm>
+          <a:prstGeom prst="rect">
+            <a:avLst/>
+          </a:prstGeom>
+          <a:noFill/>
+        </p:spPr>
+        <p:txBody>
+          <a:bodyPr wrap="square" lIns="0" rIns="0" tIns="0" bIns="0" anchor="t">
+            <a:spAutoFit/>
+          </a:bodyPr>
+          <a:lstStyle/>
+          <a:p>
+            <a:pPr algn="l">
+              <a:lnSpc>
+                <a:spcPct val="126000"/>
+              </a:lnSpc>
             </a:pPr>
             <a:r>
-              <a:rPr sz="1050" b="0">
-                <a:solidFill>
-                  <a:srgbClr val="C9BAB0"/>
-                </a:solidFill>
-                <a:latin typeface="Arial"/>
+              <a:rPr sz="3000" b="0">
+                <a:solidFill>
+                  <a:srgbClr val="FFFFFF"/>
+                </a:solidFill>
+                <a:latin typeface="Unbounded"/>
               </a:rPr>
-              <a:t>автоматическая публикация на 6+ площадках. Продвижение в SEO и GEO.</a:t>
-            </a:r>
-          </a:p>
-        </p:txBody>
-      </p:sp>
-      <p:sp>
-        <p:nvSpPr>
-          <p:cNvPr id="9" name="Rounded Rectangle 8"/>
+              <a:t>«Контент-фабрики есть у всех, это не новость. Новость в том, что управление циклом можно отдать самому ИИ: он знает правила своих собратьев лучше человека»</a:t>
+            </a:r>
+          </a:p>
+        </p:txBody>
+      </p:sp>
+      <p:sp>
+        <p:nvSpPr>
+          <p:cNvPr id="10" name="Rectangle 9"/>
           <p:cNvSpPr/>
           <p:nvPr/>
         </p:nvSpPr>
         <p:spPr>
           <a:xfrm>
-            <a:off x="548640" y="2286000"/>
-            <a:ext cx="2487168" cy="1554480"/>
-          </a:xfrm>
-          <a:prstGeom prst="roundRect">
-            <a:avLst>
-              <a:gd name="adj" fmla="val 10000"/>
-            </a:avLst>
+            <a:off x="685800" y="1673352"/>
+            <a:ext cx="82296" cy="2363724"/>
+          </a:xfrm>
+          <a:prstGeom prst="rect">
+            <a:avLst/>
           </a:prstGeom>
           <a:solidFill>
-            <a:srgbClr val="120A06"/>
+            <a:srgbClr val="FF8A3D"/>
           </a:solidFill>
-          <a:ln w="19050">
-            <a:solidFill>
-              <a:srgbClr val="F85800"/>
-            </a:solidFill>
+          <a:ln>
+            <a:noFill/>
           </a:ln>
           <a:effectLst/>
         </p:spPr>
@@ -3951,91 +3905,80 @@
           </a:fontRef>
         </p:style>
         <p:txBody>
-          <a:bodyPr rtlCol="0" anchor="ctr" wrap="square" lIns="128016" rIns="128016" tIns="54864" bIns="54864"/>
+          <a:bodyPr rtlCol="0" anchor="ctr"/>
+          <a:lstStyle/>
+          <a:p>
+            <a:pPr algn="ctr"/>
+          </a:p>
+        </p:txBody>
+      </p:sp>
+      <p:sp>
+        <p:nvSpPr>
+          <p:cNvPr id="11" name="TextBox 10"/>
+          <p:cNvSpPr txBox="1"/>
+          <p:nvPr/>
+        </p:nvSpPr>
+        <p:spPr>
+          <a:xfrm>
+            <a:off x="1143000" y="4366260"/>
+            <a:ext cx="10271455" cy="320802"/>
+          </a:xfrm>
+          <a:prstGeom prst="rect">
+            <a:avLst/>
+          </a:prstGeom>
+          <a:noFill/>
+        </p:spPr>
+        <p:txBody>
+          <a:bodyPr wrap="square" lIns="0" rIns="0" tIns="0" bIns="0" anchor="t">
+            <a:spAutoFit/>
+          </a:bodyPr>
           <a:lstStyle/>
           <a:p>
             <a:pPr algn="l">
               <a:lnSpc>
-                <a:spcPct val="95000"/>
+                <a:spcPct val="130000"/>
               </a:lnSpc>
             </a:pPr>
             <a:r>
-              <a:rPr sz="1800" b="1" spc="150">
-                <a:solidFill>
-                  <a:srgbClr val="F85800"/>
-                </a:solidFill>
-                <a:latin typeface="Arial"/>
+              <a:rPr sz="1500" b="1">
+                <a:solidFill>
+                  <a:srgbClr val="FF8A3D"/>
+                </a:solidFill>
+                <a:latin typeface="Inter"/>
               </a:rPr>
-              <a:t>01</a:t>
-            </a:r>
-          </a:p>
-          <a:p>
-            <a:pPr algn="l">
-              <a:lnSpc>
-                <a:spcPct val="95000"/>
-              </a:lnSpc>
-              <a:spcBef>
-                <a:spcPts val="500"/>
-              </a:spcBef>
-            </a:pPr>
-            <a:r>
-              <a:rPr sz="1100" b="1" spc="50">
-                <a:solidFill>
-                  <a:srgbClr val="FFFFFF"/>
-                </a:solidFill>
-                <a:latin typeface="Arial"/>
+              <a:t>Руслан Анатольевич Дёмин, </a:t>
+            </a:r>
+            <a:r>
+              <a:rPr sz="1500" b="0">
+                <a:solidFill>
+                  <a:srgbClr val="A2978E"/>
+                </a:solidFill>
+                <a:latin typeface="Inter"/>
               </a:rPr>
-              <a:t>КАК НЕ ТРАТИТЬ ВРЕМЯ
-НА СММ</a:t>
-            </a:r>
-          </a:p>
-          <a:p>
-            <a:pPr algn="l">
-              <a:lnSpc>
-                <a:spcPct val="95000"/>
-              </a:lnSpc>
-              <a:spcBef>
-                <a:spcPts val="600"/>
-              </a:spcBef>
-            </a:pPr>
-            <a:r>
-              <a:rPr sz="850" b="0">
-                <a:solidFill>
-                  <a:srgbClr val="9A8C84"/>
-                </a:solidFill>
-                <a:latin typeface="Arial"/>
-              </a:rPr>
-              <a:t>Контент-заводы есть у всех.
-Но процессом управляет человек:
-проверки, правки, публикация.
-Мы отдаём весь цикл ИИ.</a:t>
-            </a:r>
-          </a:p>
-        </p:txBody>
-      </p:sp>
-      <p:sp>
-        <p:nvSpPr>
-          <p:cNvPr id="10" name="Rounded Rectangle 9"/>
+              <a:t>управляющий партнёр</a:t>
+            </a:r>
+          </a:p>
+        </p:txBody>
+      </p:sp>
+      <p:sp>
+        <p:nvSpPr>
+          <p:cNvPr id="12" name="Rectangle 11"/>
           <p:cNvSpPr/>
           <p:nvPr/>
         </p:nvSpPr>
         <p:spPr>
           <a:xfrm>
-            <a:off x="3328416" y="2286000"/>
-            <a:ext cx="2487168" cy="1554480"/>
-          </a:xfrm>
-          <a:prstGeom prst="roundRect">
-            <a:avLst>
-              <a:gd name="adj" fmla="val 10000"/>
-            </a:avLst>
+            <a:off x="685800" y="5166360"/>
+            <a:ext cx="10820095" cy="10972"/>
+          </a:xfrm>
+          <a:prstGeom prst="rect">
+            <a:avLst/>
           </a:prstGeom>
           <a:solidFill>
-            <a:srgbClr val="120A06"/>
+            <a:srgbClr val="7A3F1C"/>
           </a:solidFill>
-          <a:ln w="19050">
-            <a:solidFill>
-              <a:srgbClr val="F85800"/>
-            </a:solidFill>
+          <a:ln>
+            <a:noFill/>
           </a:ln>
           <a:effectLst/>
         </p:spPr>
@@ -4054,276 +3997,96 @@
           </a:fontRef>
         </p:style>
         <p:txBody>
-          <a:bodyPr rtlCol="0" anchor="ctr" wrap="square" lIns="128016" rIns="128016" tIns="54864" bIns="54864"/>
+          <a:bodyPr rtlCol="0" anchor="ctr"/>
+          <a:lstStyle/>
+          <a:p>
+            <a:pPr algn="ctr"/>
+          </a:p>
+        </p:txBody>
+      </p:sp>
+      <p:sp>
+        <p:nvSpPr>
+          <p:cNvPr id="13" name="TextBox 12"/>
+          <p:cNvSpPr txBox="1"/>
+          <p:nvPr/>
+        </p:nvSpPr>
+        <p:spPr>
+          <a:xfrm>
+            <a:off x="685800" y="5413248"/>
+            <a:ext cx="10820095" cy="381762"/>
+          </a:xfrm>
+          <a:prstGeom prst="rect">
+            <a:avLst/>
+          </a:prstGeom>
+          <a:noFill/>
+        </p:spPr>
+        <p:txBody>
+          <a:bodyPr wrap="square" lIns="0" rIns="0" tIns="0" bIns="0" anchor="t">
+            <a:spAutoFit/>
+          </a:bodyPr>
           <a:lstStyle/>
           <a:p>
             <a:pPr algn="l">
               <a:lnSpc>
-                <a:spcPct val="95000"/>
+                <a:spcPct val="135000"/>
               </a:lnSpc>
             </a:pPr>
             <a:r>
-              <a:rPr sz="1800" b="1" spc="150">
-                <a:solidFill>
-                  <a:srgbClr val="F85800"/>
-                </a:solidFill>
-                <a:latin typeface="Arial"/>
+              <a:rPr sz="1800" b="0">
+                <a:solidFill>
+                  <a:srgbClr val="A2978E"/>
+                </a:solidFill>
+                <a:latin typeface="Inter"/>
               </a:rPr>
-              <a:t>02</a:t>
-            </a:r>
-          </a:p>
+              <a:t>Исследование · Стратегия · Генерация</a:t>
+            </a:r>
+            <a:r>
+              <a:rPr sz="1800" b="1">
+                <a:solidFill>
+                  <a:srgbClr val="FFFFFF"/>
+                </a:solidFill>
+                <a:latin typeface="Inter"/>
+              </a:rPr>
+              <a:t>      Проверка · Публикация · Анализ</a:t>
+            </a:r>
+          </a:p>
+        </p:txBody>
+      </p:sp>
+      <p:sp>
+        <p:nvSpPr>
+          <p:cNvPr id="14" name="TextBox 13"/>
+          <p:cNvSpPr txBox="1"/>
+          <p:nvPr/>
+        </p:nvSpPr>
+        <p:spPr>
+          <a:xfrm>
+            <a:off x="685800" y="5943600"/>
+            <a:ext cx="10820095" cy="313182"/>
+          </a:xfrm>
+          <a:prstGeom prst="rect">
+            <a:avLst/>
+          </a:prstGeom>
+          <a:noFill/>
+        </p:spPr>
+        <p:txBody>
+          <a:bodyPr wrap="square" lIns="0" rIns="0" tIns="0" bIns="0" anchor="t">
+            <a:spAutoFit/>
+          </a:bodyPr>
+          <a:lstStyle/>
           <a:p>
             <a:pPr algn="l">
               <a:lnSpc>
-                <a:spcPct val="95000"/>
-              </a:lnSpc>
-              <a:spcBef>
-                <a:spcPts val="500"/>
-              </a:spcBef>
-            </a:pPr>
-            <a:r>
-              <a:rPr sz="1100" b="1" spc="50">
-                <a:solidFill>
-                  <a:srgbClr val="FFFFFF"/>
-                </a:solidFill>
-                <a:latin typeface="Arial"/>
-              </a:rPr>
-              <a:t>КАК ЭКОНОМИТЬ
-ОТ 70 000 ₽ В МЕСЯЦ</a:t>
-            </a:r>
-          </a:p>
-          <a:p>
-            <a:pPr algn="l">
-              <a:lnSpc>
-                <a:spcPct val="95000"/>
-              </a:lnSpc>
-              <a:spcBef>
-                <a:spcPts val="600"/>
-              </a:spcBef>
-            </a:pPr>
-            <a:r>
-              <a:rPr sz="850" b="0">
-                <a:solidFill>
-                  <a:srgbClr val="9A8C84"/>
-                </a:solidFill>
-                <a:latin typeface="Arial"/>
-              </a:rPr>
-              <a:t>Без агентства, без токенов
-и борьбы с блокировками.
-Готовый сервис за фиксированную
-плату при сравнимом эффекте.</a:t>
-            </a:r>
-          </a:p>
-        </p:txBody>
-      </p:sp>
-      <p:sp>
-        <p:nvSpPr>
-          <p:cNvPr id="11" name="Rounded Rectangle 10"/>
-          <p:cNvSpPr/>
-          <p:nvPr/>
-        </p:nvSpPr>
-        <p:spPr>
-          <a:xfrm>
-            <a:off x="6108192" y="2286000"/>
-            <a:ext cx="2487168" cy="1554480"/>
-          </a:xfrm>
-          <a:prstGeom prst="roundRect">
-            <a:avLst>
-              <a:gd name="adj" fmla="val 10000"/>
-            </a:avLst>
-          </a:prstGeom>
-          <a:solidFill>
-            <a:srgbClr val="120A06"/>
-          </a:solidFill>
-          <a:ln w="19050">
-            <a:solidFill>
-              <a:srgbClr val="F85800"/>
-            </a:solidFill>
-          </a:ln>
-          <a:effectLst/>
-        </p:spPr>
-        <p:style>
-          <a:lnRef idx="1">
-            <a:schemeClr val="accent1"/>
-          </a:lnRef>
-          <a:fillRef idx="3">
-            <a:schemeClr val="accent1"/>
-          </a:fillRef>
-          <a:effectRef idx="2">
-            <a:schemeClr val="accent1"/>
-          </a:effectRef>
-          <a:fontRef idx="minor">
-            <a:schemeClr val="lt1"/>
-          </a:fontRef>
-        </p:style>
-        <p:txBody>
-          <a:bodyPr rtlCol="0" anchor="ctr" wrap="square" lIns="128016" rIns="128016" tIns="54864" bIns="54864"/>
-          <a:lstStyle/>
-          <a:p>
-            <a:pPr algn="l">
-              <a:lnSpc>
-                <a:spcPct val="95000"/>
+                <a:spcPct val="135000"/>
               </a:lnSpc>
             </a:pPr>
             <a:r>
-              <a:rPr sz="1800" b="1" spc="150">
-                <a:solidFill>
-                  <a:srgbClr val="F85800"/>
-                </a:solidFill>
-                <a:latin typeface="Arial"/>
+              <a:rPr sz="1400" b="0">
+                <a:solidFill>
+                  <a:srgbClr val="A2978E"/>
+                </a:solidFill>
+                <a:latin typeface="Inter"/>
               </a:rPr>
-              <a:t>03</a:t>
-            </a:r>
-          </a:p>
-          <a:p>
-            <a:pPr algn="l">
-              <a:lnSpc>
-                <a:spcPct val="95000"/>
-              </a:lnSpc>
-              <a:spcBef>
-                <a:spcPts val="500"/>
-              </a:spcBef>
-            </a:pPr>
-            <a:r>
-              <a:rPr sz="1100" b="1" spc="50">
-                <a:solidFill>
-                  <a:srgbClr val="FFFFFF"/>
-                </a:solidFill>
-                <a:latin typeface="Arial"/>
-              </a:rPr>
-              <a:t>КАК ПОПАСТЬ
-В НЕЙРОВЫДАЧУ</a:t>
-            </a:r>
-          </a:p>
-          <a:p>
-            <a:pPr algn="l">
-              <a:lnSpc>
-                <a:spcPct val="95000"/>
-              </a:lnSpc>
-              <a:spcBef>
-                <a:spcPts val="600"/>
-              </a:spcBef>
-            </a:pPr>
-            <a:r>
-              <a:rPr sz="850" b="0">
-                <a:solidFill>
-                  <a:srgbClr val="9A8C84"/>
-                </a:solidFill>
-                <a:latin typeface="Arial"/>
-              </a:rPr>
-              <a:t>GEO стоит доверить ИИ, срок —
-от 3 до 6 месяцев. При экономии
-времени и денег. Маркировать
-ИИ-контент сейчас не требуется.</a:t>
-            </a:r>
-          </a:p>
-        </p:txBody>
-      </p:sp>
-      <p:sp>
-        <p:nvSpPr>
-          <p:cNvPr id="12" name="Rounded Rectangle 11"/>
-          <p:cNvSpPr/>
-          <p:nvPr/>
-        </p:nvSpPr>
-        <p:spPr>
-          <a:xfrm>
-            <a:off x="548640" y="4005072"/>
-            <a:ext cx="8046720" cy="713232"/>
-          </a:xfrm>
-          <a:prstGeom prst="roundRect">
-            <a:avLst>
-              <a:gd name="adj" fmla="val 28000"/>
-            </a:avLst>
-          </a:prstGeom>
-          <a:solidFill>
-            <a:srgbClr val="120A06"/>
-          </a:solidFill>
-          <a:ln w="25400">
-            <a:solidFill>
-              <a:srgbClr val="F85800"/>
-            </a:solidFill>
-          </a:ln>
-          <a:effectLst/>
-        </p:spPr>
-        <p:style>
-          <a:lnRef idx="1">
-            <a:schemeClr val="accent1"/>
-          </a:lnRef>
-          <a:fillRef idx="3">
-            <a:schemeClr val="accent1"/>
-          </a:fillRef>
-          <a:effectRef idx="2">
-            <a:schemeClr val="accent1"/>
-          </a:effectRef>
-          <a:fontRef idx="minor">
-            <a:schemeClr val="lt1"/>
-          </a:fontRef>
-        </p:style>
-        <p:txBody>
-          <a:bodyPr rtlCol="0" anchor="ctr" wrap="square"/>
-          <a:lstStyle/>
-          <a:p>
-            <a:pPr algn="ctr"/>
-            <a:r>
-              <a:rPr sz="1300" b="1" spc="100">
-                <a:solidFill>
-                  <a:srgbClr val="FFFFFF"/>
-                </a:solidFill>
-                <a:latin typeface="Arial"/>
-              </a:rPr>
-              <a:t>РУСЛАН ДЕМИН — УПРАВЛЯЮЩИЙ ПАРТНЁР</a:t>
-            </a:r>
-          </a:p>
-          <a:p>
-            <a:pPr algn="ctr">
-              <a:spcBef>
-                <a:spcPts val="400"/>
-              </a:spcBef>
-            </a:pPr>
-            <a:r>
-              <a:rPr sz="1100" b="1">
-                <a:solidFill>
-                  <a:srgbClr val="F85800"/>
-                </a:solidFill>
-                <a:latin typeface="Arial"/>
-              </a:rPr>
-              <a:t>+7 906 758-77-77</a:t>
-            </a:r>
-            <a:r>
-              <a:rPr sz="1100" b="1">
-                <a:solidFill>
-                  <a:srgbClr val="9A8C84"/>
-                </a:solidFill>
-                <a:latin typeface="Arial"/>
-              </a:rPr>
-              <a:t>   ·   </a:t>
-            </a:r>
-            <a:r>
-              <a:rPr sz="1100" b="1">
-                <a:solidFill>
-                  <a:srgbClr val="F85800"/>
-                </a:solidFill>
-                <a:latin typeface="Arial"/>
-              </a:rPr>
-              <a:t>prompter.moscow@mail.ru</a:t>
-            </a:r>
-            <a:r>
-              <a:rPr sz="1100" b="1">
-                <a:solidFill>
-                  <a:srgbClr val="9A8C84"/>
-                </a:solidFill>
-                <a:latin typeface="Arial"/>
-              </a:rPr>
-              <a:t>   ·   </a:t>
-            </a:r>
-            <a:r>
-              <a:rPr sz="1100" b="1">
-                <a:solidFill>
-                  <a:srgbClr val="F85800"/>
-                </a:solidFill>
-                <a:latin typeface="Arial"/>
-              </a:rPr>
-              <a:t>@Prompter_mos</a:t>
+              <a:t>Светлым — то, что почти везде до сих пор делает человек</a:t>
             </a:r>
           </a:p>
         </p:txBody>
@@ -4348,7 +4111,7 @@
       <p:grpSpPr/>
       <p:pic>
         <p:nvPicPr>
-          <p:cNvPr id="2" name="Picture 1" descr="s09.jpg"/>
+          <p:cNvPr id="2" name="Picture 1" descr="s04.jpg"/>
           <p:cNvPicPr>
             <a:picLocks noChangeAspect="1"/>
           </p:cNvPicPr>
@@ -4363,7 +4126,7 @@
         <p:spPr>
           <a:xfrm>
             <a:off x="0" y="0"/>
-            <a:ext cx="9144000" cy="5143500"/>
+            <a:ext cx="12191695" cy="6858000"/>
           </a:xfrm>
           <a:prstGeom prst="rect">
             <a:avLst/>
@@ -4390,7 +4153,7 @@
       <p:grpSpPr/>
       <p:pic>
         <p:nvPicPr>
-          <p:cNvPr id="2" name="Picture 1" descr="s10.jpg"/>
+          <p:cNvPr id="2" name="Picture 1" descr="s05.jpg"/>
           <p:cNvPicPr>
             <a:picLocks noChangeAspect="1"/>
           </p:cNvPicPr>
@@ -4405,7 +4168,7 @@
         <p:spPr>
           <a:xfrm>
             <a:off x="0" y="0"/>
-            <a:ext cx="9144000" cy="5143500"/>
+            <a:ext cx="12191695" cy="6858000"/>
           </a:xfrm>
           <a:prstGeom prst="rect">
             <a:avLst/>
@@ -4432,7 +4195,7 @@
       <p:grpSpPr/>
       <p:pic>
         <p:nvPicPr>
-          <p:cNvPr id="2" name="Picture 1" descr="orig_tariff-bg.jpg"/>
+          <p:cNvPr id="2" name="Picture 1" descr="s06.jpg"/>
           <p:cNvPicPr>
             <a:picLocks noChangeAspect="1"/>
           </p:cNvPicPr>
@@ -4447,634 +4210,13 @@
         <p:spPr>
           <a:xfrm>
             <a:off x="0" y="0"/>
-            <a:ext cx="9144000" cy="5143500"/>
+            <a:ext cx="12191695" cy="6858000"/>
           </a:xfrm>
           <a:prstGeom prst="rect">
             <a:avLst/>
           </a:prstGeom>
         </p:spPr>
       </p:pic>
-      <p:pic>
-        <p:nvPicPr>
-          <p:cNvPr id="3" name="Picture 2" descr="orig_logo.png"/>
-          <p:cNvPicPr>
-            <a:picLocks noChangeAspect="1"/>
-          </p:cNvPicPr>
-          <p:nvPr/>
-        </p:nvPicPr>
-        <p:blipFill>
-          <a:blip r:embed="rId3"/>
-          <a:stretch>
-            <a:fillRect/>
-          </a:stretch>
-        </p:blipFill>
-        <p:spPr>
-          <a:xfrm>
-            <a:off x="384048" y="237744"/>
-            <a:ext cx="1600200" cy="346710"/>
-          </a:xfrm>
-          <a:prstGeom prst="rect">
-            <a:avLst/>
-          </a:prstGeom>
-        </p:spPr>
-      </p:pic>
-      <p:sp>
-        <p:nvSpPr>
-          <p:cNvPr id="4" name="TextBox 3"/>
-          <p:cNvSpPr txBox="1"/>
-          <p:nvPr/>
-        </p:nvSpPr>
-        <p:spPr>
-          <a:xfrm>
-            <a:off x="4572000" y="274320"/>
-            <a:ext cx="4187952" cy="365760"/>
-          </a:xfrm>
-          <a:prstGeom prst="rect">
-            <a:avLst/>
-          </a:prstGeom>
-          <a:noFill/>
-        </p:spPr>
-        <p:txBody>
-          <a:bodyPr wrap="square" lIns="0" rIns="0" tIns="0" bIns="0">
-            <a:spAutoFit/>
-          </a:bodyPr>
-          <a:lstStyle/>
-          <a:p>
-            <a:pPr algn="r"/>
-            <a:r>
-              <a:rPr sz="1200" b="1" spc="200">
-                <a:solidFill>
-                  <a:srgbClr val="F85800"/>
-                </a:solidFill>
-                <a:latin typeface="Arial"/>
-              </a:rPr>
-              <a:t>СТОИМОСТЬ  11</a:t>
-            </a:r>
-          </a:p>
-        </p:txBody>
-      </p:sp>
-      <p:sp>
-        <p:nvSpPr>
-          <p:cNvPr id="5" name="TextBox 4"/>
-          <p:cNvSpPr txBox="1"/>
-          <p:nvPr/>
-        </p:nvSpPr>
-        <p:spPr>
-          <a:xfrm>
-            <a:off x="548640" y="841248"/>
-            <a:ext cx="8046720" cy="548640"/>
-          </a:xfrm>
-          <a:prstGeom prst="rect">
-            <a:avLst/>
-          </a:prstGeom>
-          <a:noFill/>
-        </p:spPr>
-        <p:txBody>
-          <a:bodyPr wrap="square" lIns="0" rIns="0" tIns="0" bIns="0">
-            <a:spAutoFit/>
-          </a:bodyPr>
-          <a:lstStyle/>
-          <a:p>
-            <a:pPr algn="ctr"/>
-            <a:r>
-              <a:rPr sz="3400" b="1" spc="400">
-                <a:solidFill>
-                  <a:srgbClr val="FFFFFF"/>
-                </a:solidFill>
-                <a:latin typeface="Arial"/>
-              </a:rPr>
-              <a:t>ПРОМПТЕР</a:t>
-            </a:r>
-          </a:p>
-        </p:txBody>
-      </p:sp>
-      <p:sp>
-        <p:nvSpPr>
-          <p:cNvPr id="6" name="TextBox 5"/>
-          <p:cNvSpPr txBox="1"/>
-          <p:nvPr/>
-        </p:nvSpPr>
-        <p:spPr>
-          <a:xfrm>
-            <a:off x="548640" y="1335024"/>
-            <a:ext cx="8046720" cy="365760"/>
-          </a:xfrm>
-          <a:prstGeom prst="rect">
-            <a:avLst/>
-          </a:prstGeom>
-          <a:noFill/>
-        </p:spPr>
-        <p:txBody>
-          <a:bodyPr wrap="square" lIns="0" rIns="0" tIns="0" bIns="0">
-            <a:spAutoFit/>
-          </a:bodyPr>
-          <a:lstStyle/>
-          <a:p>
-            <a:pPr algn="ctr"/>
-            <a:r>
-              <a:rPr sz="1900" b="1">
-                <a:solidFill>
-                  <a:srgbClr val="FFFFFF"/>
-                </a:solidFill>
-                <a:latin typeface="Arial"/>
-              </a:rPr>
-              <a:t>Стоимость подписки</a:t>
-            </a:r>
-          </a:p>
-        </p:txBody>
-      </p:sp>
-      <p:sp>
-        <p:nvSpPr>
-          <p:cNvPr id="7" name="Rectangle 6"/>
-          <p:cNvSpPr/>
-          <p:nvPr/>
-        </p:nvSpPr>
-        <p:spPr>
-          <a:xfrm>
-            <a:off x="4160520" y="1755648"/>
-            <a:ext cx="822960" cy="32004"/>
-          </a:xfrm>
-          <a:prstGeom prst="rect">
-            <a:avLst/>
-          </a:prstGeom>
-          <a:solidFill>
-            <a:srgbClr val="F85800"/>
-          </a:solidFill>
-          <a:ln>
-            <a:noFill/>
-          </a:ln>
-          <a:effectLst/>
-        </p:spPr>
-        <p:style>
-          <a:lnRef idx="1">
-            <a:schemeClr val="accent1"/>
-          </a:lnRef>
-          <a:fillRef idx="3">
-            <a:schemeClr val="accent1"/>
-          </a:fillRef>
-          <a:effectRef idx="2">
-            <a:schemeClr val="accent1"/>
-          </a:effectRef>
-          <a:fontRef idx="minor">
-            <a:schemeClr val="lt1"/>
-          </a:fontRef>
-        </p:style>
-        <p:txBody>
-          <a:bodyPr rtlCol="0" anchor="ctr"/>
-          <a:lstStyle/>
-          <a:p>
-            <a:pPr algn="ctr"/>
-          </a:p>
-        </p:txBody>
-      </p:sp>
-      <p:sp>
-        <p:nvSpPr>
-          <p:cNvPr id="8" name="Rounded Rectangle 7"/>
-          <p:cNvSpPr/>
-          <p:nvPr/>
-        </p:nvSpPr>
-        <p:spPr>
-          <a:xfrm>
-            <a:off x="548640" y="1975104"/>
-            <a:ext cx="2487168" cy="1755648"/>
-          </a:xfrm>
-          <a:prstGeom prst="roundRect">
-            <a:avLst>
-              <a:gd name="adj" fmla="val 10000"/>
-            </a:avLst>
-          </a:prstGeom>
-          <a:solidFill>
-            <a:srgbClr val="120A06"/>
-          </a:solidFill>
-          <a:ln w="15875">
-            <a:solidFill>
-              <a:srgbClr val="F85800"/>
-            </a:solidFill>
-          </a:ln>
-          <a:effectLst/>
-        </p:spPr>
-        <p:style>
-          <a:lnRef idx="1">
-            <a:schemeClr val="accent1"/>
-          </a:lnRef>
-          <a:fillRef idx="3">
-            <a:schemeClr val="accent1"/>
-          </a:fillRef>
-          <a:effectRef idx="2">
-            <a:schemeClr val="accent1"/>
-          </a:effectRef>
-          <a:fontRef idx="minor">
-            <a:schemeClr val="lt1"/>
-          </a:fontRef>
-        </p:style>
-        <p:txBody>
-          <a:bodyPr rtlCol="0" anchor="ctr" wrap="square"/>
-          <a:lstStyle/>
-          <a:p>
-            <a:pPr algn="ctr"/>
-            <a:r>
-              <a:rPr sz="1150" b="1" spc="150">
-                <a:solidFill>
-                  <a:srgbClr val="C9BAB0"/>
-                </a:solidFill>
-                <a:latin typeface="Arial"/>
-              </a:rPr>
-              <a:t>SEO-АГЕНТСТВО</a:t>
-            </a:r>
-          </a:p>
-          <a:p>
-            <a:pPr algn="ctr">
-              <a:spcBef>
-                <a:spcPts val="1000"/>
-              </a:spcBef>
-            </a:pPr>
-            <a:r>
-              <a:rPr sz="2100" b="1">
-                <a:solidFill>
-                  <a:srgbClr val="FFFFFF"/>
-                </a:solidFill>
-                <a:latin typeface="Arial"/>
-              </a:rPr>
-              <a:t>100 000 ₽</a:t>
-            </a:r>
-          </a:p>
-          <a:p>
-            <a:pPr algn="ctr">
-              <a:spcBef>
-                <a:spcPts val="400"/>
-              </a:spcBef>
-            </a:pPr>
-            <a:r>
-              <a:rPr sz="950" b="0">
-                <a:solidFill>
-                  <a:srgbClr val="C9BAB0"/>
-                </a:solidFill>
-                <a:latin typeface="Arial"/>
-              </a:rPr>
-              <a:t>в месяц</a:t>
-            </a:r>
-          </a:p>
-          <a:p>
-            <a:pPr algn="ctr">
-              <a:spcBef>
-                <a:spcPts val="900"/>
-              </a:spcBef>
-            </a:pPr>
-            <a:r>
-              <a:rPr sz="900" b="0">
-                <a:solidFill>
-                  <a:srgbClr val="9A8C84"/>
-                </a:solidFill>
-                <a:latin typeface="Arial"/>
-              </a:rPr>
-              <a:t>подрядчики, правки,
-переписка, сроки</a:t>
-            </a:r>
-          </a:p>
-        </p:txBody>
-      </p:sp>
-      <p:sp>
-        <p:nvSpPr>
-          <p:cNvPr id="9" name="Rounded Rectangle 8"/>
-          <p:cNvSpPr/>
-          <p:nvPr/>
-        </p:nvSpPr>
-        <p:spPr>
-          <a:xfrm>
-            <a:off x="3328416" y="1975104"/>
-            <a:ext cx="2487168" cy="1755648"/>
-          </a:xfrm>
-          <a:prstGeom prst="roundRect">
-            <a:avLst>
-              <a:gd name="adj" fmla="val 10000"/>
-            </a:avLst>
-          </a:prstGeom>
-          <a:solidFill>
-            <a:srgbClr val="120A06"/>
-          </a:solidFill>
-          <a:ln w="31750">
-            <a:solidFill>
-              <a:srgbClr val="F85800"/>
-            </a:solidFill>
-          </a:ln>
-          <a:effectLst/>
-        </p:spPr>
-        <p:style>
-          <a:lnRef idx="1">
-            <a:schemeClr val="accent1"/>
-          </a:lnRef>
-          <a:fillRef idx="3">
-            <a:schemeClr val="accent1"/>
-          </a:fillRef>
-          <a:effectRef idx="2">
-            <a:schemeClr val="accent1"/>
-          </a:effectRef>
-          <a:fontRef idx="minor">
-            <a:schemeClr val="lt1"/>
-          </a:fontRef>
-        </p:style>
-        <p:txBody>
-          <a:bodyPr rtlCol="0" anchor="ctr" wrap="square"/>
-          <a:lstStyle/>
-          <a:p>
-            <a:pPr algn="ctr"/>
-            <a:r>
-              <a:rPr sz="1150" b="1" spc="150">
-                <a:solidFill>
-                  <a:srgbClr val="F85800"/>
-                </a:solidFill>
-                <a:latin typeface="Arial"/>
-              </a:rPr>
-              <a:t>ПРОМПТЕР</a:t>
-            </a:r>
-          </a:p>
-          <a:p>
-            <a:pPr algn="ctr">
-              <a:spcBef>
-                <a:spcPts val="1000"/>
-              </a:spcBef>
-            </a:pPr>
-            <a:r>
-              <a:rPr sz="2600" b="1">
-                <a:solidFill>
-                  <a:srgbClr val="FFFFFF"/>
-                </a:solidFill>
-                <a:latin typeface="Arial"/>
-              </a:rPr>
-              <a:t>29 500 ₽</a:t>
-            </a:r>
-          </a:p>
-          <a:p>
-            <a:pPr algn="ctr">
-              <a:spcBef>
-                <a:spcPts val="400"/>
-              </a:spcBef>
-            </a:pPr>
-            <a:r>
-              <a:rPr sz="950" b="0">
-                <a:solidFill>
-                  <a:srgbClr val="C9BAB0"/>
-                </a:solidFill>
-                <a:latin typeface="Arial"/>
-              </a:rPr>
-              <a:t>в месяц, цена фиксированная</a:t>
-            </a:r>
-          </a:p>
-          <a:p>
-            <a:pPr algn="ctr">
-              <a:spcBef>
-                <a:spcPts val="900"/>
-              </a:spcBef>
-            </a:pPr>
-            <a:r>
-              <a:rPr sz="900" b="0">
-                <a:solidFill>
-                  <a:srgbClr val="9A8C84"/>
-                </a:solidFill>
-                <a:latin typeface="Arial"/>
-              </a:rPr>
-              <a:t>настройка и обслуживание
-уже включены</a:t>
-            </a:r>
-          </a:p>
-        </p:txBody>
-      </p:sp>
-      <p:sp>
-        <p:nvSpPr>
-          <p:cNvPr id="10" name="Rounded Rectangle 9"/>
-          <p:cNvSpPr/>
-          <p:nvPr/>
-        </p:nvSpPr>
-        <p:spPr>
-          <a:xfrm>
-            <a:off x="4005072" y="1819656"/>
-            <a:ext cx="1133856" cy="310896"/>
-          </a:xfrm>
-          <a:prstGeom prst="roundRect">
-            <a:avLst>
-              <a:gd name="adj" fmla="val 50000"/>
-            </a:avLst>
-          </a:prstGeom>
-          <a:solidFill>
-            <a:srgbClr val="F85800"/>
-          </a:solidFill>
-          <a:ln>
-            <a:noFill/>
-          </a:ln>
-          <a:effectLst/>
-        </p:spPr>
-        <p:style>
-          <a:lnRef idx="1">
-            <a:schemeClr val="accent1"/>
-          </a:lnRef>
-          <a:fillRef idx="3">
-            <a:schemeClr val="accent1"/>
-          </a:fillRef>
-          <a:effectRef idx="2">
-            <a:schemeClr val="accent1"/>
-          </a:effectRef>
-          <a:fontRef idx="minor">
-            <a:schemeClr val="lt1"/>
-          </a:fontRef>
-        </p:style>
-        <p:txBody>
-          <a:bodyPr rtlCol="0" anchor="ctr"/>
-          <a:lstStyle/>
-          <a:p>
-            <a:pPr algn="ctr"/>
-            <a:r>
-              <a:rPr sz="1000" b="1" spc="100">
-                <a:solidFill>
-                  <a:srgbClr val="140802"/>
-                </a:solidFill>
-                <a:latin typeface="Arial"/>
-              </a:rPr>
-              <a:t>ВЫГОДНО</a:t>
-            </a:r>
-          </a:p>
-        </p:txBody>
-      </p:sp>
-      <p:sp>
-        <p:nvSpPr>
-          <p:cNvPr id="11" name="Rounded Rectangle 10"/>
-          <p:cNvSpPr/>
-          <p:nvPr/>
-        </p:nvSpPr>
-        <p:spPr>
-          <a:xfrm>
-            <a:off x="6108192" y="1975104"/>
-            <a:ext cx="2487168" cy="1755648"/>
-          </a:xfrm>
-          <a:prstGeom prst="roundRect">
-            <a:avLst>
-              <a:gd name="adj" fmla="val 10000"/>
-            </a:avLst>
-          </a:prstGeom>
-          <a:solidFill>
-            <a:srgbClr val="120A06"/>
-          </a:solidFill>
-          <a:ln w="15875">
-            <a:solidFill>
-              <a:srgbClr val="F85800"/>
-            </a:solidFill>
-          </a:ln>
-          <a:effectLst/>
-        </p:spPr>
-        <p:style>
-          <a:lnRef idx="1">
-            <a:schemeClr val="accent1"/>
-          </a:lnRef>
-          <a:fillRef idx="3">
-            <a:schemeClr val="accent1"/>
-          </a:fillRef>
-          <a:effectRef idx="2">
-            <a:schemeClr val="accent1"/>
-          </a:effectRef>
-          <a:fontRef idx="minor">
-            <a:schemeClr val="lt1"/>
-          </a:fontRef>
-        </p:style>
-        <p:txBody>
-          <a:bodyPr rtlCol="0" anchor="ctr" wrap="square"/>
-          <a:lstStyle/>
-          <a:p>
-            <a:pPr algn="ctr"/>
-            <a:r>
-              <a:rPr sz="1150" b="1" spc="150">
-                <a:solidFill>
-                  <a:srgbClr val="C9BAB0"/>
-                </a:solidFill>
-                <a:latin typeface="Arial"/>
-              </a:rPr>
-              <a:t>ЭКОНОМИЯ</a:t>
-            </a:r>
-          </a:p>
-          <a:p>
-            <a:pPr algn="ctr">
-              <a:spcBef>
-                <a:spcPts val="1000"/>
-              </a:spcBef>
-            </a:pPr>
-            <a:r>
-              <a:rPr sz="2100" b="1">
-                <a:solidFill>
-                  <a:srgbClr val="5FD08A"/>
-                </a:solidFill>
-                <a:latin typeface="Arial"/>
-              </a:rPr>
-              <a:t>от 70 000 ₽</a:t>
-            </a:r>
-          </a:p>
-          <a:p>
-            <a:pPr algn="ctr">
-              <a:spcBef>
-                <a:spcPts val="400"/>
-              </a:spcBef>
-            </a:pPr>
-            <a:r>
-              <a:rPr sz="950" b="0">
-                <a:solidFill>
-                  <a:srgbClr val="C9BAB0"/>
-                </a:solidFill>
-                <a:latin typeface="Arial"/>
-              </a:rPr>
-              <a:t>каждый месяц</a:t>
-            </a:r>
-          </a:p>
-          <a:p>
-            <a:pPr algn="ctr">
-              <a:spcBef>
-                <a:spcPts val="900"/>
-              </a:spcBef>
-            </a:pPr>
-            <a:r>
-              <a:rPr sz="900" b="0">
-                <a:solidFill>
-                  <a:srgbClr val="9A8C84"/>
-                </a:solidFill>
-                <a:latin typeface="Arial"/>
-              </a:rPr>
-              <a:t>тот же объём работ
-без штата и подрядчиков</a:t>
-            </a:r>
-          </a:p>
-        </p:txBody>
-      </p:sp>
-      <p:sp>
-        <p:nvSpPr>
-          <p:cNvPr id="12" name="Rounded Rectangle 11"/>
-          <p:cNvSpPr/>
-          <p:nvPr/>
-        </p:nvSpPr>
-        <p:spPr>
-          <a:xfrm>
-            <a:off x="548640" y="4041648"/>
-            <a:ext cx="8046720" cy="658368"/>
-          </a:xfrm>
-          <a:prstGeom prst="roundRect">
-            <a:avLst>
-              <a:gd name="adj" fmla="val 30000"/>
-            </a:avLst>
-          </a:prstGeom>
-          <a:solidFill>
-            <a:srgbClr val="120A06"/>
-          </a:solidFill>
-          <a:ln w="25400">
-            <a:solidFill>
-              <a:srgbClr val="F85800"/>
-            </a:solidFill>
-          </a:ln>
-          <a:effectLst/>
-        </p:spPr>
-        <p:style>
-          <a:lnRef idx="1">
-            <a:schemeClr val="accent1"/>
-          </a:lnRef>
-          <a:fillRef idx="3">
-            <a:schemeClr val="accent1"/>
-          </a:fillRef>
-          <a:effectRef idx="2">
-            <a:schemeClr val="accent1"/>
-          </a:effectRef>
-          <a:fontRef idx="minor">
-            <a:schemeClr val="lt1"/>
-          </a:fontRef>
-        </p:style>
-        <p:txBody>
-          <a:bodyPr rtlCol="0" anchor="ctr" wrap="square"/>
-          <a:lstStyle/>
-          <a:p>
-            <a:pPr algn="ctr"/>
-            <a:r>
-              <a:rPr sz="1900" b="1" spc="100">
-                <a:solidFill>
-                  <a:srgbClr val="FFFFFF"/>
-                </a:solidFill>
-                <a:latin typeface="Arial"/>
-              </a:rPr>
-              <a:t>ПОЛНЫЙ ЦИКЛ ПРОДВИЖЕНИЯ — </a:t>
-            </a:r>
-            <a:r>
-              <a:rPr sz="1900" b="1" spc="100">
-                <a:solidFill>
-                  <a:srgbClr val="F85800"/>
-                </a:solidFill>
-                <a:latin typeface="Arial"/>
-              </a:rPr>
-              <a:t>29 500 ₽ В МЕСЯЦ</a:t>
-            </a:r>
-            <a:r>
-              <a:rPr sz="1900" b="1" spc="100">
-                <a:solidFill>
-                  <a:srgbClr val="FFFFFF"/>
-                </a:solidFill>
-                <a:latin typeface="Arial"/>
-              </a:rPr>
-              <a:t>  →</a:t>
-            </a:r>
-          </a:p>
-        </p:txBody>
-      </p:sp>
     </p:spTree>
   </p:cSld>
   <p:clrMapOvr>
@@ -5095,7 +4237,7 @@
       <p:grpSpPr/>
       <p:pic>
         <p:nvPicPr>
-          <p:cNvPr id="2" name="Picture 1" descr="s12.jpg"/>
+          <p:cNvPr id="2" name="Picture 1" descr="s07.jpg"/>
           <p:cNvPicPr>
             <a:picLocks noChangeAspect="1"/>
           </p:cNvPicPr>
@@ -5110,7 +4252,7 @@
         <p:spPr>
           <a:xfrm>
             <a:off x="0" y="0"/>
-            <a:ext cx="9144000" cy="5143500"/>
+            <a:ext cx="12191695" cy="6858000"/>
           </a:xfrm>
           <a:prstGeom prst="rect">
             <a:avLst/>
@@ -5137,7 +4279,7 @@
       <p:grpSpPr/>
       <p:pic>
         <p:nvPicPr>
-          <p:cNvPr id="2" name="Picture 1" descr="s13.jpg"/>
+          <p:cNvPr id="2" name="Picture 1" descr="s08.jpg"/>
           <p:cNvPicPr>
             <a:picLocks noChangeAspect="1"/>
           </p:cNvPicPr>
@@ -5152,7 +4294,7 @@
         <p:spPr>
           <a:xfrm>
             <a:off x="0" y="0"/>
-            <a:ext cx="9144000" cy="5143500"/>
+            <a:ext cx="12191695" cy="6858000"/>
           </a:xfrm>
           <a:prstGeom prst="rect">
             <a:avLst/>
@@ -5179,7 +4321,7 @@
       <p:grpSpPr/>
       <p:pic>
         <p:nvPicPr>
-          <p:cNvPr id="2" name="Picture 1" descr="orig_contacts-bg.jpg"/>
+          <p:cNvPr id="2" name="Picture 1" descr="s09.jpg"/>
           <p:cNvPicPr>
             <a:picLocks noChangeAspect="1"/>
           </p:cNvPicPr>
@@ -5194,7 +4336,175 @@
         <p:spPr>
           <a:xfrm>
             <a:off x="0" y="0"/>
-            <a:ext cx="9144000" cy="5143500"/>
+            <a:ext cx="12191695" cy="6858000"/>
+          </a:xfrm>
+          <a:prstGeom prst="rect">
+            <a:avLst/>
+          </a:prstGeom>
+        </p:spPr>
+      </p:pic>
+    </p:spTree>
+  </p:cSld>
+  <p:clrMapOvr>
+    <a:masterClrMapping/>
+  </p:clrMapOvr>
+</p:sld>
+</file>
+
+<file path=ppt/slides/slide16.xml><?xml version="1.0" encoding="utf-8"?>
+<p:sld xmlns:a="http://schemas.openxmlformats.org/drawingml/2006/main" xmlns:p="http://schemas.openxmlformats.org/presentationml/2006/main" xmlns:r="http://schemas.openxmlformats.org/officeDocument/2006/relationships">
+  <p:cSld>
+    <p:spTree>
+      <p:nvGrpSpPr>
+        <p:cNvPr id="1" name=""/>
+        <p:cNvGrpSpPr/>
+        <p:nvPr/>
+      </p:nvGrpSpPr>
+      <p:grpSpPr/>
+      <p:pic>
+        <p:nvPicPr>
+          <p:cNvPr id="2" name="Picture 1" descr="s10.jpg"/>
+          <p:cNvPicPr>
+            <a:picLocks noChangeAspect="1"/>
+          </p:cNvPicPr>
+          <p:nvPr/>
+        </p:nvPicPr>
+        <p:blipFill>
+          <a:blip r:embed="rId2"/>
+          <a:stretch>
+            <a:fillRect/>
+          </a:stretch>
+        </p:blipFill>
+        <p:spPr>
+          <a:xfrm>
+            <a:off x="0" y="0"/>
+            <a:ext cx="12191695" cy="6858000"/>
+          </a:xfrm>
+          <a:prstGeom prst="rect">
+            <a:avLst/>
+          </a:prstGeom>
+        </p:spPr>
+      </p:pic>
+    </p:spTree>
+  </p:cSld>
+  <p:clrMapOvr>
+    <a:masterClrMapping/>
+  </p:clrMapOvr>
+</p:sld>
+</file>
+
+<file path=ppt/slides/slide17.xml><?xml version="1.0" encoding="utf-8"?>
+<p:sld xmlns:a="http://schemas.openxmlformats.org/drawingml/2006/main" xmlns:p="http://schemas.openxmlformats.org/presentationml/2006/main" xmlns:r="http://schemas.openxmlformats.org/officeDocument/2006/relationships">
+  <p:cSld>
+    <p:spTree>
+      <p:nvGrpSpPr>
+        <p:cNvPr id="1" name=""/>
+        <p:cNvGrpSpPr/>
+        <p:nvPr/>
+      </p:nvGrpSpPr>
+      <p:grpSpPr/>
+      <p:pic>
+        <p:nvPicPr>
+          <p:cNvPr id="2" name="Picture 1" descr="s12.jpg"/>
+          <p:cNvPicPr>
+            <a:picLocks noChangeAspect="1"/>
+          </p:cNvPicPr>
+          <p:nvPr/>
+        </p:nvPicPr>
+        <p:blipFill>
+          <a:blip r:embed="rId2"/>
+          <a:stretch>
+            <a:fillRect/>
+          </a:stretch>
+        </p:blipFill>
+        <p:spPr>
+          <a:xfrm>
+            <a:off x="0" y="0"/>
+            <a:ext cx="12191695" cy="6858000"/>
+          </a:xfrm>
+          <a:prstGeom prst="rect">
+            <a:avLst/>
+          </a:prstGeom>
+        </p:spPr>
+      </p:pic>
+    </p:spTree>
+  </p:cSld>
+  <p:clrMapOvr>
+    <a:masterClrMapping/>
+  </p:clrMapOvr>
+</p:sld>
+</file>
+
+<file path=ppt/slides/slide18.xml><?xml version="1.0" encoding="utf-8"?>
+<p:sld xmlns:a="http://schemas.openxmlformats.org/drawingml/2006/main" xmlns:p="http://schemas.openxmlformats.org/presentationml/2006/main" xmlns:r="http://schemas.openxmlformats.org/officeDocument/2006/relationships">
+  <p:cSld>
+    <p:spTree>
+      <p:nvGrpSpPr>
+        <p:cNvPr id="1" name=""/>
+        <p:cNvGrpSpPr/>
+        <p:nvPr/>
+      </p:nvGrpSpPr>
+      <p:grpSpPr/>
+      <p:pic>
+        <p:nvPicPr>
+          <p:cNvPr id="2" name="Picture 1" descr="s13.jpg"/>
+          <p:cNvPicPr>
+            <a:picLocks noChangeAspect="1"/>
+          </p:cNvPicPr>
+          <p:nvPr/>
+        </p:nvPicPr>
+        <p:blipFill>
+          <a:blip r:embed="rId2"/>
+          <a:stretch>
+            <a:fillRect/>
+          </a:stretch>
+        </p:blipFill>
+        <p:spPr>
+          <a:xfrm>
+            <a:off x="0" y="0"/>
+            <a:ext cx="12191695" cy="6858000"/>
+          </a:xfrm>
+          <a:prstGeom prst="rect">
+            <a:avLst/>
+          </a:prstGeom>
+        </p:spPr>
+      </p:pic>
+    </p:spTree>
+  </p:cSld>
+  <p:clrMapOvr>
+    <a:masterClrMapping/>
+  </p:clrMapOvr>
+</p:sld>
+</file>
+
+<file path=ppt/slides/slide19.xml><?xml version="1.0" encoding="utf-8"?>
+<p:sld xmlns:a="http://schemas.openxmlformats.org/drawingml/2006/main" xmlns:p="http://schemas.openxmlformats.org/presentationml/2006/main" xmlns:r="http://schemas.openxmlformats.org/officeDocument/2006/relationships">
+  <p:cSld>
+    <p:spTree>
+      <p:nvGrpSpPr>
+        <p:cNvPr id="1" name=""/>
+        <p:cNvGrpSpPr/>
+        <p:nvPr/>
+      </p:nvGrpSpPr>
+      <p:grpSpPr/>
+      <p:pic>
+        <p:nvPicPr>
+          <p:cNvPr id="2" name="Picture 1" descr="orig_tariff-bg.jpg"/>
+          <p:cNvPicPr>
+            <a:picLocks noChangeAspect="1"/>
+          </p:cNvPicPr>
+          <p:nvPr/>
+        </p:nvPicPr>
+        <p:blipFill>
+          <a:blip r:embed="rId2"/>
+          <a:stretch>
+            <a:fillRect/>
+          </a:stretch>
+        </p:blipFill>
+        <p:spPr>
+          <a:xfrm>
+            <a:off x="0" y="0"/>
+            <a:ext cx="12191695" cy="6858000"/>
           </a:xfrm>
           <a:prstGeom prst="rect">
             <a:avLst/>
@@ -5203,7 +4513,7 @@
       </p:pic>
       <p:pic>
         <p:nvPicPr>
-          <p:cNvPr id="3" name="Picture 2" descr="orig_logo.png"/>
+          <p:cNvPr id="3" name="Picture 2" descr="image.png"/>
           <p:cNvPicPr>
             <a:picLocks noChangeAspect="1"/>
           </p:cNvPicPr>
@@ -5217,24 +4527,48 @@
         </p:blipFill>
         <p:spPr>
           <a:xfrm>
-            <a:off x="411480" y="274320"/>
-            <a:ext cx="1783080" cy="386334"/>
+            <a:off x="685800" y="457200"/>
+            <a:ext cx="484632" cy="461332"/>
           </a:xfrm>
           <a:prstGeom prst="rect">
             <a:avLst/>
           </a:prstGeom>
         </p:spPr>
       </p:pic>
-      <p:sp>
-        <p:nvSpPr>
-          <p:cNvPr id="4" name="TextBox 3"/>
+      <p:pic>
+        <p:nvPicPr>
+          <p:cNvPr id="4" name="Picture 3" descr="image.png"/>
+          <p:cNvPicPr>
+            <a:picLocks noChangeAspect="1"/>
+          </p:cNvPicPr>
+          <p:nvPr/>
+        </p:nvPicPr>
+        <p:blipFill>
+          <a:blip r:embed="rId4"/>
+          <a:stretch>
+            <a:fillRect/>
+          </a:stretch>
+        </p:blipFill>
+        <p:spPr>
+          <a:xfrm>
+            <a:off x="11045952" y="457200"/>
+            <a:ext cx="457200" cy="457200"/>
+          </a:xfrm>
+          <a:prstGeom prst="rect">
+            <a:avLst/>
+          </a:prstGeom>
+        </p:spPr>
+      </p:pic>
+      <p:sp>
+        <p:nvSpPr>
+          <p:cNvPr id="5" name="TextBox 4"/>
           <p:cNvSpPr txBox="1"/>
           <p:nvPr/>
         </p:nvSpPr>
         <p:spPr>
           <a:xfrm>
-            <a:off x="548640" y="932688"/>
-            <a:ext cx="8046720" cy="822960"/>
+            <a:off x="731518" y="1121661"/>
+            <a:ext cx="10728933" cy="731518"/>
           </a:xfrm>
           <a:prstGeom prst="rect">
             <a:avLst/>
@@ -5249,27 +4583,27 @@
           <a:p>
             <a:pPr algn="ctr"/>
             <a:r>
-              <a:rPr sz="4000" b="1" spc="300">
+              <a:rPr sz="4533" b="1" spc="533">
                 <a:solidFill>
                   <a:srgbClr val="FFFFFF"/>
                 </a:solidFill>
                 <a:latin typeface="Arial"/>
               </a:rPr>
-              <a:t>КОНТАКТЫ</a:t>
-            </a:r>
-          </a:p>
-        </p:txBody>
-      </p:sp>
-      <p:sp>
-        <p:nvSpPr>
-          <p:cNvPr id="5" name="TextBox 4"/>
+              <a:t>ПРОМПТЕР</a:t>
+            </a:r>
+          </a:p>
+        </p:txBody>
+      </p:sp>
+      <p:sp>
+        <p:nvSpPr>
+          <p:cNvPr id="6" name="TextBox 5"/>
           <p:cNvSpPr txBox="1"/>
           <p:nvPr/>
         </p:nvSpPr>
         <p:spPr>
           <a:xfrm>
-            <a:off x="685800" y="1609344"/>
-            <a:ext cx="7772400" cy="548640"/>
+            <a:off x="731518" y="1780027"/>
+            <a:ext cx="10728933" cy="487678"/>
           </a:xfrm>
           <a:prstGeom prst="rect">
             <a:avLst/>
@@ -5284,56 +4618,36 @@
           <a:p>
             <a:pPr algn="ctr"/>
             <a:r>
-              <a:rPr sz="1200" b="0">
-                <a:solidFill>
-                  <a:srgbClr val="C9BAB0"/>
+              <a:rPr sz="2533" b="1">
+                <a:solidFill>
+                  <a:srgbClr val="FFFFFF"/>
                 </a:solidFill>
                 <a:latin typeface="Arial"/>
               </a:rPr>
-              <a:t>Полный AI-цикл: исследование, генерация контента, автоматическая публикация</a:t>
-            </a:r>
-          </a:p>
-          <a:p>
-            <a:pPr algn="ctr">
-              <a:spcBef>
-                <a:spcPts val="300"/>
-              </a:spcBef>
-            </a:pPr>
-            <a:r>
-              <a:rPr sz="1200" b="0">
-                <a:solidFill>
-                  <a:srgbClr val="C9BAB0"/>
-                </a:solidFill>
-                <a:latin typeface="Arial"/>
-              </a:rPr>
-              <a:t>на площадках и аналитика нейровыдачи. SEO и GEO.</a:t>
-            </a:r>
-          </a:p>
-        </p:txBody>
-      </p:sp>
-      <p:sp>
-        <p:nvSpPr>
-          <p:cNvPr id="6" name="Rounded Rectangle 5"/>
+              <a:t>Стоимость подписки</a:t>
+            </a:r>
+          </a:p>
+        </p:txBody>
+      </p:sp>
+      <p:sp>
+        <p:nvSpPr>
+          <p:cNvPr id="7" name="Rectangle 6"/>
           <p:cNvSpPr/>
           <p:nvPr/>
         </p:nvSpPr>
         <p:spPr>
           <a:xfrm>
-            <a:off x="548640" y="2286000"/>
-            <a:ext cx="4892040" cy="676656"/>
-          </a:xfrm>
-          <a:prstGeom prst="roundRect">
-            <a:avLst>
-              <a:gd name="adj" fmla="val 14000"/>
-            </a:avLst>
+            <a:off x="5547346" y="2340858"/>
+            <a:ext cx="1097277" cy="42671"/>
+          </a:xfrm>
+          <a:prstGeom prst="rect">
+            <a:avLst/>
           </a:prstGeom>
           <a:solidFill>
-            <a:srgbClr val="120A06"/>
+            <a:srgbClr val="F85800"/>
           </a:solidFill>
-          <a:ln w="19050">
-            <a:solidFill>
-              <a:srgbClr val="F85800"/>
-            </a:solidFill>
+          <a:ln>
+            <a:noFill/>
           </a:ln>
           <a:effectLst/>
         </p:spPr>
@@ -5352,65 +4666,33 @@
           </a:fontRef>
         </p:style>
         <p:txBody>
-          <a:bodyPr rtlCol="0" anchor="ctr" wrap="square" lIns="201168" rIns="201168" tIns="54864" bIns="54864"/>
-          <a:lstStyle/>
-          <a:p>
-            <a:pPr algn="l">
-              <a:lnSpc>
-                <a:spcPct val="95000"/>
-              </a:lnSpc>
-            </a:pPr>
-            <a:r>
-              <a:rPr sz="950" b="1" spc="150">
-                <a:solidFill>
-                  <a:srgbClr val="F85800"/>
-                </a:solidFill>
-                <a:latin typeface="Arial"/>
-              </a:rPr>
-              <a:t>САЙТ</a:t>
-            </a:r>
-          </a:p>
-          <a:p>
-            <a:pPr algn="l">
-              <a:lnSpc>
-                <a:spcPct val="95000"/>
-              </a:lnSpc>
-              <a:spcBef>
-                <a:spcPts val="300"/>
-              </a:spcBef>
-            </a:pPr>
-            <a:r>
-              <a:rPr sz="1600" b="1">
-                <a:solidFill>
-                  <a:srgbClr val="FFFFFF"/>
-                </a:solidFill>
-                <a:latin typeface="Arial"/>
-              </a:rPr>
-              <a:t>prompter-ai.moscow</a:t>
-            </a:r>
-          </a:p>
-        </p:txBody>
-      </p:sp>
-      <p:sp>
-        <p:nvSpPr>
-          <p:cNvPr id="7" name="Rounded Rectangle 6"/>
+          <a:bodyPr rtlCol="0" anchor="ctr"/>
+          <a:lstStyle/>
+          <a:p>
+            <a:pPr algn="ctr"/>
+          </a:p>
+        </p:txBody>
+      </p:sp>
+      <p:sp>
+        <p:nvSpPr>
+          <p:cNvPr id="8" name="Rounded Rectangle 7"/>
           <p:cNvSpPr/>
           <p:nvPr/>
         </p:nvSpPr>
         <p:spPr>
           <a:xfrm>
-            <a:off x="548640" y="3090672"/>
-            <a:ext cx="4892040" cy="676656"/>
+            <a:off x="731518" y="2633465"/>
+            <a:ext cx="3316215" cy="2340858"/>
           </a:xfrm>
           <a:prstGeom prst="roundRect">
             <a:avLst>
-              <a:gd name="adj" fmla="val 14000"/>
+              <a:gd name="adj" fmla="val 10000"/>
             </a:avLst>
           </a:prstGeom>
           <a:solidFill>
             <a:srgbClr val="120A06"/>
           </a:solidFill>
-          <a:ln w="19050">
+          <a:ln w="21166">
             <a:solidFill>
               <a:srgbClr val="F85800"/>
             </a:solidFill>
@@ -5432,65 +4714,91 @@
           </a:fontRef>
         </p:style>
         <p:txBody>
-          <a:bodyPr rtlCol="0" anchor="ctr" wrap="square" lIns="201168" rIns="201168" tIns="54864" bIns="54864"/>
-          <a:lstStyle/>
-          <a:p>
-            <a:pPr algn="l">
-              <a:lnSpc>
-                <a:spcPct val="95000"/>
-              </a:lnSpc>
-            </a:pPr>
-            <a:r>
-              <a:rPr sz="950" b="1" spc="150">
-                <a:solidFill>
-                  <a:srgbClr val="F85800"/>
+          <a:bodyPr rtlCol="0" anchor="ctr" wrap="square" lIns="121919" rIns="121919"/>
+          <a:lstStyle/>
+          <a:p>
+            <a:pPr algn="ctr"/>
+            <a:r>
+              <a:rPr sz="1533" b="1" spc="199">
+                <a:solidFill>
+                  <a:srgbClr val="C9BAB0"/>
                 </a:solidFill>
                 <a:latin typeface="Arial"/>
               </a:rPr>
-              <a:t>МЕССЕНДЖЕР</a:t>
-            </a:r>
-          </a:p>
-          <a:p>
-            <a:pPr algn="l">
-              <a:lnSpc>
-                <a:spcPct val="95000"/>
-              </a:lnSpc>
+              <a:t>SEO-АГЕНТСТВО</a:t>
+            </a:r>
+          </a:p>
+          <a:p>
+            <a:pPr algn="ctr">
               <a:spcBef>
-                <a:spcPts val="300"/>
+                <a:spcPts val="1333"/>
               </a:spcBef>
             </a:pPr>
             <a:r>
-              <a:rPr sz="1600" b="1">
+              <a:rPr sz="2799" b="1">
                 <a:solidFill>
                   <a:srgbClr val="FFFFFF"/>
                 </a:solidFill>
                 <a:latin typeface="Arial"/>
               </a:rPr>
-              <a:t>@geniimoscow</a:t>
-            </a:r>
-          </a:p>
-        </p:txBody>
-      </p:sp>
-      <p:sp>
-        <p:nvSpPr>
-          <p:cNvPr id="8" name="Rounded Rectangle 7"/>
+              <a:t>100 000 ₽</a:t>
+            </a:r>
+          </a:p>
+          <a:p>
+            <a:pPr algn="ctr">
+              <a:spcBef>
+                <a:spcPts val="533"/>
+              </a:spcBef>
+            </a:pPr>
+            <a:r>
+              <a:rPr sz="1266" b="0">
+                <a:solidFill>
+                  <a:srgbClr val="C9BAB0"/>
+                </a:solidFill>
+                <a:latin typeface="Arial"/>
+              </a:rPr>
+              <a:t>в месяц</a:t>
+            </a:r>
+          </a:p>
+          <a:p>
+            <a:pPr algn="ctr">
+              <a:spcBef>
+                <a:spcPts val="1199"/>
+              </a:spcBef>
+            </a:pPr>
+            <a:r>
+              <a:rPr sz="1199" b="0">
+                <a:solidFill>
+                  <a:srgbClr val="9A8C84"/>
+                </a:solidFill>
+                <a:latin typeface="Arial"/>
+              </a:rPr>
+              <a:t>подрядчики, правки,
+переписка, сроки</a:t>
+            </a:r>
+          </a:p>
+        </p:txBody>
+      </p:sp>
+      <p:sp>
+        <p:nvSpPr>
+          <p:cNvPr id="9" name="Rounded Rectangle 8"/>
           <p:cNvSpPr/>
           <p:nvPr/>
         </p:nvSpPr>
         <p:spPr>
           <a:xfrm>
-            <a:off x="548640" y="3895344"/>
-            <a:ext cx="4892040" cy="676656"/>
+            <a:off x="4437876" y="2633465"/>
+            <a:ext cx="3316215" cy="2340858"/>
           </a:xfrm>
           <a:prstGeom prst="roundRect">
             <a:avLst>
-              <a:gd name="adj" fmla="val 14000"/>
+              <a:gd name="adj" fmla="val 10000"/>
             </a:avLst>
           </a:prstGeom>
           <a:solidFill>
             <a:srgbClr val="120A06"/>
           </a:solidFill>
-          <a:ln w="19050">
+          <a:ln w="42333">
             <a:solidFill>
               <a:srgbClr val="F85800"/>
             </a:solidFill>
@@ -5512,63 +4820,89 @@
           </a:fontRef>
         </p:style>
         <p:txBody>
-          <a:bodyPr rtlCol="0" anchor="ctr" wrap="square" lIns="201168" rIns="201168" tIns="54864" bIns="54864"/>
-          <a:lstStyle/>
-          <a:p>
-            <a:pPr algn="l">
-              <a:lnSpc>
-                <a:spcPct val="95000"/>
-              </a:lnSpc>
-            </a:pPr>
-            <a:r>
-              <a:rPr sz="950" b="1" spc="150">
+          <a:bodyPr rtlCol="0" anchor="ctr" wrap="square" lIns="121919" rIns="121919"/>
+          <a:lstStyle/>
+          <a:p>
+            <a:pPr algn="ctr"/>
+            <a:r>
+              <a:rPr sz="1533" b="1" spc="199">
                 <a:solidFill>
                   <a:srgbClr val="F85800"/>
                 </a:solidFill>
                 <a:latin typeface="Arial"/>
               </a:rPr>
-              <a:t>ПОЧТА</a:t>
-            </a:r>
-          </a:p>
-          <a:p>
-            <a:pPr algn="l">
-              <a:lnSpc>
-                <a:spcPct val="95000"/>
-              </a:lnSpc>
+              <a:t>ПРОМПТЕР</a:t>
+            </a:r>
+          </a:p>
+          <a:p>
+            <a:pPr algn="ctr">
               <a:spcBef>
-                <a:spcPts val="300"/>
+                <a:spcPts val="1333"/>
               </a:spcBef>
             </a:pPr>
             <a:r>
-              <a:rPr sz="1400" b="1">
+              <a:rPr sz="3466" b="1">
                 <a:solidFill>
                   <a:srgbClr val="FFFFFF"/>
                 </a:solidFill>
                 <a:latin typeface="Arial"/>
               </a:rPr>
-              <a:t>prompter.moscow@mail.ru</a:t>
-            </a:r>
-          </a:p>
-        </p:txBody>
-      </p:sp>
-      <p:sp>
-        <p:nvSpPr>
-          <p:cNvPr id="9" name="Rounded Rectangle 8"/>
+              <a:t>29 500 ₽</a:t>
+            </a:r>
+          </a:p>
+          <a:p>
+            <a:pPr algn="ctr">
+              <a:spcBef>
+                <a:spcPts val="533"/>
+              </a:spcBef>
+            </a:pPr>
+            <a:r>
+              <a:rPr sz="1266" b="0">
+                <a:solidFill>
+                  <a:srgbClr val="C9BAB0"/>
+                </a:solidFill>
+                <a:latin typeface="Arial"/>
+              </a:rPr>
+              <a:t>в месяц, цена фиксированная</a:t>
+            </a:r>
+          </a:p>
+          <a:p>
+            <a:pPr algn="ctr">
+              <a:spcBef>
+                <a:spcPts val="1199"/>
+              </a:spcBef>
+            </a:pPr>
+            <a:r>
+              <a:rPr sz="1199" b="0">
+                <a:solidFill>
+                  <a:srgbClr val="9A8C84"/>
+                </a:solidFill>
+                <a:latin typeface="Arial"/>
+              </a:rPr>
+              <a:t>настройка и обслуживание
+уже включены</a:t>
+            </a:r>
+          </a:p>
+        </p:txBody>
+      </p:sp>
+      <p:sp>
+        <p:nvSpPr>
+          <p:cNvPr id="10" name="Rounded Rectangle 9"/>
           <p:cNvSpPr/>
           <p:nvPr/>
         </p:nvSpPr>
         <p:spPr>
           <a:xfrm>
-            <a:off x="6035040" y="2286000"/>
-            <a:ext cx="1920240" cy="1920240"/>
+            <a:off x="5340082" y="2426201"/>
+            <a:ext cx="1511804" cy="414526"/>
           </a:xfrm>
           <a:prstGeom prst="roundRect">
             <a:avLst>
-              <a:gd name="adj" fmla="val 6000"/>
+              <a:gd name="adj" fmla="val 50000"/>
             </a:avLst>
           </a:prstGeom>
           <a:solidFill>
-            <a:srgbClr val="FFFFFF"/>
+            <a:srgbClr val="F85800"/>
           </a:solidFill>
           <a:ln>
             <a:noFill/>
@@ -5594,99 +4928,195 @@
           <a:lstStyle/>
           <a:p>
             <a:pPr algn="ctr"/>
-          </a:p>
-        </p:txBody>
-      </p:sp>
-      <p:pic>
-        <p:nvPicPr>
-          <p:cNvPr id="10" name="Picture 9" descr="qr-prompter.png"/>
-          <p:cNvPicPr>
-            <a:picLocks noChangeAspect="1"/>
-          </p:cNvPicPr>
-          <p:nvPr/>
-        </p:nvPicPr>
-        <p:blipFill>
-          <a:blip r:embed="rId4"/>
-          <a:stretch>
-            <a:fillRect/>
-          </a:stretch>
-        </p:blipFill>
-        <p:spPr>
-          <a:xfrm>
-            <a:off x="6153912" y="2404872"/>
-            <a:ext cx="1682496" cy="1682496"/>
-          </a:xfrm>
-          <a:prstGeom prst="rect">
-            <a:avLst/>
-          </a:prstGeom>
-        </p:spPr>
-      </p:pic>
-      <p:sp>
-        <p:nvSpPr>
-          <p:cNvPr id="11" name="TextBox 10"/>
-          <p:cNvSpPr txBox="1"/>
-          <p:nvPr/>
-        </p:nvSpPr>
-        <p:spPr>
-          <a:xfrm>
-            <a:off x="6035040" y="4297680"/>
-            <a:ext cx="1920240" cy="274320"/>
-          </a:xfrm>
-          <a:prstGeom prst="rect">
-            <a:avLst/>
-          </a:prstGeom>
-          <a:noFill/>
-        </p:spPr>
-        <p:txBody>
-          <a:bodyPr wrap="square" lIns="0" rIns="0" tIns="0" bIns="0">
-            <a:spAutoFit/>
-          </a:bodyPr>
-          <a:lstStyle/>
-          <a:p>
-            <a:pPr algn="ctr"/>
-            <a:r>
-              <a:rPr sz="1000" b="1" spc="100">
-                <a:solidFill>
-                  <a:srgbClr val="F85800"/>
+            <a:r>
+              <a:rPr sz="1333" b="1" spc="133">
+                <a:solidFill>
+                  <a:srgbClr val="140802"/>
                 </a:solidFill>
                 <a:latin typeface="Arial"/>
               </a:rPr>
-              <a:t>PROMPTER-AI.MOSCOW</a:t>
-            </a:r>
-          </a:p>
-        </p:txBody>
-      </p:sp>
-      <p:sp>
-        <p:nvSpPr>
-          <p:cNvPr id="12" name="TextBox 11"/>
-          <p:cNvSpPr txBox="1"/>
-          <p:nvPr/>
-        </p:nvSpPr>
-        <p:spPr>
-          <a:xfrm>
-            <a:off x="6035040" y="4517136"/>
-            <a:ext cx="1920240" cy="274320"/>
-          </a:xfrm>
-          <a:prstGeom prst="rect">
-            <a:avLst/>
-          </a:prstGeom>
-          <a:noFill/>
-        </p:spPr>
-        <p:txBody>
-          <a:bodyPr wrap="square" lIns="0" rIns="0" tIns="0" bIns="0">
-            <a:spAutoFit/>
-          </a:bodyPr>
+              <a:t>ВЫГОДНО</a:t>
+            </a:r>
+          </a:p>
+        </p:txBody>
+      </p:sp>
+      <p:sp>
+        <p:nvSpPr>
+          <p:cNvPr id="11" name="Rounded Rectangle 10"/>
+          <p:cNvSpPr/>
+          <p:nvPr/>
+        </p:nvSpPr>
+        <p:spPr>
+          <a:xfrm>
+            <a:off x="8144235" y="2633465"/>
+            <a:ext cx="3316215" cy="2340858"/>
+          </a:xfrm>
+          <a:prstGeom prst="roundRect">
+            <a:avLst>
+              <a:gd name="adj" fmla="val 10000"/>
+            </a:avLst>
+          </a:prstGeom>
+          <a:solidFill>
+            <a:srgbClr val="120A06"/>
+          </a:solidFill>
+          <a:ln w="21166">
+            <a:solidFill>
+              <a:srgbClr val="F85800"/>
+            </a:solidFill>
+          </a:ln>
+          <a:effectLst/>
+        </p:spPr>
+        <p:style>
+          <a:lnRef idx="1">
+            <a:schemeClr val="accent1"/>
+          </a:lnRef>
+          <a:fillRef idx="3">
+            <a:schemeClr val="accent1"/>
+          </a:fillRef>
+          <a:effectRef idx="2">
+            <a:schemeClr val="accent1"/>
+          </a:effectRef>
+          <a:fontRef idx="minor">
+            <a:schemeClr val="lt1"/>
+          </a:fontRef>
+        </p:style>
+        <p:txBody>
+          <a:bodyPr rtlCol="0" anchor="ctr" wrap="square" lIns="121919" rIns="121919"/>
           <a:lstStyle/>
           <a:p>
             <a:pPr algn="ctr"/>
             <a:r>
-              <a:rPr sz="950" b="0" spc="100">
+              <a:rPr sz="1533" b="1" spc="199">
                 <a:solidFill>
                   <a:srgbClr val="C9BAB0"/>
                 </a:solidFill>
                 <a:latin typeface="Arial"/>
               </a:rPr>
-              <a:t>SEO и GEO</a:t>
+              <a:t>ЭКОНОМИЯ</a:t>
+            </a:r>
+          </a:p>
+          <a:p>
+            <a:pPr algn="ctr">
+              <a:spcBef>
+                <a:spcPts val="1333"/>
+              </a:spcBef>
+            </a:pPr>
+            <a:r>
+              <a:rPr sz="2799" b="1">
+                <a:solidFill>
+                  <a:srgbClr val="5FD08A"/>
+                </a:solidFill>
+                <a:latin typeface="Arial"/>
+              </a:rPr>
+              <a:t>от 70 000 ₽</a:t>
+            </a:r>
+          </a:p>
+          <a:p>
+            <a:pPr algn="ctr">
+              <a:spcBef>
+                <a:spcPts val="533"/>
+              </a:spcBef>
+            </a:pPr>
+            <a:r>
+              <a:rPr sz="1266" b="0">
+                <a:solidFill>
+                  <a:srgbClr val="C9BAB0"/>
+                </a:solidFill>
+                <a:latin typeface="Arial"/>
+              </a:rPr>
+              <a:t>каждый месяц</a:t>
+            </a:r>
+          </a:p>
+          <a:p>
+            <a:pPr algn="ctr">
+              <a:spcBef>
+                <a:spcPts val="1199"/>
+              </a:spcBef>
+            </a:pPr>
+            <a:r>
+              <a:rPr sz="1199" b="0">
+                <a:solidFill>
+                  <a:srgbClr val="9A8C84"/>
+                </a:solidFill>
+                <a:latin typeface="Arial"/>
+              </a:rPr>
+              <a:t>тот же объём работ
+без штата и подрядчиков</a:t>
+            </a:r>
+          </a:p>
+        </p:txBody>
+      </p:sp>
+      <p:sp>
+        <p:nvSpPr>
+          <p:cNvPr id="12" name="Rounded Rectangle 11"/>
+          <p:cNvSpPr/>
+          <p:nvPr/>
+        </p:nvSpPr>
+        <p:spPr>
+          <a:xfrm>
+            <a:off x="731518" y="5388850"/>
+            <a:ext cx="10728933" cy="877821"/>
+          </a:xfrm>
+          <a:prstGeom prst="roundRect">
+            <a:avLst>
+              <a:gd name="adj" fmla="val 30000"/>
+            </a:avLst>
+          </a:prstGeom>
+          <a:solidFill>
+            <a:srgbClr val="120A06"/>
+          </a:solidFill>
+          <a:ln w="33866">
+            <a:solidFill>
+              <a:srgbClr val="F85800"/>
+            </a:solidFill>
+          </a:ln>
+          <a:effectLst/>
+        </p:spPr>
+        <p:style>
+          <a:lnRef idx="1">
+            <a:schemeClr val="accent1"/>
+          </a:lnRef>
+          <a:fillRef idx="3">
+            <a:schemeClr val="accent1"/>
+          </a:fillRef>
+          <a:effectRef idx="2">
+            <a:schemeClr val="accent1"/>
+          </a:effectRef>
+          <a:fontRef idx="minor">
+            <a:schemeClr val="lt1"/>
+          </a:fontRef>
+        </p:style>
+        <p:txBody>
+          <a:bodyPr rtlCol="0" anchor="ctr" wrap="square"/>
+          <a:lstStyle/>
+          <a:p>
+            <a:pPr algn="ctr"/>
+            <a:r>
+              <a:rPr sz="2533" b="1" spc="133">
+                <a:solidFill>
+                  <a:srgbClr val="FFFFFF"/>
+                </a:solidFill>
+                <a:latin typeface="Arial"/>
+              </a:rPr>
+              <a:t>ПОЛНЫЙ ЦИКЛ ПРОДВИЖЕНИЯ — </a:t>
+            </a:r>
+            <a:r>
+              <a:rPr sz="2533" b="1" spc="133">
+                <a:solidFill>
+                  <a:srgbClr val="F85800"/>
+                </a:solidFill>
+                <a:latin typeface="Arial"/>
+              </a:rPr>
+              <a:t>29 500 ₽ В МЕСЯЦ</a:t>
+            </a:r>
+            <a:r>
+              <a:rPr sz="2533" b="1" spc="133">
+                <a:solidFill>
+                  <a:srgbClr val="FFFFFF"/>
+                </a:solidFill>
+                <a:latin typeface="Arial"/>
+              </a:rPr>
+              <a:t>  →</a:t>
             </a:r>
           </a:p>
         </p:txBody>
@@ -5711,7 +5141,7 @@
       <p:grpSpPr/>
       <p:pic>
         <p:nvPicPr>
-          <p:cNvPr id="2" name="Picture 1" descr="s01.jpg"/>
+          <p:cNvPr id="2" name="Picture 1" descr="fon.jpg"/>
           <p:cNvPicPr>
             <a:picLocks noChangeAspect="1"/>
           </p:cNvPicPr>
@@ -5726,13 +5156,436 @@
         <p:spPr>
           <a:xfrm>
             <a:off x="0" y="0"/>
-            <a:ext cx="9144000" cy="5143500"/>
+            <a:ext cx="12191695" cy="6858000"/>
           </a:xfrm>
           <a:prstGeom prst="rect">
             <a:avLst/>
           </a:prstGeom>
         </p:spPr>
       </p:pic>
+      <p:sp>
+        <p:nvSpPr>
+          <p:cNvPr id="3" name="Rectangle 2"/>
+          <p:cNvSpPr/>
+          <p:nvPr/>
+        </p:nvSpPr>
+        <p:spPr>
+          <a:xfrm>
+            <a:off x="91440" y="91440"/>
+            <a:ext cx="12008815" cy="6675120"/>
+          </a:xfrm>
+          <a:prstGeom prst="rect">
+            <a:avLst/>
+          </a:prstGeom>
+          <a:noFill/>
+          <a:ln w="15875">
+            <a:solidFill>
+              <a:srgbClr val="E8611A"/>
+            </a:solidFill>
+          </a:ln>
+          <a:effectLst/>
+        </p:spPr>
+        <p:style>
+          <a:lnRef idx="1">
+            <a:schemeClr val="accent1"/>
+          </a:lnRef>
+          <a:fillRef idx="3">
+            <a:schemeClr val="accent1"/>
+          </a:fillRef>
+          <a:effectRef idx="2">
+            <a:schemeClr val="accent1"/>
+          </a:effectRef>
+          <a:fontRef idx="minor">
+            <a:schemeClr val="lt1"/>
+          </a:fontRef>
+        </p:style>
+        <p:txBody>
+          <a:bodyPr rtlCol="0" anchor="ctr"/>
+          <a:lstStyle/>
+          <a:p>
+            <a:pPr algn="ctr"/>
+          </a:p>
+        </p:txBody>
+      </p:sp>
+      <p:pic>
+        <p:nvPicPr>
+          <p:cNvPr id="4" name="Picture 3" descr="mark.png"/>
+          <p:cNvPicPr>
+            <a:picLocks noChangeAspect="1"/>
+          </p:cNvPicPr>
+          <p:nvPr/>
+        </p:nvPicPr>
+        <p:blipFill>
+          <a:blip r:embed="rId3"/>
+          <a:stretch>
+            <a:fillRect/>
+          </a:stretch>
+        </p:blipFill>
+        <p:spPr>
+          <a:xfrm>
+            <a:off x="685800" y="457200"/>
+            <a:ext cx="480290" cy="457200"/>
+          </a:xfrm>
+          <a:prstGeom prst="rect">
+            <a:avLst/>
+          </a:prstGeom>
+        </p:spPr>
+      </p:pic>
+      <p:pic>
+        <p:nvPicPr>
+          <p:cNvPr id="5" name="Picture 4" descr="logo.png"/>
+          <p:cNvPicPr>
+            <a:picLocks noChangeAspect="1"/>
+          </p:cNvPicPr>
+          <p:nvPr/>
+        </p:nvPicPr>
+        <p:blipFill>
+          <a:blip r:embed="rId4"/>
+          <a:stretch>
+            <a:fillRect/>
+          </a:stretch>
+        </p:blipFill>
+        <p:spPr>
+          <a:xfrm>
+            <a:off x="11048695" y="457200"/>
+            <a:ext cx="457200" cy="457200"/>
+          </a:xfrm>
+          <a:prstGeom prst="rect">
+            <a:avLst/>
+          </a:prstGeom>
+        </p:spPr>
+      </p:pic>
+      <p:sp>
+        <p:nvSpPr>
+          <p:cNvPr id="6" name="TextBox 5"/>
+          <p:cNvSpPr txBox="1"/>
+          <p:nvPr/>
+        </p:nvSpPr>
+        <p:spPr>
+          <a:xfrm>
+            <a:off x="685800" y="987552"/>
+            <a:ext cx="2743200" cy="201168"/>
+          </a:xfrm>
+          <a:prstGeom prst="rect">
+            <a:avLst/>
+          </a:prstGeom>
+          <a:noFill/>
+        </p:spPr>
+        <p:txBody>
+          <a:bodyPr wrap="square" lIns="0" rIns="0" tIns="0" bIns="0" anchor="t">
+            <a:spAutoFit/>
+          </a:bodyPr>
+          <a:lstStyle/>
+          <a:p>
+            <a:pPr algn="l">
+              <a:lnSpc>
+                <a:spcPct val="120000"/>
+              </a:lnSpc>
+            </a:pPr>
+            <a:r>
+              <a:rPr sz="950" b="0">
+                <a:solidFill>
+                  <a:srgbClr val="A2978E"/>
+                </a:solidFill>
+                <a:latin typeface="Inter"/>
+              </a:rPr>
+              <a:t>ГенИИ</a:t>
+            </a:r>
+          </a:p>
+        </p:txBody>
+      </p:sp>
+      <p:sp>
+        <p:nvSpPr>
+          <p:cNvPr id="7" name="TextBox 6"/>
+          <p:cNvSpPr txBox="1"/>
+          <p:nvPr/>
+        </p:nvSpPr>
+        <p:spPr>
+          <a:xfrm>
+            <a:off x="8762695" y="987552"/>
+            <a:ext cx="2743200" cy="201168"/>
+          </a:xfrm>
+          <a:prstGeom prst="rect">
+            <a:avLst/>
+          </a:prstGeom>
+          <a:noFill/>
+        </p:spPr>
+        <p:txBody>
+          <a:bodyPr wrap="square" lIns="0" rIns="0" tIns="0" bIns="0" anchor="t">
+            <a:spAutoFit/>
+          </a:bodyPr>
+          <a:lstStyle/>
+          <a:p>
+            <a:pPr algn="r">
+              <a:lnSpc>
+                <a:spcPct val="120000"/>
+              </a:lnSpc>
+            </a:pPr>
+            <a:r>
+              <a:rPr sz="950" b="0">
+                <a:solidFill>
+                  <a:srgbClr val="A2978E"/>
+                </a:solidFill>
+                <a:latin typeface="Inter"/>
+              </a:rPr>
+              <a:t>Промптер</a:t>
+            </a:r>
+          </a:p>
+        </p:txBody>
+      </p:sp>
+      <p:sp>
+        <p:nvSpPr>
+          <p:cNvPr id="8" name="TextBox 7"/>
+          <p:cNvSpPr txBox="1"/>
+          <p:nvPr/>
+        </p:nvSpPr>
+        <p:spPr>
+          <a:xfrm>
+            <a:off x="10408615" y="6291072"/>
+            <a:ext cx="1097280" cy="274320"/>
+          </a:xfrm>
+          <a:prstGeom prst="rect">
+            <a:avLst/>
+          </a:prstGeom>
+          <a:noFill/>
+        </p:spPr>
+        <p:txBody>
+          <a:bodyPr wrap="square" lIns="0" rIns="0" tIns="0" bIns="0" anchor="t">
+            <a:spAutoFit/>
+          </a:bodyPr>
+          <a:lstStyle/>
+          <a:p>
+            <a:pPr algn="r">
+              <a:lnSpc>
+                <a:spcPct val="120000"/>
+              </a:lnSpc>
+            </a:pPr>
+            <a:r>
+              <a:rPr sz="1000" b="0">
+                <a:solidFill>
+                  <a:srgbClr val="A2978E"/>
+                </a:solidFill>
+                <a:latin typeface="Inter"/>
+              </a:rPr>
+              <a:t>2 / 5</a:t>
+            </a:r>
+          </a:p>
+        </p:txBody>
+      </p:sp>
+      <p:sp>
+        <p:nvSpPr>
+          <p:cNvPr id="9" name="TextBox 8"/>
+          <p:cNvSpPr txBox="1"/>
+          <p:nvPr/>
+        </p:nvSpPr>
+        <p:spPr>
+          <a:xfrm>
+            <a:off x="1143000" y="1920240"/>
+            <a:ext cx="10271455" cy="2377440"/>
+          </a:xfrm>
+          <a:prstGeom prst="rect">
+            <a:avLst/>
+          </a:prstGeom>
+          <a:noFill/>
+        </p:spPr>
+        <p:txBody>
+          <a:bodyPr wrap="square" lIns="0" rIns="0" tIns="0" bIns="0" anchor="t">
+            <a:spAutoFit/>
+          </a:bodyPr>
+          <a:lstStyle/>
+          <a:p>
+            <a:pPr algn="l">
+              <a:lnSpc>
+                <a:spcPct val="126000"/>
+              </a:lnSpc>
+            </a:pPr>
+            <a:r>
+              <a:rPr sz="3600" b="0">
+                <a:solidFill>
+                  <a:srgbClr val="FFFFFF"/>
+                </a:solidFill>
+                <a:latin typeface="Unbounded"/>
+              </a:rPr>
+              <a:t>«Предприниматель тратит на соцсети не деньги, а своё время — самый дорогой ресурс в компании»</a:t>
+            </a:r>
+          </a:p>
+        </p:txBody>
+      </p:sp>
+      <p:sp>
+        <p:nvSpPr>
+          <p:cNvPr id="10" name="Rectangle 9"/>
+          <p:cNvSpPr/>
+          <p:nvPr/>
+        </p:nvSpPr>
+        <p:spPr>
+          <a:xfrm>
+            <a:off x="685800" y="1993392"/>
+            <a:ext cx="82296" cy="2267712"/>
+          </a:xfrm>
+          <a:prstGeom prst="rect">
+            <a:avLst/>
+          </a:prstGeom>
+          <a:solidFill>
+            <a:srgbClr val="FF8A3D"/>
+          </a:solidFill>
+          <a:ln>
+            <a:noFill/>
+          </a:ln>
+          <a:effectLst/>
+        </p:spPr>
+        <p:style>
+          <a:lnRef idx="1">
+            <a:schemeClr val="accent1"/>
+          </a:lnRef>
+          <a:fillRef idx="3">
+            <a:schemeClr val="accent1"/>
+          </a:fillRef>
+          <a:effectRef idx="2">
+            <a:schemeClr val="accent1"/>
+          </a:effectRef>
+          <a:fontRef idx="minor">
+            <a:schemeClr val="lt1"/>
+          </a:fontRef>
+        </p:style>
+        <p:txBody>
+          <a:bodyPr rtlCol="0" anchor="ctr"/>
+          <a:lstStyle/>
+          <a:p>
+            <a:pPr algn="ctr"/>
+          </a:p>
+        </p:txBody>
+      </p:sp>
+      <p:sp>
+        <p:nvSpPr>
+          <p:cNvPr id="11" name="TextBox 10"/>
+          <p:cNvSpPr txBox="1"/>
+          <p:nvPr/>
+        </p:nvSpPr>
+        <p:spPr>
+          <a:xfrm>
+            <a:off x="1143000" y="4590288"/>
+            <a:ext cx="10271455" cy="320802"/>
+          </a:xfrm>
+          <a:prstGeom prst="rect">
+            <a:avLst/>
+          </a:prstGeom>
+          <a:noFill/>
+        </p:spPr>
+        <p:txBody>
+          <a:bodyPr wrap="square" lIns="0" rIns="0" tIns="0" bIns="0" anchor="t">
+            <a:spAutoFit/>
+          </a:bodyPr>
+          <a:lstStyle/>
+          <a:p>
+            <a:pPr algn="l">
+              <a:lnSpc>
+                <a:spcPct val="130000"/>
+              </a:lnSpc>
+            </a:pPr>
+            <a:r>
+              <a:rPr sz="1500" b="1">
+                <a:solidFill>
+                  <a:srgbClr val="FF8A3D"/>
+                </a:solidFill>
+                <a:latin typeface="Inter"/>
+              </a:rPr>
+              <a:t>Руслан Анатольевич Дёмин, </a:t>
+            </a:r>
+            <a:r>
+              <a:rPr sz="1500" b="0">
+                <a:solidFill>
+                  <a:srgbClr val="A2978E"/>
+                </a:solidFill>
+                <a:latin typeface="Inter"/>
+              </a:rPr>
+              <a:t>управляющий партнёр</a:t>
+            </a:r>
+          </a:p>
+        </p:txBody>
+      </p:sp>
+      <p:sp>
+        <p:nvSpPr>
+          <p:cNvPr id="12" name="Rectangle 11"/>
+          <p:cNvSpPr/>
+          <p:nvPr/>
+        </p:nvSpPr>
+        <p:spPr>
+          <a:xfrm>
+            <a:off x="685800" y="5394960"/>
+            <a:ext cx="10820095" cy="10972"/>
+          </a:xfrm>
+          <a:prstGeom prst="rect">
+            <a:avLst/>
+          </a:prstGeom>
+          <a:solidFill>
+            <a:srgbClr val="7A3F1C"/>
+          </a:solidFill>
+          <a:ln>
+            <a:noFill/>
+          </a:ln>
+          <a:effectLst/>
+        </p:spPr>
+        <p:style>
+          <a:lnRef idx="1">
+            <a:schemeClr val="accent1"/>
+          </a:lnRef>
+          <a:fillRef idx="3">
+            <a:schemeClr val="accent1"/>
+          </a:fillRef>
+          <a:effectRef idx="2">
+            <a:schemeClr val="accent1"/>
+          </a:effectRef>
+          <a:fontRef idx="minor">
+            <a:schemeClr val="lt1"/>
+          </a:fontRef>
+        </p:style>
+        <p:txBody>
+          <a:bodyPr rtlCol="0" anchor="ctr"/>
+          <a:lstStyle/>
+          <a:p>
+            <a:pPr algn="ctr"/>
+          </a:p>
+        </p:txBody>
+      </p:sp>
+      <p:sp>
+        <p:nvSpPr>
+          <p:cNvPr id="13" name="TextBox 12"/>
+          <p:cNvSpPr txBox="1"/>
+          <p:nvPr/>
+        </p:nvSpPr>
+        <p:spPr>
+          <a:xfrm>
+            <a:off x="685800" y="5632704"/>
+            <a:ext cx="10820095" cy="364617"/>
+          </a:xfrm>
+          <a:prstGeom prst="rect">
+            <a:avLst/>
+          </a:prstGeom>
+          <a:noFill/>
+        </p:spPr>
+        <p:txBody>
+          <a:bodyPr wrap="square" lIns="0" rIns="0" tIns="0" bIns="0" anchor="t">
+            <a:spAutoFit/>
+          </a:bodyPr>
+          <a:lstStyle/>
+          <a:p>
+            <a:pPr algn="l">
+              <a:lnSpc>
+                <a:spcPct val="135000"/>
+              </a:lnSpc>
+            </a:pPr>
+            <a:r>
+              <a:rPr sz="1700" b="0">
+                <a:solidFill>
+                  <a:srgbClr val="A2978E"/>
+                </a:solidFill>
+                <a:latin typeface="Inter"/>
+              </a:rPr>
+              <a:t>Согласование тем · Правки текстов · Раскладка по площадкам</a:t>
+            </a:r>
+          </a:p>
+        </p:txBody>
+      </p:sp>
     </p:spTree>
   </p:cSld>
   <p:clrMapOvr>
@@ -5753,7 +5606,7 @@
       <p:grpSpPr/>
       <p:pic>
         <p:nvPicPr>
-          <p:cNvPr id="2" name="Picture 1" descr="s02.jpg"/>
+          <p:cNvPr id="2" name="Picture 1" descr="fon.jpg"/>
           <p:cNvPicPr>
             <a:picLocks noChangeAspect="1"/>
           </p:cNvPicPr>
@@ -5768,13 +5621,431 @@
         <p:spPr>
           <a:xfrm>
             <a:off x="0" y="0"/>
-            <a:ext cx="9144000" cy="5143500"/>
+            <a:ext cx="12191695" cy="6858000"/>
           </a:xfrm>
           <a:prstGeom prst="rect">
             <a:avLst/>
           </a:prstGeom>
         </p:spPr>
       </p:pic>
+      <p:sp>
+        <p:nvSpPr>
+          <p:cNvPr id="3" name="Rectangle 2"/>
+          <p:cNvSpPr/>
+          <p:nvPr/>
+        </p:nvSpPr>
+        <p:spPr>
+          <a:xfrm>
+            <a:off x="91440" y="91440"/>
+            <a:ext cx="12008815" cy="6675120"/>
+          </a:xfrm>
+          <a:prstGeom prst="rect">
+            <a:avLst/>
+          </a:prstGeom>
+          <a:noFill/>
+          <a:ln w="15875">
+            <a:solidFill>
+              <a:srgbClr val="E8611A"/>
+            </a:solidFill>
+          </a:ln>
+          <a:effectLst/>
+        </p:spPr>
+        <p:style>
+          <a:lnRef idx="1">
+            <a:schemeClr val="accent1"/>
+          </a:lnRef>
+          <a:fillRef idx="3">
+            <a:schemeClr val="accent1"/>
+          </a:fillRef>
+          <a:effectRef idx="2">
+            <a:schemeClr val="accent1"/>
+          </a:effectRef>
+          <a:fontRef idx="minor">
+            <a:schemeClr val="lt1"/>
+          </a:fontRef>
+        </p:style>
+        <p:txBody>
+          <a:bodyPr rtlCol="0" anchor="ctr"/>
+          <a:lstStyle/>
+          <a:p>
+            <a:pPr algn="ctr"/>
+          </a:p>
+        </p:txBody>
+      </p:sp>
+      <p:pic>
+        <p:nvPicPr>
+          <p:cNvPr id="4" name="Picture 3" descr="mark.png"/>
+          <p:cNvPicPr>
+            <a:picLocks noChangeAspect="1"/>
+          </p:cNvPicPr>
+          <p:nvPr/>
+        </p:nvPicPr>
+        <p:blipFill>
+          <a:blip r:embed="rId3"/>
+          <a:stretch>
+            <a:fillRect/>
+          </a:stretch>
+        </p:blipFill>
+        <p:spPr>
+          <a:xfrm>
+            <a:off x="685800" y="457200"/>
+            <a:ext cx="480290" cy="457200"/>
+          </a:xfrm>
+          <a:prstGeom prst="rect">
+            <a:avLst/>
+          </a:prstGeom>
+        </p:spPr>
+      </p:pic>
+      <p:pic>
+        <p:nvPicPr>
+          <p:cNvPr id="5" name="Picture 4" descr="logo.png"/>
+          <p:cNvPicPr>
+            <a:picLocks noChangeAspect="1"/>
+          </p:cNvPicPr>
+          <p:nvPr/>
+        </p:nvPicPr>
+        <p:blipFill>
+          <a:blip r:embed="rId4"/>
+          <a:stretch>
+            <a:fillRect/>
+          </a:stretch>
+        </p:blipFill>
+        <p:spPr>
+          <a:xfrm>
+            <a:off x="11048695" y="457200"/>
+            <a:ext cx="457200" cy="457200"/>
+          </a:xfrm>
+          <a:prstGeom prst="rect">
+            <a:avLst/>
+          </a:prstGeom>
+        </p:spPr>
+      </p:pic>
+      <p:sp>
+        <p:nvSpPr>
+          <p:cNvPr id="6" name="TextBox 5"/>
+          <p:cNvSpPr txBox="1"/>
+          <p:nvPr/>
+        </p:nvSpPr>
+        <p:spPr>
+          <a:xfrm>
+            <a:off x="685800" y="987552"/>
+            <a:ext cx="2743200" cy="201168"/>
+          </a:xfrm>
+          <a:prstGeom prst="rect">
+            <a:avLst/>
+          </a:prstGeom>
+          <a:noFill/>
+        </p:spPr>
+        <p:txBody>
+          <a:bodyPr wrap="square" lIns="0" rIns="0" tIns="0" bIns="0" anchor="t">
+            <a:spAutoFit/>
+          </a:bodyPr>
+          <a:lstStyle/>
+          <a:p>
+            <a:pPr algn="l">
+              <a:lnSpc>
+                <a:spcPct val="120000"/>
+              </a:lnSpc>
+            </a:pPr>
+            <a:r>
+              <a:rPr sz="950" b="0">
+                <a:solidFill>
+                  <a:srgbClr val="A2978E"/>
+                </a:solidFill>
+                <a:latin typeface="Inter"/>
+              </a:rPr>
+              <a:t>ГенИИ</a:t>
+            </a:r>
+          </a:p>
+        </p:txBody>
+      </p:sp>
+      <p:sp>
+        <p:nvSpPr>
+          <p:cNvPr id="7" name="TextBox 6"/>
+          <p:cNvSpPr txBox="1"/>
+          <p:nvPr/>
+        </p:nvSpPr>
+        <p:spPr>
+          <a:xfrm>
+            <a:off x="8762695" y="987552"/>
+            <a:ext cx="2743200" cy="201168"/>
+          </a:xfrm>
+          <a:prstGeom prst="rect">
+            <a:avLst/>
+          </a:prstGeom>
+          <a:noFill/>
+        </p:spPr>
+        <p:txBody>
+          <a:bodyPr wrap="square" lIns="0" rIns="0" tIns="0" bIns="0" anchor="t">
+            <a:spAutoFit/>
+          </a:bodyPr>
+          <a:lstStyle/>
+          <a:p>
+            <a:pPr algn="r">
+              <a:lnSpc>
+                <a:spcPct val="120000"/>
+              </a:lnSpc>
+            </a:pPr>
+            <a:r>
+              <a:rPr sz="950" b="0">
+                <a:solidFill>
+                  <a:srgbClr val="A2978E"/>
+                </a:solidFill>
+                <a:latin typeface="Inter"/>
+              </a:rPr>
+              <a:t>Промптер</a:t>
+            </a:r>
+          </a:p>
+        </p:txBody>
+      </p:sp>
+      <p:sp>
+        <p:nvSpPr>
+          <p:cNvPr id="8" name="TextBox 7"/>
+          <p:cNvSpPr txBox="1"/>
+          <p:nvPr/>
+        </p:nvSpPr>
+        <p:spPr>
+          <a:xfrm>
+            <a:off x="10408615" y="6291072"/>
+            <a:ext cx="1097280" cy="274320"/>
+          </a:xfrm>
+          <a:prstGeom prst="rect">
+            <a:avLst/>
+          </a:prstGeom>
+          <a:noFill/>
+        </p:spPr>
+        <p:txBody>
+          <a:bodyPr wrap="square" lIns="0" rIns="0" tIns="0" bIns="0" anchor="t">
+            <a:spAutoFit/>
+          </a:bodyPr>
+          <a:lstStyle/>
+          <a:p>
+            <a:pPr algn="r">
+              <a:lnSpc>
+                <a:spcPct val="120000"/>
+              </a:lnSpc>
+            </a:pPr>
+            <a:r>
+              <a:rPr sz="1000" b="0">
+                <a:solidFill>
+                  <a:srgbClr val="A2978E"/>
+                </a:solidFill>
+                <a:latin typeface="Inter"/>
+              </a:rPr>
+              <a:t>3 / 5</a:t>
+            </a:r>
+          </a:p>
+        </p:txBody>
+      </p:sp>
+      <p:sp>
+        <p:nvSpPr>
+          <p:cNvPr id="9" name="TextBox 8"/>
+          <p:cNvSpPr txBox="1"/>
+          <p:nvPr/>
+        </p:nvSpPr>
+        <p:spPr>
+          <a:xfrm>
+            <a:off x="685800" y="1463040"/>
+            <a:ext cx="10820095" cy="1083564"/>
+          </a:xfrm>
+          <a:prstGeom prst="rect">
+            <a:avLst/>
+          </a:prstGeom>
+          <a:noFill/>
+        </p:spPr>
+        <p:txBody>
+          <a:bodyPr wrap="square" lIns="0" rIns="0" tIns="0" bIns="0" anchor="t">
+            <a:spAutoFit/>
+          </a:bodyPr>
+          <a:lstStyle/>
+          <a:p>
+            <a:pPr algn="l">
+              <a:lnSpc>
+                <a:spcPct val="102000"/>
+              </a:lnSpc>
+            </a:pPr>
+            <a:r>
+              <a:rPr sz="7800" b="1">
+                <a:solidFill>
+                  <a:srgbClr val="4ADE80"/>
+                </a:solidFill>
+                <a:latin typeface="Unbounded"/>
+              </a:rPr>
+              <a:t>120–150 000 ₽</a:t>
+            </a:r>
+          </a:p>
+        </p:txBody>
+      </p:sp>
+      <p:sp>
+        <p:nvSpPr>
+          <p:cNvPr id="10" name="TextBox 9"/>
+          <p:cNvSpPr txBox="1"/>
+          <p:nvPr/>
+        </p:nvSpPr>
+        <p:spPr>
+          <a:xfrm>
+            <a:off x="685800" y="2601468"/>
+            <a:ext cx="10820095" cy="347472"/>
+          </a:xfrm>
+          <a:prstGeom prst="rect">
+            <a:avLst/>
+          </a:prstGeom>
+          <a:noFill/>
+        </p:spPr>
+        <p:txBody>
+          <a:bodyPr wrap="square" lIns="0" rIns="0" tIns="0" bIns="0" anchor="t">
+            <a:spAutoFit/>
+          </a:bodyPr>
+          <a:lstStyle/>
+          <a:p>
+            <a:pPr algn="l">
+              <a:lnSpc>
+                <a:spcPct val="135000"/>
+              </a:lnSpc>
+            </a:pPr>
+            <a:r>
+              <a:rPr sz="1600" b="0">
+                <a:solidFill>
+                  <a:srgbClr val="DED6CF"/>
+                </a:solidFill>
+                <a:latin typeface="Inter"/>
+              </a:rPr>
+              <a:t>в месяц — столько стоит digital-агентство</a:t>
+            </a:r>
+          </a:p>
+        </p:txBody>
+      </p:sp>
+      <p:sp>
+        <p:nvSpPr>
+          <p:cNvPr id="11" name="TextBox 10"/>
+          <p:cNvSpPr txBox="1"/>
+          <p:nvPr/>
+        </p:nvSpPr>
+        <p:spPr>
+          <a:xfrm>
+            <a:off x="1143000" y="3794760"/>
+            <a:ext cx="10271455" cy="1737360"/>
+          </a:xfrm>
+          <a:prstGeom prst="rect">
+            <a:avLst/>
+          </a:prstGeom>
+          <a:noFill/>
+        </p:spPr>
+        <p:txBody>
+          <a:bodyPr wrap="square" lIns="0" rIns="0" tIns="0" bIns="0" anchor="t">
+            <a:spAutoFit/>
+          </a:bodyPr>
+          <a:lstStyle/>
+          <a:p>
+            <a:pPr algn="l">
+              <a:lnSpc>
+                <a:spcPct val="126000"/>
+              </a:lnSpc>
+            </a:pPr>
+            <a:r>
+              <a:rPr sz="2600" b="0">
+                <a:solidFill>
+                  <a:srgbClr val="FFFFFF"/>
+                </a:solidFill>
+                <a:latin typeface="Unbounded"/>
+              </a:rPr>
+              <a:t>«Чтобы работать с нейросетями самому, нужно покупать токены, держать зарубежные аккаунты и воевать с блокировками. Готовый сервис снимает это целиком»</a:t>
+            </a:r>
+          </a:p>
+        </p:txBody>
+      </p:sp>
+      <p:sp>
+        <p:nvSpPr>
+          <p:cNvPr id="12" name="Rectangle 11"/>
+          <p:cNvSpPr/>
+          <p:nvPr/>
+        </p:nvSpPr>
+        <p:spPr>
+          <a:xfrm>
+            <a:off x="685800" y="3867912"/>
+            <a:ext cx="82296" cy="1627632"/>
+          </a:xfrm>
+          <a:prstGeom prst="rect">
+            <a:avLst/>
+          </a:prstGeom>
+          <a:solidFill>
+            <a:srgbClr val="FF8A3D"/>
+          </a:solidFill>
+          <a:ln>
+            <a:noFill/>
+          </a:ln>
+          <a:effectLst/>
+        </p:spPr>
+        <p:style>
+          <a:lnRef idx="1">
+            <a:schemeClr val="accent1"/>
+          </a:lnRef>
+          <a:fillRef idx="3">
+            <a:schemeClr val="accent1"/>
+          </a:fillRef>
+          <a:effectRef idx="2">
+            <a:schemeClr val="accent1"/>
+          </a:effectRef>
+          <a:fontRef idx="minor">
+            <a:schemeClr val="lt1"/>
+          </a:fontRef>
+        </p:style>
+        <p:txBody>
+          <a:bodyPr rtlCol="0" anchor="ctr"/>
+          <a:lstStyle/>
+          <a:p>
+            <a:pPr algn="ctr"/>
+          </a:p>
+        </p:txBody>
+      </p:sp>
+      <p:sp>
+        <p:nvSpPr>
+          <p:cNvPr id="13" name="TextBox 12"/>
+          <p:cNvSpPr txBox="1"/>
+          <p:nvPr/>
+        </p:nvSpPr>
+        <p:spPr>
+          <a:xfrm>
+            <a:off x="1143000" y="5824728"/>
+            <a:ext cx="10271455" cy="320802"/>
+          </a:xfrm>
+          <a:prstGeom prst="rect">
+            <a:avLst/>
+          </a:prstGeom>
+          <a:noFill/>
+        </p:spPr>
+        <p:txBody>
+          <a:bodyPr wrap="square" lIns="0" rIns="0" tIns="0" bIns="0" anchor="t">
+            <a:spAutoFit/>
+          </a:bodyPr>
+          <a:lstStyle/>
+          <a:p>
+            <a:pPr algn="l">
+              <a:lnSpc>
+                <a:spcPct val="130000"/>
+              </a:lnSpc>
+            </a:pPr>
+            <a:r>
+              <a:rPr sz="1500" b="1">
+                <a:solidFill>
+                  <a:srgbClr val="FF8A3D"/>
+                </a:solidFill>
+                <a:latin typeface="Inter"/>
+              </a:rPr>
+              <a:t>Руслан Анатольевич Дёмин, </a:t>
+            </a:r>
+            <a:r>
+              <a:rPr sz="1500" b="0">
+                <a:solidFill>
+                  <a:srgbClr val="A2978E"/>
+                </a:solidFill>
+                <a:latin typeface="Inter"/>
+              </a:rPr>
+              <a:t>управляющий партнёр</a:t>
+            </a:r>
+          </a:p>
+        </p:txBody>
+      </p:sp>
     </p:spTree>
   </p:cSld>
   <p:clrMapOvr>
@@ -5795,7 +6066,7 @@
       <p:grpSpPr/>
       <p:pic>
         <p:nvPicPr>
-          <p:cNvPr id="2" name="Picture 1" descr="s03.jpg"/>
+          <p:cNvPr id="2" name="Picture 1" descr="fon.jpg"/>
           <p:cNvPicPr>
             <a:picLocks noChangeAspect="1"/>
           </p:cNvPicPr>
@@ -5810,13 +6081,523 @@
         <p:spPr>
           <a:xfrm>
             <a:off x="0" y="0"/>
-            <a:ext cx="9144000" cy="5143500"/>
+            <a:ext cx="12191695" cy="6858000"/>
           </a:xfrm>
           <a:prstGeom prst="rect">
             <a:avLst/>
           </a:prstGeom>
         </p:spPr>
       </p:pic>
+      <p:sp>
+        <p:nvSpPr>
+          <p:cNvPr id="3" name="Rectangle 2"/>
+          <p:cNvSpPr/>
+          <p:nvPr/>
+        </p:nvSpPr>
+        <p:spPr>
+          <a:xfrm>
+            <a:off x="91440" y="91440"/>
+            <a:ext cx="12008815" cy="6675120"/>
+          </a:xfrm>
+          <a:prstGeom prst="rect">
+            <a:avLst/>
+          </a:prstGeom>
+          <a:noFill/>
+          <a:ln w="15875">
+            <a:solidFill>
+              <a:srgbClr val="E8611A"/>
+            </a:solidFill>
+          </a:ln>
+          <a:effectLst/>
+        </p:spPr>
+        <p:style>
+          <a:lnRef idx="1">
+            <a:schemeClr val="accent1"/>
+          </a:lnRef>
+          <a:fillRef idx="3">
+            <a:schemeClr val="accent1"/>
+          </a:fillRef>
+          <a:effectRef idx="2">
+            <a:schemeClr val="accent1"/>
+          </a:effectRef>
+          <a:fontRef idx="minor">
+            <a:schemeClr val="lt1"/>
+          </a:fontRef>
+        </p:style>
+        <p:txBody>
+          <a:bodyPr rtlCol="0" anchor="ctr"/>
+          <a:lstStyle/>
+          <a:p>
+            <a:pPr algn="ctr"/>
+          </a:p>
+        </p:txBody>
+      </p:sp>
+      <p:pic>
+        <p:nvPicPr>
+          <p:cNvPr id="4" name="Picture 3" descr="mark.png"/>
+          <p:cNvPicPr>
+            <a:picLocks noChangeAspect="1"/>
+          </p:cNvPicPr>
+          <p:nvPr/>
+        </p:nvPicPr>
+        <p:blipFill>
+          <a:blip r:embed="rId3"/>
+          <a:stretch>
+            <a:fillRect/>
+          </a:stretch>
+        </p:blipFill>
+        <p:spPr>
+          <a:xfrm>
+            <a:off x="685800" y="457200"/>
+            <a:ext cx="480290" cy="457200"/>
+          </a:xfrm>
+          <a:prstGeom prst="rect">
+            <a:avLst/>
+          </a:prstGeom>
+        </p:spPr>
+      </p:pic>
+      <p:pic>
+        <p:nvPicPr>
+          <p:cNvPr id="5" name="Picture 4" descr="logo.png"/>
+          <p:cNvPicPr>
+            <a:picLocks noChangeAspect="1"/>
+          </p:cNvPicPr>
+          <p:nvPr/>
+        </p:nvPicPr>
+        <p:blipFill>
+          <a:blip r:embed="rId4"/>
+          <a:stretch>
+            <a:fillRect/>
+          </a:stretch>
+        </p:blipFill>
+        <p:spPr>
+          <a:xfrm>
+            <a:off x="11048695" y="457200"/>
+            <a:ext cx="457200" cy="457200"/>
+          </a:xfrm>
+          <a:prstGeom prst="rect">
+            <a:avLst/>
+          </a:prstGeom>
+        </p:spPr>
+      </p:pic>
+      <p:sp>
+        <p:nvSpPr>
+          <p:cNvPr id="6" name="TextBox 5"/>
+          <p:cNvSpPr txBox="1"/>
+          <p:nvPr/>
+        </p:nvSpPr>
+        <p:spPr>
+          <a:xfrm>
+            <a:off x="685800" y="987552"/>
+            <a:ext cx="2743200" cy="201168"/>
+          </a:xfrm>
+          <a:prstGeom prst="rect">
+            <a:avLst/>
+          </a:prstGeom>
+          <a:noFill/>
+        </p:spPr>
+        <p:txBody>
+          <a:bodyPr wrap="square" lIns="0" rIns="0" tIns="0" bIns="0" anchor="t">
+            <a:spAutoFit/>
+          </a:bodyPr>
+          <a:lstStyle/>
+          <a:p>
+            <a:pPr algn="l">
+              <a:lnSpc>
+                <a:spcPct val="120000"/>
+              </a:lnSpc>
+            </a:pPr>
+            <a:r>
+              <a:rPr sz="950" b="0">
+                <a:solidFill>
+                  <a:srgbClr val="A2978E"/>
+                </a:solidFill>
+                <a:latin typeface="Inter"/>
+              </a:rPr>
+              <a:t>ГенИИ</a:t>
+            </a:r>
+          </a:p>
+        </p:txBody>
+      </p:sp>
+      <p:sp>
+        <p:nvSpPr>
+          <p:cNvPr id="7" name="TextBox 6"/>
+          <p:cNvSpPr txBox="1"/>
+          <p:nvPr/>
+        </p:nvSpPr>
+        <p:spPr>
+          <a:xfrm>
+            <a:off x="8762695" y="987552"/>
+            <a:ext cx="2743200" cy="201168"/>
+          </a:xfrm>
+          <a:prstGeom prst="rect">
+            <a:avLst/>
+          </a:prstGeom>
+          <a:noFill/>
+        </p:spPr>
+        <p:txBody>
+          <a:bodyPr wrap="square" lIns="0" rIns="0" tIns="0" bIns="0" anchor="t">
+            <a:spAutoFit/>
+          </a:bodyPr>
+          <a:lstStyle/>
+          <a:p>
+            <a:pPr algn="r">
+              <a:lnSpc>
+                <a:spcPct val="120000"/>
+              </a:lnSpc>
+            </a:pPr>
+            <a:r>
+              <a:rPr sz="950" b="0">
+                <a:solidFill>
+                  <a:srgbClr val="A2978E"/>
+                </a:solidFill>
+                <a:latin typeface="Inter"/>
+              </a:rPr>
+              <a:t>Промптер</a:t>
+            </a:r>
+          </a:p>
+        </p:txBody>
+      </p:sp>
+      <p:sp>
+        <p:nvSpPr>
+          <p:cNvPr id="8" name="TextBox 7"/>
+          <p:cNvSpPr txBox="1"/>
+          <p:nvPr/>
+        </p:nvSpPr>
+        <p:spPr>
+          <a:xfrm>
+            <a:off x="10408615" y="6291072"/>
+            <a:ext cx="1097280" cy="274320"/>
+          </a:xfrm>
+          <a:prstGeom prst="rect">
+            <a:avLst/>
+          </a:prstGeom>
+          <a:noFill/>
+        </p:spPr>
+        <p:txBody>
+          <a:bodyPr wrap="square" lIns="0" rIns="0" tIns="0" bIns="0" anchor="t">
+            <a:spAutoFit/>
+          </a:bodyPr>
+          <a:lstStyle/>
+          <a:p>
+            <a:pPr algn="r">
+              <a:lnSpc>
+                <a:spcPct val="120000"/>
+              </a:lnSpc>
+            </a:pPr>
+            <a:r>
+              <a:rPr sz="1000" b="0">
+                <a:solidFill>
+                  <a:srgbClr val="A2978E"/>
+                </a:solidFill>
+                <a:latin typeface="Inter"/>
+              </a:rPr>
+              <a:t>4 / 5</a:t>
+            </a:r>
+          </a:p>
+        </p:txBody>
+      </p:sp>
+      <p:sp>
+        <p:nvSpPr>
+          <p:cNvPr id="9" name="TextBox 8"/>
+          <p:cNvSpPr txBox="1"/>
+          <p:nvPr/>
+        </p:nvSpPr>
+        <p:spPr>
+          <a:xfrm>
+            <a:off x="685800" y="1463040"/>
+            <a:ext cx="4937760" cy="1264920"/>
+          </a:xfrm>
+          <a:prstGeom prst="rect">
+            <a:avLst/>
+          </a:prstGeom>
+          <a:noFill/>
+        </p:spPr>
+        <p:txBody>
+          <a:bodyPr wrap="square" lIns="0" rIns="0" tIns="0" bIns="0" anchor="t">
+            <a:spAutoFit/>
+          </a:bodyPr>
+          <a:lstStyle/>
+          <a:p>
+            <a:pPr algn="l">
+              <a:lnSpc>
+                <a:spcPct val="102000"/>
+              </a:lnSpc>
+            </a:pPr>
+            <a:r>
+              <a:rPr sz="9200" b="1">
+                <a:solidFill>
+                  <a:srgbClr val="4ADE80"/>
+                </a:solidFill>
+                <a:latin typeface="Unbounded"/>
+              </a:rPr>
+              <a:t>3–6</a:t>
+            </a:r>
+          </a:p>
+        </p:txBody>
+      </p:sp>
+      <p:sp>
+        <p:nvSpPr>
+          <p:cNvPr id="10" name="TextBox 9"/>
+          <p:cNvSpPr txBox="1"/>
+          <p:nvPr/>
+        </p:nvSpPr>
+        <p:spPr>
+          <a:xfrm>
+            <a:off x="685800" y="2782824"/>
+            <a:ext cx="4937760" cy="347472"/>
+          </a:xfrm>
+          <a:prstGeom prst="rect">
+            <a:avLst/>
+          </a:prstGeom>
+          <a:noFill/>
+        </p:spPr>
+        <p:txBody>
+          <a:bodyPr wrap="square" lIns="0" rIns="0" tIns="0" bIns="0" anchor="t">
+            <a:spAutoFit/>
+          </a:bodyPr>
+          <a:lstStyle/>
+          <a:p>
+            <a:pPr algn="l">
+              <a:lnSpc>
+                <a:spcPct val="135000"/>
+              </a:lnSpc>
+            </a:pPr>
+            <a:r>
+              <a:rPr sz="1600" b="0">
+                <a:solidFill>
+                  <a:srgbClr val="DED6CF"/>
+                </a:solidFill>
+                <a:latin typeface="Inter"/>
+              </a:rPr>
+              <a:t>месяцев занимает выход в нейровыдачу</a:t>
+            </a:r>
+          </a:p>
+        </p:txBody>
+      </p:sp>
+      <p:sp>
+        <p:nvSpPr>
+          <p:cNvPr id="11" name="Rectangle 10"/>
+          <p:cNvSpPr/>
+          <p:nvPr/>
+        </p:nvSpPr>
+        <p:spPr>
+          <a:xfrm>
+            <a:off x="6263640" y="1600200"/>
+            <a:ext cx="45720" cy="1371600"/>
+          </a:xfrm>
+          <a:prstGeom prst="rect">
+            <a:avLst/>
+          </a:prstGeom>
+          <a:solidFill>
+            <a:srgbClr val="4ADE80"/>
+          </a:solidFill>
+          <a:ln>
+            <a:noFill/>
+          </a:ln>
+          <a:effectLst/>
+        </p:spPr>
+        <p:style>
+          <a:lnRef idx="1">
+            <a:schemeClr val="accent1"/>
+          </a:lnRef>
+          <a:fillRef idx="3">
+            <a:schemeClr val="accent1"/>
+          </a:fillRef>
+          <a:effectRef idx="2">
+            <a:schemeClr val="accent1"/>
+          </a:effectRef>
+          <a:fontRef idx="minor">
+            <a:schemeClr val="lt1"/>
+          </a:fontRef>
+        </p:style>
+        <p:txBody>
+          <a:bodyPr rtlCol="0" anchor="ctr"/>
+          <a:lstStyle/>
+          <a:p>
+            <a:pPr algn="ctr"/>
+          </a:p>
+        </p:txBody>
+      </p:sp>
+      <p:sp>
+        <p:nvSpPr>
+          <p:cNvPr id="12" name="TextBox 11"/>
+          <p:cNvSpPr txBox="1"/>
+          <p:nvPr/>
+        </p:nvSpPr>
+        <p:spPr>
+          <a:xfrm>
+            <a:off x="6583679" y="1554480"/>
+            <a:ext cx="4922215" cy="901827"/>
+          </a:xfrm>
+          <a:prstGeom prst="rect">
+            <a:avLst/>
+          </a:prstGeom>
+          <a:noFill/>
+        </p:spPr>
+        <p:txBody>
+          <a:bodyPr wrap="square" lIns="0" rIns="0" tIns="0" bIns="0" anchor="t">
+            <a:spAutoFit/>
+          </a:bodyPr>
+          <a:lstStyle/>
+          <a:p>
+            <a:pPr algn="l">
+              <a:lnSpc>
+                <a:spcPct val="145000"/>
+              </a:lnSpc>
+            </a:pPr>
+            <a:r>
+              <a:rPr sz="1500" b="1">
+                <a:solidFill>
+                  <a:srgbClr val="DED6CF"/>
+                </a:solidFill>
+                <a:latin typeface="Inter"/>
+              </a:rPr>
+              <a:t>Маркировать фото и видео как созданные ИИ закон сегодня не требует. </a:t>
+            </a:r>
+            <a:r>
+              <a:rPr sz="1500" b="0">
+                <a:solidFill>
+                  <a:srgbClr val="A2978E"/>
+                </a:solidFill>
+                <a:latin typeface="Inter"/>
+              </a:rPr>
+              <a:t>Этим грех не пользоваться.</a:t>
+            </a:r>
+          </a:p>
+        </p:txBody>
+      </p:sp>
+      <p:sp>
+        <p:nvSpPr>
+          <p:cNvPr id="13" name="TextBox 12"/>
+          <p:cNvSpPr txBox="1"/>
+          <p:nvPr/>
+        </p:nvSpPr>
+        <p:spPr>
+          <a:xfrm>
+            <a:off x="1143000" y="3886200"/>
+            <a:ext cx="10271455" cy="1865376"/>
+          </a:xfrm>
+          <a:prstGeom prst="rect">
+            <a:avLst/>
+          </a:prstGeom>
+          <a:noFill/>
+        </p:spPr>
+        <p:txBody>
+          <a:bodyPr wrap="square" lIns="0" rIns="0" tIns="0" bIns="0" anchor="t">
+            <a:spAutoFit/>
+          </a:bodyPr>
+          <a:lstStyle/>
+          <a:p>
+            <a:pPr algn="l">
+              <a:lnSpc>
+                <a:spcPct val="126000"/>
+              </a:lnSpc>
+            </a:pPr>
+            <a:r>
+              <a:rPr sz="2800" b="0">
+                <a:solidFill>
+                  <a:srgbClr val="FFFFFF"/>
+                </a:solidFill>
+                <a:latin typeface="Unbounded"/>
+              </a:rPr>
+              <a:t>«Клиент больше не листает десять ссылок — он спрашивает нейросеть и получает два-три названия. Попасть в этот ответ можно целенаправленно»</a:t>
+            </a:r>
+          </a:p>
+        </p:txBody>
+      </p:sp>
+      <p:sp>
+        <p:nvSpPr>
+          <p:cNvPr id="14" name="Rectangle 13"/>
+          <p:cNvSpPr/>
+          <p:nvPr/>
+        </p:nvSpPr>
+        <p:spPr>
+          <a:xfrm>
+            <a:off x="685800" y="3959352"/>
+            <a:ext cx="82296" cy="1755648"/>
+          </a:xfrm>
+          <a:prstGeom prst="rect">
+            <a:avLst/>
+          </a:prstGeom>
+          <a:solidFill>
+            <a:srgbClr val="FF8A3D"/>
+          </a:solidFill>
+          <a:ln>
+            <a:noFill/>
+          </a:ln>
+          <a:effectLst/>
+        </p:spPr>
+        <p:style>
+          <a:lnRef idx="1">
+            <a:schemeClr val="accent1"/>
+          </a:lnRef>
+          <a:fillRef idx="3">
+            <a:schemeClr val="accent1"/>
+          </a:fillRef>
+          <a:effectRef idx="2">
+            <a:schemeClr val="accent1"/>
+          </a:effectRef>
+          <a:fontRef idx="minor">
+            <a:schemeClr val="lt1"/>
+          </a:fontRef>
+        </p:style>
+        <p:txBody>
+          <a:bodyPr rtlCol="0" anchor="ctr"/>
+          <a:lstStyle/>
+          <a:p>
+            <a:pPr algn="ctr"/>
+          </a:p>
+        </p:txBody>
+      </p:sp>
+      <p:sp>
+        <p:nvSpPr>
+          <p:cNvPr id="15" name="TextBox 14"/>
+          <p:cNvSpPr txBox="1"/>
+          <p:nvPr/>
+        </p:nvSpPr>
+        <p:spPr>
+          <a:xfrm>
+            <a:off x="1143000" y="6044184"/>
+            <a:ext cx="10271455" cy="320802"/>
+          </a:xfrm>
+          <a:prstGeom prst="rect">
+            <a:avLst/>
+          </a:prstGeom>
+          <a:noFill/>
+        </p:spPr>
+        <p:txBody>
+          <a:bodyPr wrap="square" lIns="0" rIns="0" tIns="0" bIns="0" anchor="t">
+            <a:spAutoFit/>
+          </a:bodyPr>
+          <a:lstStyle/>
+          <a:p>
+            <a:pPr algn="l">
+              <a:lnSpc>
+                <a:spcPct val="130000"/>
+              </a:lnSpc>
+            </a:pPr>
+            <a:r>
+              <a:rPr sz="1500" b="1">
+                <a:solidFill>
+                  <a:srgbClr val="FF8A3D"/>
+                </a:solidFill>
+                <a:latin typeface="Inter"/>
+              </a:rPr>
+              <a:t>Руслан Анатольевич Дёмин, </a:t>
+            </a:r>
+            <a:r>
+              <a:rPr sz="1500" b="0">
+                <a:solidFill>
+                  <a:srgbClr val="A2978E"/>
+                </a:solidFill>
+                <a:latin typeface="Inter"/>
+              </a:rPr>
+              <a:t>управляющий партнёр</a:t>
+            </a:r>
+          </a:p>
+        </p:txBody>
+      </p:sp>
     </p:spTree>
   </p:cSld>
   <p:clrMapOvr>
@@ -5837,7 +6618,7 @@
       <p:grpSpPr/>
       <p:pic>
         <p:nvPicPr>
-          <p:cNvPr id="2" name="Picture 1" descr="s04.jpg"/>
+          <p:cNvPr id="2" name="Picture 1" descr="fon.jpg"/>
           <p:cNvPicPr>
             <a:picLocks noChangeAspect="1"/>
           </p:cNvPicPr>
@@ -5852,13 +6633,572 @@
         <p:spPr>
           <a:xfrm>
             <a:off x="0" y="0"/>
-            <a:ext cx="9144000" cy="5143500"/>
+            <a:ext cx="12191695" cy="6858000"/>
           </a:xfrm>
           <a:prstGeom prst="rect">
             <a:avLst/>
           </a:prstGeom>
         </p:spPr>
       </p:pic>
+      <p:sp>
+        <p:nvSpPr>
+          <p:cNvPr id="3" name="Rectangle 2"/>
+          <p:cNvSpPr/>
+          <p:nvPr/>
+        </p:nvSpPr>
+        <p:spPr>
+          <a:xfrm>
+            <a:off x="91440" y="91440"/>
+            <a:ext cx="12008815" cy="6675120"/>
+          </a:xfrm>
+          <a:prstGeom prst="rect">
+            <a:avLst/>
+          </a:prstGeom>
+          <a:noFill/>
+          <a:ln w="15875">
+            <a:solidFill>
+              <a:srgbClr val="E8611A"/>
+            </a:solidFill>
+          </a:ln>
+          <a:effectLst/>
+        </p:spPr>
+        <p:style>
+          <a:lnRef idx="1">
+            <a:schemeClr val="accent1"/>
+          </a:lnRef>
+          <a:fillRef idx="3">
+            <a:schemeClr val="accent1"/>
+          </a:fillRef>
+          <a:effectRef idx="2">
+            <a:schemeClr val="accent1"/>
+          </a:effectRef>
+          <a:fontRef idx="minor">
+            <a:schemeClr val="lt1"/>
+          </a:fontRef>
+        </p:style>
+        <p:txBody>
+          <a:bodyPr rtlCol="0" anchor="ctr"/>
+          <a:lstStyle/>
+          <a:p>
+            <a:pPr algn="ctr"/>
+          </a:p>
+        </p:txBody>
+      </p:sp>
+      <p:pic>
+        <p:nvPicPr>
+          <p:cNvPr id="4" name="Picture 3" descr="mark.png"/>
+          <p:cNvPicPr>
+            <a:picLocks noChangeAspect="1"/>
+          </p:cNvPicPr>
+          <p:nvPr/>
+        </p:nvPicPr>
+        <p:blipFill>
+          <a:blip r:embed="rId3"/>
+          <a:stretch>
+            <a:fillRect/>
+          </a:stretch>
+        </p:blipFill>
+        <p:spPr>
+          <a:xfrm>
+            <a:off x="685800" y="457200"/>
+            <a:ext cx="480290" cy="457200"/>
+          </a:xfrm>
+          <a:prstGeom prst="rect">
+            <a:avLst/>
+          </a:prstGeom>
+        </p:spPr>
+      </p:pic>
+      <p:pic>
+        <p:nvPicPr>
+          <p:cNvPr id="5" name="Picture 4" descr="logo.png"/>
+          <p:cNvPicPr>
+            <a:picLocks noChangeAspect="1"/>
+          </p:cNvPicPr>
+          <p:nvPr/>
+        </p:nvPicPr>
+        <p:blipFill>
+          <a:blip r:embed="rId4"/>
+          <a:stretch>
+            <a:fillRect/>
+          </a:stretch>
+        </p:blipFill>
+        <p:spPr>
+          <a:xfrm>
+            <a:off x="11048695" y="457200"/>
+            <a:ext cx="457200" cy="457200"/>
+          </a:xfrm>
+          <a:prstGeom prst="rect">
+            <a:avLst/>
+          </a:prstGeom>
+        </p:spPr>
+      </p:pic>
+      <p:sp>
+        <p:nvSpPr>
+          <p:cNvPr id="6" name="TextBox 5"/>
+          <p:cNvSpPr txBox="1"/>
+          <p:nvPr/>
+        </p:nvSpPr>
+        <p:spPr>
+          <a:xfrm>
+            <a:off x="685800" y="987552"/>
+            <a:ext cx="2743200" cy="201168"/>
+          </a:xfrm>
+          <a:prstGeom prst="rect">
+            <a:avLst/>
+          </a:prstGeom>
+          <a:noFill/>
+        </p:spPr>
+        <p:txBody>
+          <a:bodyPr wrap="square" lIns="0" rIns="0" tIns="0" bIns="0" anchor="t">
+            <a:spAutoFit/>
+          </a:bodyPr>
+          <a:lstStyle/>
+          <a:p>
+            <a:pPr algn="l">
+              <a:lnSpc>
+                <a:spcPct val="120000"/>
+              </a:lnSpc>
+            </a:pPr>
+            <a:r>
+              <a:rPr sz="950" b="0">
+                <a:solidFill>
+                  <a:srgbClr val="A2978E"/>
+                </a:solidFill>
+                <a:latin typeface="Inter"/>
+              </a:rPr>
+              <a:t>ГенИИ</a:t>
+            </a:r>
+          </a:p>
+        </p:txBody>
+      </p:sp>
+      <p:sp>
+        <p:nvSpPr>
+          <p:cNvPr id="7" name="TextBox 6"/>
+          <p:cNvSpPr txBox="1"/>
+          <p:nvPr/>
+        </p:nvSpPr>
+        <p:spPr>
+          <a:xfrm>
+            <a:off x="8762695" y="987552"/>
+            <a:ext cx="2743200" cy="201168"/>
+          </a:xfrm>
+          <a:prstGeom prst="rect">
+            <a:avLst/>
+          </a:prstGeom>
+          <a:noFill/>
+        </p:spPr>
+        <p:txBody>
+          <a:bodyPr wrap="square" lIns="0" rIns="0" tIns="0" bIns="0" anchor="t">
+            <a:spAutoFit/>
+          </a:bodyPr>
+          <a:lstStyle/>
+          <a:p>
+            <a:pPr algn="r">
+              <a:lnSpc>
+                <a:spcPct val="120000"/>
+              </a:lnSpc>
+            </a:pPr>
+            <a:r>
+              <a:rPr sz="950" b="0">
+                <a:solidFill>
+                  <a:srgbClr val="A2978E"/>
+                </a:solidFill>
+                <a:latin typeface="Inter"/>
+              </a:rPr>
+              <a:t>Промптер</a:t>
+            </a:r>
+          </a:p>
+        </p:txBody>
+      </p:sp>
+      <p:sp>
+        <p:nvSpPr>
+          <p:cNvPr id="8" name="TextBox 7"/>
+          <p:cNvSpPr txBox="1"/>
+          <p:nvPr/>
+        </p:nvSpPr>
+        <p:spPr>
+          <a:xfrm>
+            <a:off x="10408615" y="6291072"/>
+            <a:ext cx="1097280" cy="274320"/>
+          </a:xfrm>
+          <a:prstGeom prst="rect">
+            <a:avLst/>
+          </a:prstGeom>
+          <a:noFill/>
+        </p:spPr>
+        <p:txBody>
+          <a:bodyPr wrap="square" lIns="0" rIns="0" tIns="0" bIns="0" anchor="t">
+            <a:spAutoFit/>
+          </a:bodyPr>
+          <a:lstStyle/>
+          <a:p>
+            <a:pPr algn="r">
+              <a:lnSpc>
+                <a:spcPct val="120000"/>
+              </a:lnSpc>
+            </a:pPr>
+            <a:r>
+              <a:rPr sz="1000" b="0">
+                <a:solidFill>
+                  <a:srgbClr val="A2978E"/>
+                </a:solidFill>
+                <a:latin typeface="Inter"/>
+              </a:rPr>
+              <a:t>5 / 5</a:t>
+            </a:r>
+          </a:p>
+        </p:txBody>
+      </p:sp>
+      <p:pic>
+        <p:nvPicPr>
+          <p:cNvPr id="9" name="Picture 8" descr="press-qr.png"/>
+          <p:cNvPicPr>
+            <a:picLocks noChangeAspect="1"/>
+          </p:cNvPicPr>
+          <p:nvPr/>
+        </p:nvPicPr>
+        <p:blipFill>
+          <a:blip r:embed="rId5"/>
+          <a:stretch>
+            <a:fillRect/>
+          </a:stretch>
+        </p:blipFill>
+        <p:spPr>
+          <a:xfrm>
+            <a:off x="9402775" y="1600200"/>
+            <a:ext cx="2103120" cy="2103120"/>
+          </a:xfrm>
+          <a:prstGeom prst="rect">
+            <a:avLst/>
+          </a:prstGeom>
+        </p:spPr>
+      </p:pic>
+      <p:sp>
+        <p:nvSpPr>
+          <p:cNvPr id="10" name="TextBox 9"/>
+          <p:cNvSpPr txBox="1"/>
+          <p:nvPr/>
+        </p:nvSpPr>
+        <p:spPr>
+          <a:xfrm>
+            <a:off x="8854135" y="3904487"/>
+            <a:ext cx="2651760" cy="353822"/>
+          </a:xfrm>
+          <a:prstGeom prst="rect">
+            <a:avLst/>
+          </a:prstGeom>
+          <a:noFill/>
+        </p:spPr>
+        <p:txBody>
+          <a:bodyPr wrap="square" lIns="0" rIns="0" tIns="0" bIns="0" anchor="t">
+            <a:spAutoFit/>
+          </a:bodyPr>
+          <a:lstStyle/>
+          <a:p>
+            <a:pPr algn="ctr">
+              <a:lnSpc>
+                <a:spcPct val="130000"/>
+              </a:lnSpc>
+            </a:pPr>
+            <a:r>
+              <a:rPr sz="1700" b="1">
+                <a:solidFill>
+                  <a:srgbClr val="FFFFFF"/>
+                </a:solidFill>
+                <a:latin typeface="Inter"/>
+              </a:rPr>
+              <a:t>prompter-ai.moscow</a:t>
+            </a:r>
+          </a:p>
+        </p:txBody>
+      </p:sp>
+      <p:sp>
+        <p:nvSpPr>
+          <p:cNvPr id="11" name="TextBox 10"/>
+          <p:cNvSpPr txBox="1"/>
+          <p:nvPr/>
+        </p:nvSpPr>
+        <p:spPr>
+          <a:xfrm>
+            <a:off x="8854135" y="4258310"/>
+            <a:ext cx="2651760" cy="304292"/>
+          </a:xfrm>
+          <a:prstGeom prst="rect">
+            <a:avLst/>
+          </a:prstGeom>
+          <a:noFill/>
+        </p:spPr>
+        <p:txBody>
+          <a:bodyPr wrap="square" lIns="0" rIns="0" tIns="0" bIns="0" anchor="t">
+            <a:spAutoFit/>
+          </a:bodyPr>
+          <a:lstStyle/>
+          <a:p>
+            <a:pPr algn="ctr">
+              <a:lnSpc>
+                <a:spcPct val="130000"/>
+              </a:lnSpc>
+            </a:pPr>
+            <a:r>
+              <a:rPr sz="1400" b="0">
+                <a:solidFill>
+                  <a:srgbClr val="FF8A3D"/>
+                </a:solidFill>
+                <a:latin typeface="Inter"/>
+              </a:rPr>
+              <a:t>SEO и GEO</a:t>
+            </a:r>
+          </a:p>
+        </p:txBody>
+      </p:sp>
+      <p:sp>
+        <p:nvSpPr>
+          <p:cNvPr id="12" name="TextBox 11"/>
+          <p:cNvSpPr txBox="1"/>
+          <p:nvPr/>
+        </p:nvSpPr>
+        <p:spPr>
+          <a:xfrm>
+            <a:off x="685800" y="1554480"/>
+            <a:ext cx="7985455" cy="727456"/>
+          </a:xfrm>
+          <a:prstGeom prst="rect">
+            <a:avLst/>
+          </a:prstGeom>
+          <a:noFill/>
+        </p:spPr>
+        <p:txBody>
+          <a:bodyPr wrap="square" lIns="0" rIns="0" tIns="0" bIns="0" anchor="t">
+            <a:spAutoFit/>
+          </a:bodyPr>
+          <a:lstStyle/>
+          <a:p>
+            <a:pPr algn="l">
+              <a:lnSpc>
+                <a:spcPct val="112000"/>
+              </a:lnSpc>
+            </a:pPr>
+            <a:r>
+              <a:rPr sz="4600" b="1">
+                <a:solidFill>
+                  <a:srgbClr val="FFFFFF"/>
+                </a:solidFill>
+                <a:latin typeface="Unbounded"/>
+              </a:rPr>
+              <a:t>Полный AI цикл</a:t>
+            </a:r>
+          </a:p>
+        </p:txBody>
+      </p:sp>
+      <p:sp>
+        <p:nvSpPr>
+          <p:cNvPr id="13" name="TextBox 12"/>
+          <p:cNvSpPr txBox="1"/>
+          <p:nvPr/>
+        </p:nvSpPr>
+        <p:spPr>
+          <a:xfrm>
+            <a:off x="685800" y="2592832"/>
+            <a:ext cx="7985455" cy="758952"/>
+          </a:xfrm>
+          <a:prstGeom prst="rect">
+            <a:avLst/>
+          </a:prstGeom>
+          <a:noFill/>
+        </p:spPr>
+        <p:txBody>
+          <a:bodyPr wrap="square" lIns="0" rIns="0" tIns="0" bIns="0" anchor="t">
+            <a:spAutoFit/>
+          </a:bodyPr>
+          <a:lstStyle/>
+          <a:p>
+            <a:pPr algn="l">
+              <a:lnSpc>
+                <a:spcPct val="150000"/>
+              </a:lnSpc>
+            </a:pPr>
+            <a:r>
+              <a:rPr sz="1800" b="0">
+                <a:solidFill>
+                  <a:srgbClr val="DED6CF"/>
+                </a:solidFill>
+                <a:latin typeface="Inter"/>
+              </a:rPr>
+              <a:t>Исследование, генерация контента, автоматическая публикация на площадках, аналитика нейровыдачи.</a:t>
+            </a:r>
+          </a:p>
+        </p:txBody>
+      </p:sp>
+      <p:sp>
+        <p:nvSpPr>
+          <p:cNvPr id="14" name="TextBox 13"/>
+          <p:cNvSpPr txBox="1"/>
+          <p:nvPr/>
+        </p:nvSpPr>
+        <p:spPr>
+          <a:xfrm>
+            <a:off x="685800" y="3552952"/>
+            <a:ext cx="7985455" cy="758952"/>
+          </a:xfrm>
+          <a:prstGeom prst="rect">
+            <a:avLst/>
+          </a:prstGeom>
+          <a:noFill/>
+        </p:spPr>
+        <p:txBody>
+          <a:bodyPr wrap="square" lIns="0" rIns="0" tIns="0" bIns="0" anchor="t">
+            <a:spAutoFit/>
+          </a:bodyPr>
+          <a:lstStyle/>
+          <a:p>
+            <a:pPr algn="l">
+              <a:lnSpc>
+                <a:spcPct val="150000"/>
+              </a:lnSpc>
+            </a:pPr>
+            <a:r>
+              <a:rPr sz="1800" b="0">
+                <a:solidFill>
+                  <a:srgbClr val="DED6CF"/>
+                </a:solidFill>
+                <a:latin typeface="Inter"/>
+              </a:rPr>
+              <a:t>Интеллектуальный сервис для автоматизации SMM и усиления цифрового присутствия компании в интернете.</a:t>
+            </a:r>
+          </a:p>
+        </p:txBody>
+      </p:sp>
+      <p:sp>
+        <p:nvSpPr>
+          <p:cNvPr id="15" name="Rectangle 14"/>
+          <p:cNvSpPr/>
+          <p:nvPr/>
+        </p:nvSpPr>
+        <p:spPr>
+          <a:xfrm>
+            <a:off x="685800" y="5257800"/>
+            <a:ext cx="10820095" cy="10972"/>
+          </a:xfrm>
+          <a:prstGeom prst="rect">
+            <a:avLst/>
+          </a:prstGeom>
+          <a:solidFill>
+            <a:srgbClr val="7A3F1C"/>
+          </a:solidFill>
+          <a:ln>
+            <a:noFill/>
+          </a:ln>
+          <a:effectLst/>
+        </p:spPr>
+        <p:style>
+          <a:lnRef idx="1">
+            <a:schemeClr val="accent1"/>
+          </a:lnRef>
+          <a:fillRef idx="3">
+            <a:schemeClr val="accent1"/>
+          </a:fillRef>
+          <a:effectRef idx="2">
+            <a:schemeClr val="accent1"/>
+          </a:effectRef>
+          <a:fontRef idx="minor">
+            <a:schemeClr val="lt1"/>
+          </a:fontRef>
+        </p:style>
+        <p:txBody>
+          <a:bodyPr rtlCol="0" anchor="ctr"/>
+          <a:lstStyle/>
+          <a:p>
+            <a:pPr algn="ctr"/>
+          </a:p>
+        </p:txBody>
+      </p:sp>
+      <p:sp>
+        <p:nvSpPr>
+          <p:cNvPr id="16" name="TextBox 15"/>
+          <p:cNvSpPr txBox="1"/>
+          <p:nvPr/>
+        </p:nvSpPr>
+        <p:spPr>
+          <a:xfrm>
+            <a:off x="685800" y="5486400"/>
+            <a:ext cx="10820095" cy="398907"/>
+          </a:xfrm>
+          <a:prstGeom prst="rect">
+            <a:avLst/>
+          </a:prstGeom>
+          <a:noFill/>
+        </p:spPr>
+        <p:txBody>
+          <a:bodyPr wrap="square" lIns="0" rIns="0" tIns="0" bIns="0" anchor="t">
+            <a:spAutoFit/>
+          </a:bodyPr>
+          <a:lstStyle/>
+          <a:p>
+            <a:pPr algn="l">
+              <a:lnSpc>
+                <a:spcPct val="135000"/>
+              </a:lnSpc>
+            </a:pPr>
+            <a:r>
+              <a:rPr sz="1900" b="1">
+                <a:solidFill>
+                  <a:srgbClr val="FFFFFF"/>
+                </a:solidFill>
+                <a:latin typeface="Inter"/>
+              </a:rPr>
+              <a:t>+7 906 758-77-77     @geniimoscow     prompter.moscow@mail.ru</a:t>
+            </a:r>
+          </a:p>
+        </p:txBody>
+      </p:sp>
+      <p:sp>
+        <p:nvSpPr>
+          <p:cNvPr id="17" name="TextBox 16"/>
+          <p:cNvSpPr txBox="1"/>
+          <p:nvPr/>
+        </p:nvSpPr>
+        <p:spPr>
+          <a:xfrm>
+            <a:off x="685800" y="5976747"/>
+            <a:ext cx="10820095" cy="295402"/>
+          </a:xfrm>
+          <a:prstGeom prst="rect">
+            <a:avLst/>
+          </a:prstGeom>
+          <a:noFill/>
+        </p:spPr>
+        <p:txBody>
+          <a:bodyPr wrap="square" lIns="0" rIns="0" tIns="0" bIns="0" anchor="t">
+            <a:spAutoFit/>
+          </a:bodyPr>
+          <a:lstStyle/>
+          <a:p>
+            <a:pPr algn="l">
+              <a:lnSpc>
+                <a:spcPct val="140000"/>
+              </a:lnSpc>
+            </a:pPr>
+            <a:r>
+              <a:rPr sz="1250" b="0">
+                <a:solidFill>
+                  <a:srgbClr val="A2978E"/>
+                </a:solidFill>
+                <a:latin typeface="Inter"/>
+              </a:rPr>
+              <a:t>Руслан Анатольевич Дёмин, управляющий партнёр</a:t>
+            </a:r>
+            <a:r>
+              <a:rPr sz="1250" b="0">
+                <a:solidFill>
+                  <a:srgbClr val="A2978E"/>
+                </a:solidFill>
+                <a:latin typeface="Inter"/>
+              </a:rPr>
+              <a:t>     ГенИИ — официальный партнёр «Промптера» по Москве и области</a:t>
+            </a:r>
+          </a:p>
+        </p:txBody>
+      </p:sp>
     </p:spTree>
   </p:cSld>
   <p:clrMapOvr>
@@ -5879,7 +7219,7 @@
       <p:grpSpPr/>
       <p:pic>
         <p:nvPicPr>
-          <p:cNvPr id="2" name="Picture 1" descr="s05.jpg"/>
+          <p:cNvPr id="2" name="Picture 1" descr="orig_tariff-bg.jpg"/>
           <p:cNvPicPr>
             <a:picLocks noChangeAspect="1"/>
           </p:cNvPicPr>
@@ -5894,13 +7234,644 @@
         <p:spPr>
           <a:xfrm>
             <a:off x="0" y="0"/>
-            <a:ext cx="9144000" cy="5143500"/>
+            <a:ext cx="12191695" cy="6858000"/>
           </a:xfrm>
           <a:prstGeom prst="rect">
             <a:avLst/>
           </a:prstGeom>
         </p:spPr>
       </p:pic>
+      <p:pic>
+        <p:nvPicPr>
+          <p:cNvPr id="3" name="Picture 2" descr="image.png"/>
+          <p:cNvPicPr>
+            <a:picLocks noChangeAspect="1"/>
+          </p:cNvPicPr>
+          <p:nvPr/>
+        </p:nvPicPr>
+        <p:blipFill>
+          <a:blip r:embed="rId3"/>
+          <a:stretch>
+            <a:fillRect/>
+          </a:stretch>
+        </p:blipFill>
+        <p:spPr>
+          <a:xfrm>
+            <a:off x="685800" y="457200"/>
+            <a:ext cx="484632" cy="461332"/>
+          </a:xfrm>
+          <a:prstGeom prst="rect">
+            <a:avLst/>
+          </a:prstGeom>
+        </p:spPr>
+      </p:pic>
+      <p:pic>
+        <p:nvPicPr>
+          <p:cNvPr id="4" name="Picture 3" descr="image.png"/>
+          <p:cNvPicPr>
+            <a:picLocks noChangeAspect="1"/>
+          </p:cNvPicPr>
+          <p:nvPr/>
+        </p:nvPicPr>
+        <p:blipFill>
+          <a:blip r:embed="rId4"/>
+          <a:stretch>
+            <a:fillRect/>
+          </a:stretch>
+        </p:blipFill>
+        <p:spPr>
+          <a:xfrm>
+            <a:off x="11045952" y="457200"/>
+            <a:ext cx="457200" cy="457200"/>
+          </a:xfrm>
+          <a:prstGeom prst="rect">
+            <a:avLst/>
+          </a:prstGeom>
+        </p:spPr>
+      </p:pic>
+      <p:sp>
+        <p:nvSpPr>
+          <p:cNvPr id="5" name="TextBox 4"/>
+          <p:cNvSpPr txBox="1"/>
+          <p:nvPr/>
+        </p:nvSpPr>
+        <p:spPr>
+          <a:xfrm>
+            <a:off x="731518" y="1121661"/>
+            <a:ext cx="10728933" cy="731518"/>
+          </a:xfrm>
+          <a:prstGeom prst="rect">
+            <a:avLst/>
+          </a:prstGeom>
+          <a:noFill/>
+        </p:spPr>
+        <p:txBody>
+          <a:bodyPr wrap="square" lIns="0" rIns="0" tIns="0" bIns="0">
+            <a:spAutoFit/>
+          </a:bodyPr>
+          <a:lstStyle/>
+          <a:p>
+            <a:pPr algn="ctr"/>
+            <a:r>
+              <a:rPr sz="4533" b="1" spc="533">
+                <a:solidFill>
+                  <a:srgbClr val="FFFFFF"/>
+                </a:solidFill>
+                <a:latin typeface="Arial"/>
+              </a:rPr>
+              <a:t>ПРОМПТЕР</a:t>
+            </a:r>
+          </a:p>
+        </p:txBody>
+      </p:sp>
+      <p:sp>
+        <p:nvSpPr>
+          <p:cNvPr id="6" name="TextBox 5"/>
+          <p:cNvSpPr txBox="1"/>
+          <p:nvPr/>
+        </p:nvSpPr>
+        <p:spPr>
+          <a:xfrm>
+            <a:off x="731518" y="1780027"/>
+            <a:ext cx="10728933" cy="487678"/>
+          </a:xfrm>
+          <a:prstGeom prst="rect">
+            <a:avLst/>
+          </a:prstGeom>
+          <a:noFill/>
+        </p:spPr>
+        <p:txBody>
+          <a:bodyPr wrap="square" lIns="0" rIns="0" tIns="0" bIns="0">
+            <a:spAutoFit/>
+          </a:bodyPr>
+          <a:lstStyle/>
+          <a:p>
+            <a:pPr algn="ctr"/>
+            <a:r>
+              <a:rPr sz="2533" b="1">
+                <a:solidFill>
+                  <a:srgbClr val="FFFFFF"/>
+                </a:solidFill>
+                <a:latin typeface="Arial"/>
+              </a:rPr>
+              <a:t>Темы для конференции</a:t>
+            </a:r>
+          </a:p>
+        </p:txBody>
+      </p:sp>
+      <p:sp>
+        <p:nvSpPr>
+          <p:cNvPr id="7" name="Rectangle 6"/>
+          <p:cNvSpPr/>
+          <p:nvPr/>
+        </p:nvSpPr>
+        <p:spPr>
+          <a:xfrm>
+            <a:off x="5547346" y="2340858"/>
+            <a:ext cx="1097277" cy="42671"/>
+          </a:xfrm>
+          <a:prstGeom prst="rect">
+            <a:avLst/>
+          </a:prstGeom>
+          <a:solidFill>
+            <a:srgbClr val="F85800"/>
+          </a:solidFill>
+          <a:ln>
+            <a:noFill/>
+          </a:ln>
+          <a:effectLst/>
+        </p:spPr>
+        <p:style>
+          <a:lnRef idx="1">
+            <a:schemeClr val="accent1"/>
+          </a:lnRef>
+          <a:fillRef idx="3">
+            <a:schemeClr val="accent1"/>
+          </a:fillRef>
+          <a:effectRef idx="2">
+            <a:schemeClr val="accent1"/>
+          </a:effectRef>
+          <a:fontRef idx="minor">
+            <a:schemeClr val="lt1"/>
+          </a:fontRef>
+        </p:style>
+        <p:txBody>
+          <a:bodyPr rtlCol="0" anchor="ctr"/>
+          <a:lstStyle/>
+          <a:p>
+            <a:pPr algn="ctr"/>
+          </a:p>
+        </p:txBody>
+      </p:sp>
+      <p:sp>
+        <p:nvSpPr>
+          <p:cNvPr id="8" name="TextBox 7"/>
+          <p:cNvSpPr txBox="1"/>
+          <p:nvPr/>
+        </p:nvSpPr>
+        <p:spPr>
+          <a:xfrm>
+            <a:off x="914397" y="2511545"/>
+            <a:ext cx="10363174" cy="609598"/>
+          </a:xfrm>
+          <a:prstGeom prst="rect">
+            <a:avLst/>
+          </a:prstGeom>
+          <a:noFill/>
+        </p:spPr>
+        <p:txBody>
+          <a:bodyPr wrap="square" lIns="0" rIns="0" tIns="0" bIns="0">
+            <a:spAutoFit/>
+          </a:bodyPr>
+          <a:lstStyle/>
+          <a:p>
+            <a:pPr algn="ctr"/>
+            <a:r>
+              <a:rPr sz="1399" b="0">
+                <a:solidFill>
+                  <a:srgbClr val="C9BAB0"/>
+                </a:solidFill>
+                <a:latin typeface="Arial"/>
+              </a:rPr>
+              <a:t>Что даёт предпринимателю полный AI-цикл: исследование, стратегия, генерация текстов, картинок и видео,</a:t>
+            </a:r>
+          </a:p>
+          <a:p>
+            <a:pPr algn="ctr">
+              <a:spcBef>
+                <a:spcPts val="266"/>
+              </a:spcBef>
+            </a:pPr>
+            <a:r>
+              <a:rPr sz="1399" b="0">
+                <a:solidFill>
+                  <a:srgbClr val="C9BAB0"/>
+                </a:solidFill>
+                <a:latin typeface="Arial"/>
+              </a:rPr>
+              <a:t>автоматическая публикация на 6+ площадках. Продвижение в SEO и GEO.</a:t>
+            </a:r>
+          </a:p>
+        </p:txBody>
+      </p:sp>
+      <p:sp>
+        <p:nvSpPr>
+          <p:cNvPr id="9" name="Rounded Rectangle 8"/>
+          <p:cNvSpPr/>
+          <p:nvPr/>
+        </p:nvSpPr>
+        <p:spPr>
+          <a:xfrm>
+            <a:off x="731518" y="3047992"/>
+            <a:ext cx="3316215" cy="2072634"/>
+          </a:xfrm>
+          <a:prstGeom prst="roundRect">
+            <a:avLst>
+              <a:gd name="adj" fmla="val 10000"/>
+            </a:avLst>
+          </a:prstGeom>
+          <a:solidFill>
+            <a:srgbClr val="120A06"/>
+          </a:solidFill>
+          <a:ln w="25399">
+            <a:solidFill>
+              <a:srgbClr val="F85800"/>
+            </a:solidFill>
+          </a:ln>
+          <a:effectLst/>
+        </p:spPr>
+        <p:style>
+          <a:lnRef idx="1">
+            <a:schemeClr val="accent1"/>
+          </a:lnRef>
+          <a:fillRef idx="3">
+            <a:schemeClr val="accent1"/>
+          </a:fillRef>
+          <a:effectRef idx="2">
+            <a:schemeClr val="accent1"/>
+          </a:effectRef>
+          <a:fontRef idx="minor">
+            <a:schemeClr val="lt1"/>
+          </a:fontRef>
+        </p:style>
+        <p:txBody>
+          <a:bodyPr rtlCol="0" anchor="ctr" wrap="square" lIns="170687" rIns="170687" tIns="73151" bIns="73151"/>
+          <a:lstStyle/>
+          <a:p>
+            <a:pPr algn="l">
+              <a:lnSpc>
+                <a:spcPct val="95000"/>
+              </a:lnSpc>
+            </a:pPr>
+            <a:r>
+              <a:rPr sz="2399" b="1" spc="199">
+                <a:solidFill>
+                  <a:srgbClr val="F85800"/>
+                </a:solidFill>
+                <a:latin typeface="Arial"/>
+              </a:rPr>
+              <a:t>01</a:t>
+            </a:r>
+          </a:p>
+          <a:p>
+            <a:pPr algn="l">
+              <a:lnSpc>
+                <a:spcPct val="95000"/>
+              </a:lnSpc>
+              <a:spcBef>
+                <a:spcPts val="666"/>
+              </a:spcBef>
+            </a:pPr>
+            <a:r>
+              <a:rPr sz="1466" b="1" spc="66">
+                <a:solidFill>
+                  <a:srgbClr val="FFFFFF"/>
+                </a:solidFill>
+                <a:latin typeface="Arial"/>
+              </a:rPr>
+              <a:t>КАК НЕ ТРАТИТЬ ВРЕМЯ
+НА СММ</a:t>
+            </a:r>
+          </a:p>
+          <a:p>
+            <a:pPr algn="l">
+              <a:lnSpc>
+                <a:spcPct val="95000"/>
+              </a:lnSpc>
+              <a:spcBef>
+                <a:spcPts val="799"/>
+              </a:spcBef>
+            </a:pPr>
+            <a:r>
+              <a:rPr sz="1133" b="0">
+                <a:solidFill>
+                  <a:srgbClr val="9A8C84"/>
+                </a:solidFill>
+                <a:latin typeface="Arial"/>
+              </a:rPr>
+              <a:t>Контент-заводы есть у всех.
+Но процессом управляет человек:
+проверки, правки, публикация.
+Мы отдаём весь цикл ИИ.</a:t>
+            </a:r>
+          </a:p>
+        </p:txBody>
+      </p:sp>
+      <p:sp>
+        <p:nvSpPr>
+          <p:cNvPr id="10" name="Rounded Rectangle 9"/>
+          <p:cNvSpPr/>
+          <p:nvPr/>
+        </p:nvSpPr>
+        <p:spPr>
+          <a:xfrm>
+            <a:off x="4437876" y="3047992"/>
+            <a:ext cx="3316215" cy="2072634"/>
+          </a:xfrm>
+          <a:prstGeom prst="roundRect">
+            <a:avLst>
+              <a:gd name="adj" fmla="val 10000"/>
+            </a:avLst>
+          </a:prstGeom>
+          <a:solidFill>
+            <a:srgbClr val="120A06"/>
+          </a:solidFill>
+          <a:ln w="25399">
+            <a:solidFill>
+              <a:srgbClr val="F85800"/>
+            </a:solidFill>
+          </a:ln>
+          <a:effectLst/>
+        </p:spPr>
+        <p:style>
+          <a:lnRef idx="1">
+            <a:schemeClr val="accent1"/>
+          </a:lnRef>
+          <a:fillRef idx="3">
+            <a:schemeClr val="accent1"/>
+          </a:fillRef>
+          <a:effectRef idx="2">
+            <a:schemeClr val="accent1"/>
+          </a:effectRef>
+          <a:fontRef idx="minor">
+            <a:schemeClr val="lt1"/>
+          </a:fontRef>
+        </p:style>
+        <p:txBody>
+          <a:bodyPr rtlCol="0" anchor="ctr" wrap="square" lIns="170687" rIns="170687" tIns="73151" bIns="73151"/>
+          <a:lstStyle/>
+          <a:p>
+            <a:pPr algn="l">
+              <a:lnSpc>
+                <a:spcPct val="95000"/>
+              </a:lnSpc>
+            </a:pPr>
+            <a:r>
+              <a:rPr sz="2399" b="1" spc="199">
+                <a:solidFill>
+                  <a:srgbClr val="F85800"/>
+                </a:solidFill>
+                <a:latin typeface="Arial"/>
+              </a:rPr>
+              <a:t>02</a:t>
+            </a:r>
+          </a:p>
+          <a:p>
+            <a:pPr algn="l">
+              <a:lnSpc>
+                <a:spcPct val="95000"/>
+              </a:lnSpc>
+              <a:spcBef>
+                <a:spcPts val="666"/>
+              </a:spcBef>
+            </a:pPr>
+            <a:r>
+              <a:rPr sz="1466" b="1" spc="66">
+                <a:solidFill>
+                  <a:srgbClr val="FFFFFF"/>
+                </a:solidFill>
+                <a:latin typeface="Arial"/>
+              </a:rPr>
+              <a:t>КАК ЭКОНОМИТЬ
+ОТ 70 000 ₽ В МЕСЯЦ</a:t>
+            </a:r>
+          </a:p>
+          <a:p>
+            <a:pPr algn="l">
+              <a:lnSpc>
+                <a:spcPct val="95000"/>
+              </a:lnSpc>
+              <a:spcBef>
+                <a:spcPts val="799"/>
+              </a:spcBef>
+            </a:pPr>
+            <a:r>
+              <a:rPr sz="1133" b="0">
+                <a:solidFill>
+                  <a:srgbClr val="9A8C84"/>
+                </a:solidFill>
+                <a:latin typeface="Arial"/>
+              </a:rPr>
+              <a:t>Без агентства, без токенов
+и борьбы с блокировками.
+Готовый сервис за фиксированную
+плату при сравнимом эффекте.</a:t>
+            </a:r>
+          </a:p>
+        </p:txBody>
+      </p:sp>
+      <p:sp>
+        <p:nvSpPr>
+          <p:cNvPr id="11" name="Rounded Rectangle 10"/>
+          <p:cNvSpPr/>
+          <p:nvPr/>
+        </p:nvSpPr>
+        <p:spPr>
+          <a:xfrm>
+            <a:off x="8144235" y="3047992"/>
+            <a:ext cx="3316215" cy="2072634"/>
+          </a:xfrm>
+          <a:prstGeom prst="roundRect">
+            <a:avLst>
+              <a:gd name="adj" fmla="val 10000"/>
+            </a:avLst>
+          </a:prstGeom>
+          <a:solidFill>
+            <a:srgbClr val="120A06"/>
+          </a:solidFill>
+          <a:ln w="25399">
+            <a:solidFill>
+              <a:srgbClr val="F85800"/>
+            </a:solidFill>
+          </a:ln>
+          <a:effectLst/>
+        </p:spPr>
+        <p:style>
+          <a:lnRef idx="1">
+            <a:schemeClr val="accent1"/>
+          </a:lnRef>
+          <a:fillRef idx="3">
+            <a:schemeClr val="accent1"/>
+          </a:fillRef>
+          <a:effectRef idx="2">
+            <a:schemeClr val="accent1"/>
+          </a:effectRef>
+          <a:fontRef idx="minor">
+            <a:schemeClr val="lt1"/>
+          </a:fontRef>
+        </p:style>
+        <p:txBody>
+          <a:bodyPr rtlCol="0" anchor="ctr" wrap="square" lIns="170687" rIns="170687" tIns="73151" bIns="73151"/>
+          <a:lstStyle/>
+          <a:p>
+            <a:pPr algn="l">
+              <a:lnSpc>
+                <a:spcPct val="95000"/>
+              </a:lnSpc>
+            </a:pPr>
+            <a:r>
+              <a:rPr sz="2399" b="1" spc="199">
+                <a:solidFill>
+                  <a:srgbClr val="F85800"/>
+                </a:solidFill>
+                <a:latin typeface="Arial"/>
+              </a:rPr>
+              <a:t>03</a:t>
+            </a:r>
+          </a:p>
+          <a:p>
+            <a:pPr algn="l">
+              <a:lnSpc>
+                <a:spcPct val="95000"/>
+              </a:lnSpc>
+              <a:spcBef>
+                <a:spcPts val="666"/>
+              </a:spcBef>
+            </a:pPr>
+            <a:r>
+              <a:rPr sz="1466" b="1" spc="66">
+                <a:solidFill>
+                  <a:srgbClr val="FFFFFF"/>
+                </a:solidFill>
+                <a:latin typeface="Arial"/>
+              </a:rPr>
+              <a:t>КАК ПОПАСТЬ
+В НЕЙРОВЫДАЧУ</a:t>
+            </a:r>
+          </a:p>
+          <a:p>
+            <a:pPr algn="l">
+              <a:lnSpc>
+                <a:spcPct val="95000"/>
+              </a:lnSpc>
+              <a:spcBef>
+                <a:spcPts val="799"/>
+              </a:spcBef>
+            </a:pPr>
+            <a:r>
+              <a:rPr sz="1133" b="0">
+                <a:solidFill>
+                  <a:srgbClr val="9A8C84"/>
+                </a:solidFill>
+                <a:latin typeface="Arial"/>
+              </a:rPr>
+              <a:t>GEO стоит доверить ИИ, срок —
+от 3 до 6 месяцев. При экономии
+времени и денег. Маркировать
+ИИ-контент сейчас не требуется.</a:t>
+            </a:r>
+          </a:p>
+        </p:txBody>
+      </p:sp>
+      <p:sp>
+        <p:nvSpPr>
+          <p:cNvPr id="12" name="Rounded Rectangle 11"/>
+          <p:cNvSpPr/>
+          <p:nvPr/>
+        </p:nvSpPr>
+        <p:spPr>
+          <a:xfrm>
+            <a:off x="731518" y="5340082"/>
+            <a:ext cx="10728933" cy="950973"/>
+          </a:xfrm>
+          <a:prstGeom prst="roundRect">
+            <a:avLst>
+              <a:gd name="adj" fmla="val 28000"/>
+            </a:avLst>
+          </a:prstGeom>
+          <a:solidFill>
+            <a:srgbClr val="120A06"/>
+          </a:solidFill>
+          <a:ln w="33866">
+            <a:solidFill>
+              <a:srgbClr val="F85800"/>
+            </a:solidFill>
+          </a:ln>
+          <a:effectLst/>
+        </p:spPr>
+        <p:style>
+          <a:lnRef idx="1">
+            <a:schemeClr val="accent1"/>
+          </a:lnRef>
+          <a:fillRef idx="3">
+            <a:schemeClr val="accent1"/>
+          </a:fillRef>
+          <a:effectRef idx="2">
+            <a:schemeClr val="accent1"/>
+          </a:effectRef>
+          <a:fontRef idx="minor">
+            <a:schemeClr val="lt1"/>
+          </a:fontRef>
+        </p:style>
+        <p:txBody>
+          <a:bodyPr rtlCol="0" anchor="ctr" wrap="square"/>
+          <a:lstStyle/>
+          <a:p>
+            <a:pPr algn="ctr"/>
+            <a:r>
+              <a:rPr sz="1733" b="1" spc="133">
+                <a:solidFill>
+                  <a:srgbClr val="FFFFFF"/>
+                </a:solidFill>
+                <a:latin typeface="Arial"/>
+              </a:rPr>
+              <a:t>РУСЛАН ДЕМИН — УПРАВЛЯЮЩИЙ ПАРТНЁР</a:t>
+            </a:r>
+          </a:p>
+          <a:p>
+            <a:pPr algn="ctr">
+              <a:spcBef>
+                <a:spcPts val="533"/>
+              </a:spcBef>
+            </a:pPr>
+            <a:r>
+              <a:rPr sz="1466" b="1">
+                <a:solidFill>
+                  <a:srgbClr val="F85800"/>
+                </a:solidFill>
+                <a:latin typeface="Arial"/>
+              </a:rPr>
+              <a:t>+7 906 758-77-77</a:t>
+            </a:r>
+            <a:r>
+              <a:rPr sz="1466" b="1">
+                <a:solidFill>
+                  <a:srgbClr val="9A8C84"/>
+                </a:solidFill>
+                <a:latin typeface="Arial"/>
+              </a:rPr>
+              <a:t>   ·   </a:t>
+            </a:r>
+            <a:r>
+              <a:rPr sz="1466" b="1">
+                <a:solidFill>
+                  <a:srgbClr val="F85800"/>
+                </a:solidFill>
+                <a:latin typeface="Arial"/>
+              </a:rPr>
+              <a:t>prompter.moscow@mail.ru</a:t>
+            </a:r>
+            <a:r>
+              <a:rPr sz="1466" b="1">
+                <a:solidFill>
+                  <a:srgbClr val="9A8C84"/>
+                </a:solidFill>
+                <a:latin typeface="Arial"/>
+              </a:rPr>
+              <a:t>   ·   </a:t>
+            </a:r>
+            <a:r>
+              <a:rPr sz="1466" b="1">
+                <a:solidFill>
+                  <a:srgbClr val="F85800"/>
+                </a:solidFill>
+                <a:latin typeface="Arial"/>
+              </a:rPr>
+              <a:t>@geniimoscow</a:t>
+            </a:r>
+          </a:p>
+        </p:txBody>
+      </p:sp>
     </p:spTree>
   </p:cSld>
   <p:clrMapOvr>
@@ -5921,7 +7892,7 @@
       <p:grpSpPr/>
       <p:pic>
         <p:nvPicPr>
-          <p:cNvPr id="2" name="Picture 1" descr="s06.jpg"/>
+          <p:cNvPr id="2" name="Picture 1" descr="s01.jpg"/>
           <p:cNvPicPr>
             <a:picLocks noChangeAspect="1"/>
           </p:cNvPicPr>
@@ -5936,7 +7907,7 @@
         <p:spPr>
           <a:xfrm>
             <a:off x="0" y="0"/>
-            <a:ext cx="9144000" cy="5143500"/>
+            <a:ext cx="12191695" cy="6858000"/>
           </a:xfrm>
           <a:prstGeom prst="rect">
             <a:avLst/>
@@ -5963,7 +7934,7 @@
       <p:grpSpPr/>
       <p:pic>
         <p:nvPicPr>
-          <p:cNvPr id="2" name="Picture 1" descr="s07.jpg"/>
+          <p:cNvPr id="2" name="Picture 1" descr="s02.jpg"/>
           <p:cNvPicPr>
             <a:picLocks noChangeAspect="1"/>
           </p:cNvPicPr>
@@ -5978,7 +7949,7 @@
         <p:spPr>
           <a:xfrm>
             <a:off x="0" y="0"/>
-            <a:ext cx="9144000" cy="5143500"/>
+            <a:ext cx="12191695" cy="6858000"/>
           </a:xfrm>
           <a:prstGeom prst="rect">
             <a:avLst/>
@@ -6005,7 +7976,7 @@
       <p:grpSpPr/>
       <p:pic>
         <p:nvPicPr>
-          <p:cNvPr id="2" name="Picture 1" descr="s08.jpg"/>
+          <p:cNvPr id="2" name="Picture 1" descr="s03.jpg"/>
           <p:cNvPicPr>
             <a:picLocks noChangeAspect="1"/>
           </p:cNvPicPr>
@@ -6020,7 +7991,7 @@
         <p:spPr>
           <a:xfrm>
             <a:off x="0" y="0"/>
-            <a:ext cx="9144000" cy="5143500"/>
+            <a:ext cx="12191695" cy="6858000"/>
           </a:xfrm>
           <a:prstGeom prst="rect">
             <a:avLst/>

--- a/prompter-moscow/presentation/prompter-konferenciya-2026.pptx
+++ b/prompter-moscow/presentation/prompter-konferenciya-2026.pptx
@@ -3740,7 +3740,7 @@
               </a:lnSpc>
             </a:pPr>
             <a:r>
-              <a:rPr sz="950" b="0">
+              <a:rPr sz="1100" b="0">
                 <a:solidFill>
                   <a:srgbClr val="A2978E"/>
                 </a:solidFill>
@@ -3779,7 +3779,7 @@
               </a:lnSpc>
             </a:pPr>
             <a:r>
-              <a:rPr sz="950" b="0">
+              <a:rPr sz="1100" b="0">
                 <a:solidFill>
                   <a:srgbClr val="A2978E"/>
                 </a:solidFill>
@@ -3818,7 +3818,7 @@
               </a:lnSpc>
             </a:pPr>
             <a:r>
-              <a:rPr sz="1000" b="0">
+              <a:rPr sz="1200" b="0">
                 <a:solidFill>
                   <a:srgbClr val="A2978E"/>
                 </a:solidFill>
@@ -3940,7 +3940,7 @@
               </a:lnSpc>
             </a:pPr>
             <a:r>
-              <a:rPr sz="1500" b="1">
+              <a:rPr sz="1700" b="1">
                 <a:solidFill>
                   <a:srgbClr val="FF8A3D"/>
                 </a:solidFill>
@@ -3949,7 +3949,7 @@
               <a:t>Руслан Анатольевич Дёмин, </a:t>
             </a:r>
             <a:r>
-              <a:rPr sz="1500" b="0">
+              <a:rPr sz="1700" b="0">
                 <a:solidFill>
                   <a:srgbClr val="A2978E"/>
                 </a:solidFill>
@@ -4032,61 +4032,22 @@
               </a:lnSpc>
             </a:pPr>
             <a:r>
-              <a:rPr sz="1800" b="0">
+              <a:rPr sz="2000" b="0">
                 <a:solidFill>
                   <a:srgbClr val="A2978E"/>
                 </a:solidFill>
                 <a:latin typeface="Inter"/>
               </a:rPr>
-              <a:t>Исследование · Стратегия · Генерация</a:t>
-            </a:r>
-            <a:r>
-              <a:rPr sz="1800" b="1">
+              <a:t>Исследование · Стратегия · Генерация · Проверка · Публикация · Анализ</a:t>
+            </a:r>
+            <a:r>
+              <a:rPr sz="2000" b="0">
                 <a:solidFill>
                   <a:srgbClr val="FFFFFF"/>
                 </a:solidFill>
                 <a:latin typeface="Inter"/>
               </a:rPr>
-              <a:t>      Проверка · Публикация · Анализ</a:t>
-            </a:r>
-          </a:p>
-        </p:txBody>
-      </p:sp>
-      <p:sp>
-        <p:nvSpPr>
-          <p:cNvPr id="14" name="TextBox 13"/>
-          <p:cNvSpPr txBox="1"/>
-          <p:nvPr/>
-        </p:nvSpPr>
-        <p:spPr>
-          <a:xfrm>
-            <a:off x="685800" y="5943600"/>
-            <a:ext cx="10820095" cy="313182"/>
-          </a:xfrm>
-          <a:prstGeom prst="rect">
-            <a:avLst/>
-          </a:prstGeom>
-          <a:noFill/>
-        </p:spPr>
-        <p:txBody>
-          <a:bodyPr wrap="square" lIns="0" rIns="0" tIns="0" bIns="0" anchor="t">
-            <a:spAutoFit/>
-          </a:bodyPr>
-          <a:lstStyle/>
-          <a:p>
-            <a:pPr algn="l">
-              <a:lnSpc>
-                <a:spcPct val="135000"/>
-              </a:lnSpc>
-            </a:pPr>
-            <a:r>
-              <a:rPr sz="1400" b="0">
-                <a:solidFill>
-                  <a:srgbClr val="A2978E"/>
-                </a:solidFill>
-                <a:latin typeface="Inter"/>
-              </a:rPr>
-              <a:t>Светлым — то, что почти везде до сих пор делает человек</a:t>
+              <a:t/>
             </a:r>
           </a:p>
         </p:txBody>
@@ -5283,7 +5244,7 @@
               </a:lnSpc>
             </a:pPr>
             <a:r>
-              <a:rPr sz="950" b="0">
+              <a:rPr sz="1100" b="0">
                 <a:solidFill>
                   <a:srgbClr val="A2978E"/>
                 </a:solidFill>
@@ -5322,7 +5283,7 @@
               </a:lnSpc>
             </a:pPr>
             <a:r>
-              <a:rPr sz="950" b="0">
+              <a:rPr sz="1100" b="0">
                 <a:solidFill>
                   <a:srgbClr val="A2978E"/>
                 </a:solidFill>
@@ -5361,7 +5322,7 @@
               </a:lnSpc>
             </a:pPr>
             <a:r>
-              <a:rPr sz="1000" b="0">
+              <a:rPr sz="1200" b="0">
                 <a:solidFill>
                   <a:srgbClr val="A2978E"/>
                 </a:solidFill>
@@ -5406,7 +5367,7 @@
                 </a:solidFill>
                 <a:latin typeface="Unbounded"/>
               </a:rPr>
-              <a:t>«Предприниматель тратит на соцсети не деньги, а своё время — самый дорогой ресурс в компании»</a:t>
+              <a:t>«Предприниматель тратит на соцсети не только деньги, но и своё время — а это тоже ценный ресурс компании»</a:t>
             </a:r>
           </a:p>
         </p:txBody>
@@ -5483,7 +5444,7 @@
               </a:lnSpc>
             </a:pPr>
             <a:r>
-              <a:rPr sz="1500" b="1">
+              <a:rPr sz="1700" b="1">
                 <a:solidFill>
                   <a:srgbClr val="FF8A3D"/>
                 </a:solidFill>
@@ -5492,7 +5453,7 @@
               <a:t>Руслан Анатольевич Дёмин, </a:t>
             </a:r>
             <a:r>
-              <a:rPr sz="1500" b="0">
+              <a:rPr sz="1700" b="0">
                 <a:solidFill>
                   <a:srgbClr val="A2978E"/>
                 </a:solidFill>
@@ -5575,7 +5536,7 @@
               </a:lnSpc>
             </a:pPr>
             <a:r>
-              <a:rPr sz="1700" b="0">
+              <a:rPr sz="1900" b="0">
                 <a:solidFill>
                   <a:srgbClr val="A2978E"/>
                 </a:solidFill>
@@ -5748,7 +5709,7 @@
               </a:lnSpc>
             </a:pPr>
             <a:r>
-              <a:rPr sz="950" b="0">
+              <a:rPr sz="1100" b="0">
                 <a:solidFill>
                   <a:srgbClr val="A2978E"/>
                 </a:solidFill>
@@ -5787,7 +5748,7 @@
               </a:lnSpc>
             </a:pPr>
             <a:r>
-              <a:rPr sz="950" b="0">
+              <a:rPr sz="1100" b="0">
                 <a:solidFill>
                   <a:srgbClr val="A2978E"/>
                 </a:solidFill>
@@ -5826,7 +5787,7 @@
               </a:lnSpc>
             </a:pPr>
             <a:r>
-              <a:rPr sz="1000" b="0">
+              <a:rPr sz="1200" b="0">
                 <a:solidFill>
                   <a:srgbClr val="A2978E"/>
                 </a:solidFill>
@@ -5904,7 +5865,7 @@
               </a:lnSpc>
             </a:pPr>
             <a:r>
-              <a:rPr sz="1600" b="0">
+              <a:rPr sz="1800" b="0">
                 <a:solidFill>
                   <a:srgbClr val="DED6CF"/>
                 </a:solidFill>
@@ -6026,7 +5987,7 @@
               </a:lnSpc>
             </a:pPr>
             <a:r>
-              <a:rPr sz="1500" b="1">
+              <a:rPr sz="1700" b="1">
                 <a:solidFill>
                   <a:srgbClr val="FF8A3D"/>
                 </a:solidFill>
@@ -6035,7 +5996,7 @@
               <a:t>Руслан Анатольевич Дёмин, </a:t>
             </a:r>
             <a:r>
-              <a:rPr sz="1500" b="0">
+              <a:rPr sz="1700" b="0">
                 <a:solidFill>
                   <a:srgbClr val="A2978E"/>
                 </a:solidFill>
@@ -6208,7 +6169,7 @@
               </a:lnSpc>
             </a:pPr>
             <a:r>
-              <a:rPr sz="950" b="0">
+              <a:rPr sz="1100" b="0">
                 <a:solidFill>
                   <a:srgbClr val="A2978E"/>
                 </a:solidFill>
@@ -6247,7 +6208,7 @@
               </a:lnSpc>
             </a:pPr>
             <a:r>
-              <a:rPr sz="950" b="0">
+              <a:rPr sz="1100" b="0">
                 <a:solidFill>
                   <a:srgbClr val="A2978E"/>
                 </a:solidFill>
@@ -6286,7 +6247,7 @@
               </a:lnSpc>
             </a:pPr>
             <a:r>
-              <a:rPr sz="1000" b="0">
+              <a:rPr sz="1200" b="0">
                 <a:solidFill>
                   <a:srgbClr val="A2978E"/>
                 </a:solidFill>
@@ -6364,7 +6325,7 @@
               </a:lnSpc>
             </a:pPr>
             <a:r>
-              <a:rPr sz="1600" b="0">
+              <a:rPr sz="1800" b="0">
                 <a:solidFill>
                   <a:srgbClr val="DED6CF"/>
                 </a:solidFill>
@@ -6447,7 +6408,7 @@
               </a:lnSpc>
             </a:pPr>
             <a:r>
-              <a:rPr sz="1500" b="1">
+              <a:rPr sz="1700" b="1">
                 <a:solidFill>
                   <a:srgbClr val="DED6CF"/>
                 </a:solidFill>
@@ -6456,7 +6417,7 @@
               <a:t>Маркировать фото и видео как созданные ИИ закон сегодня не требует. </a:t>
             </a:r>
             <a:r>
-              <a:rPr sz="1500" b="0">
+              <a:rPr sz="1700" b="0">
                 <a:solidFill>
                   <a:srgbClr val="A2978E"/>
                 </a:solidFill>
@@ -6578,7 +6539,7 @@
               </a:lnSpc>
             </a:pPr>
             <a:r>
-              <a:rPr sz="1500" b="1">
+              <a:rPr sz="1700" b="1">
                 <a:solidFill>
                   <a:srgbClr val="FF8A3D"/>
                 </a:solidFill>
@@ -6587,7 +6548,7 @@
               <a:t>Руслан Анатольевич Дёмин, </a:t>
             </a:r>
             <a:r>
-              <a:rPr sz="1500" b="0">
+              <a:rPr sz="1700" b="0">
                 <a:solidFill>
                   <a:srgbClr val="A2978E"/>
                 </a:solidFill>
@@ -6760,7 +6721,7 @@
               </a:lnSpc>
             </a:pPr>
             <a:r>
-              <a:rPr sz="950" b="0">
+              <a:rPr sz="1100" b="0">
                 <a:solidFill>
                   <a:srgbClr val="A2978E"/>
                 </a:solidFill>
@@ -6799,7 +6760,7 @@
               </a:lnSpc>
             </a:pPr>
             <a:r>
-              <a:rPr sz="950" b="0">
+              <a:rPr sz="1100" b="0">
                 <a:solidFill>
                   <a:srgbClr val="A2978E"/>
                 </a:solidFill>
@@ -6838,7 +6799,7 @@
               </a:lnSpc>
             </a:pPr>
             <a:r>
-              <a:rPr sz="1000" b="0">
+              <a:rPr sz="1200" b="0">
                 <a:solidFill>
                   <a:srgbClr val="A2978E"/>
                 </a:solidFill>
@@ -6901,7 +6862,7 @@
               </a:lnSpc>
             </a:pPr>
             <a:r>
-              <a:rPr sz="1700" b="1">
+              <a:rPr sz="1900" b="1">
                 <a:solidFill>
                   <a:srgbClr val="FFFFFF"/>
                 </a:solidFill>
@@ -6940,7 +6901,7 @@
               </a:lnSpc>
             </a:pPr>
             <a:r>
-              <a:rPr sz="1400" b="0">
+              <a:rPr sz="1600" b="0">
                 <a:solidFill>
                   <a:srgbClr val="FF8A3D"/>
                 </a:solidFill>
@@ -7018,7 +6979,7 @@
               </a:lnSpc>
             </a:pPr>
             <a:r>
-              <a:rPr sz="1800" b="0">
+              <a:rPr sz="2000" b="0">
                 <a:solidFill>
                   <a:srgbClr val="DED6CF"/>
                 </a:solidFill>
@@ -7057,7 +7018,7 @@
               </a:lnSpc>
             </a:pPr>
             <a:r>
-              <a:rPr sz="1800" b="0">
+              <a:rPr sz="2000" b="0">
                 <a:solidFill>
                   <a:srgbClr val="DED6CF"/>
                 </a:solidFill>
@@ -7140,7 +7101,7 @@
               </a:lnSpc>
             </a:pPr>
             <a:r>
-              <a:rPr sz="1900" b="1">
+              <a:rPr sz="2100" b="1">
                 <a:solidFill>
                   <a:srgbClr val="FFFFFF"/>
                 </a:solidFill>
@@ -7179,7 +7140,7 @@
               </a:lnSpc>
             </a:pPr>
             <a:r>
-              <a:rPr sz="1250" b="0">
+              <a:rPr sz="1300" b="0">
                 <a:solidFill>
                   <a:srgbClr val="A2978E"/>
                 </a:solidFill>
@@ -7188,7 +7149,7 @@
               <a:t>Руслан Анатольевич Дёмин, управляющий партнёр</a:t>
             </a:r>
             <a:r>
-              <a:rPr sz="1250" b="0">
+              <a:rPr sz="1300" b="0">
                 <a:solidFill>
                   <a:srgbClr val="A2978E"/>
                 </a:solidFill>
